--- a/1.6 Ethernet Basic/1.6 Ethernet Basic.pptx
+++ b/1.6 Ethernet Basic/1.6 Ethernet Basic.pptx
@@ -16,6 +16,12 @@
     <p:sldId id="264" r:id="rId10"/>
     <p:sldId id="265" r:id="rId11"/>
     <p:sldId id="266" r:id="rId12"/>
+    <p:sldId id="267" r:id="rId13"/>
+    <p:sldId id="268" r:id="rId14"/>
+    <p:sldId id="269" r:id="rId15"/>
+    <p:sldId id="270" r:id="rId16"/>
+    <p:sldId id="271" r:id="rId17"/>
+    <p:sldId id="272" r:id="rId18"/>
   </p:sldIdLst>
   <p:sldSz cx="12192000" cy="6858000"/>
   <p:notesSz cx="6858000" cy="9144000"/>
@@ -114,6 +120,11 @@
       </a:defRPr>
     </a:lvl9pPr>
   </p:defaultTextStyle>
+  <p:extLst>
+    <p:ext uri="{EFAFB233-063F-42B5-8137-9DF3F51BA10A}">
+      <p15:sldGuideLst xmlns:p15="http://schemas.microsoft.com/office/powerpoint/2012/main"/>
+    </p:ext>
+  </p:extLst>
 </p:presentation>
 </file>
 
@@ -174,7 +185,7 @@
           <a:noFill/>
           <a:extLst>
             <a:ext uri="{909E8E84-426E-40dd-AFC4-6F175D3DCCD1}">
-              <a14:hiddenFill xmlns:a14="http://schemas.microsoft.com/office/drawing/2010/main" xmlns="">
+              <a14:hiddenFill xmlns="" xmlns:a14="http://schemas.microsoft.com/office/drawing/2010/main">
                 <a:solidFill>
                   <a:srgbClr val="FFFFFF"/>
                 </a:solidFill>
@@ -233,7 +244,7 @@
             </a:ln>
             <a:extLst>
               <a:ext uri="{91240B29-F687-4f45-9708-019B960494DF}">
-                <a14:hiddenLine xmlns:a14="http://schemas.microsoft.com/office/drawing/2010/main" xmlns="" w="9525">
+                <a14:hiddenLine xmlns="" xmlns:a14="http://schemas.microsoft.com/office/drawing/2010/main" w="9525">
                   <a:solidFill>
                     <a:srgbClr val="000000"/>
                   </a:solidFill>
@@ -323,7 +334,7 @@
             </a:ln>
             <a:extLst>
               <a:ext uri="{91240B29-F687-4f45-9708-019B960494DF}">
-                <a14:hiddenLine xmlns:a14="http://schemas.microsoft.com/office/drawing/2010/main" xmlns="" w="9525">
+                <a14:hiddenLine xmlns="" xmlns:a14="http://schemas.microsoft.com/office/drawing/2010/main" w="9525">
                   <a:solidFill>
                     <a:srgbClr val="000000"/>
                   </a:solidFill>
@@ -413,7 +424,7 @@
             </a:ln>
             <a:extLst>
               <a:ext uri="{91240B29-F687-4f45-9708-019B960494DF}">
-                <a14:hiddenLine xmlns:a14="http://schemas.microsoft.com/office/drawing/2010/main" xmlns="" w="9525">
+                <a14:hiddenLine xmlns="" xmlns:a14="http://schemas.microsoft.com/office/drawing/2010/main" w="9525">
                   <a:solidFill>
                     <a:srgbClr val="000000"/>
                   </a:solidFill>
@@ -447,7 +458,7 @@
             </a:ln>
             <a:extLst>
               <a:ext uri="{91240B29-F687-4f45-9708-019B960494DF}">
-                <a14:hiddenLine xmlns:a14="http://schemas.microsoft.com/office/drawing/2010/main" xmlns="" w="9525">
+                <a14:hiddenLine xmlns="" xmlns:a14="http://schemas.microsoft.com/office/drawing/2010/main" w="9525">
                   <a:solidFill>
                     <a:srgbClr val="000000"/>
                   </a:solidFill>
@@ -537,7 +548,7 @@
             </a:ln>
             <a:extLst>
               <a:ext uri="{91240B29-F687-4f45-9708-019B960494DF}">
-                <a14:hiddenLine xmlns:a14="http://schemas.microsoft.com/office/drawing/2010/main" xmlns="" w="9525">
+                <a14:hiddenLine xmlns="" xmlns:a14="http://schemas.microsoft.com/office/drawing/2010/main" w="9525">
                   <a:solidFill>
                     <a:srgbClr val="000000"/>
                   </a:solidFill>
@@ -599,7 +610,7 @@
             </a:ln>
             <a:extLst>
               <a:ext uri="{91240B29-F687-4f45-9708-019B960494DF}">
-                <a14:hiddenLine xmlns:a14="http://schemas.microsoft.com/office/drawing/2010/main" xmlns="" w="9525">
+                <a14:hiddenLine xmlns="" xmlns:a14="http://schemas.microsoft.com/office/drawing/2010/main" w="9525">
                   <a:solidFill>
                     <a:srgbClr val="000000"/>
                   </a:solidFill>
@@ -661,7 +672,7 @@
             </a:ln>
             <a:extLst>
               <a:ext uri="{91240B29-F687-4f45-9708-019B960494DF}">
-                <a14:hiddenLine xmlns:a14="http://schemas.microsoft.com/office/drawing/2010/main" xmlns="" w="9525">
+                <a14:hiddenLine xmlns="" xmlns:a14="http://schemas.microsoft.com/office/drawing/2010/main" w="9525">
                   <a:solidFill>
                     <a:srgbClr val="000000"/>
                   </a:solidFill>
@@ -751,7 +762,7 @@
             </a:ln>
             <a:extLst>
               <a:ext uri="{91240B29-F687-4f45-9708-019B960494DF}">
-                <a14:hiddenLine xmlns:a14="http://schemas.microsoft.com/office/drawing/2010/main" xmlns="" w="9525">
+                <a14:hiddenLine xmlns="" xmlns:a14="http://schemas.microsoft.com/office/drawing/2010/main" w="9525">
                   <a:solidFill>
                     <a:srgbClr val="000000"/>
                   </a:solidFill>
@@ -813,7 +824,7 @@
             </a:ln>
             <a:extLst>
               <a:ext uri="{91240B29-F687-4f45-9708-019B960494DF}">
-                <a14:hiddenLine xmlns:a14="http://schemas.microsoft.com/office/drawing/2010/main" xmlns="" w="9525">
+                <a14:hiddenLine xmlns="" xmlns:a14="http://schemas.microsoft.com/office/drawing/2010/main" w="9525">
                   <a:solidFill>
                     <a:srgbClr val="000000"/>
                   </a:solidFill>
@@ -875,7 +886,7 @@
             </a:ln>
             <a:extLst>
               <a:ext uri="{91240B29-F687-4f45-9708-019B960494DF}">
-                <a14:hiddenLine xmlns:a14="http://schemas.microsoft.com/office/drawing/2010/main" xmlns="" w="9525">
+                <a14:hiddenLine xmlns="" xmlns:a14="http://schemas.microsoft.com/office/drawing/2010/main" w="9525">
                   <a:solidFill>
                     <a:srgbClr val="000000"/>
                   </a:solidFill>
@@ -965,7 +976,7 @@
             </a:ln>
             <a:extLst>
               <a:ext uri="{91240B29-F687-4f45-9708-019B960494DF}">
-                <a14:hiddenLine xmlns:a14="http://schemas.microsoft.com/office/drawing/2010/main" xmlns="" w="9525">
+                <a14:hiddenLine xmlns="" xmlns:a14="http://schemas.microsoft.com/office/drawing/2010/main" w="9525">
                   <a:solidFill>
                     <a:srgbClr val="000000"/>
                   </a:solidFill>
@@ -1055,7 +1066,7 @@
             </a:ln>
             <a:extLst>
               <a:ext uri="{91240B29-F687-4f45-9708-019B960494DF}">
-                <a14:hiddenLine xmlns:a14="http://schemas.microsoft.com/office/drawing/2010/main" xmlns="" w="9525">
+                <a14:hiddenLine xmlns="" xmlns:a14="http://schemas.microsoft.com/office/drawing/2010/main" w="9525">
                   <a:solidFill>
                     <a:srgbClr val="000000"/>
                   </a:solidFill>
@@ -1117,7 +1128,7 @@
             </a:ln>
             <a:extLst>
               <a:ext uri="{91240B29-F687-4f45-9708-019B960494DF}">
-                <a14:hiddenLine xmlns:a14="http://schemas.microsoft.com/office/drawing/2010/main" xmlns="" w="9525">
+                <a14:hiddenLine xmlns="" xmlns:a14="http://schemas.microsoft.com/office/drawing/2010/main" w="9525">
                   <a:solidFill>
                     <a:srgbClr val="000000"/>
                   </a:solidFill>
@@ -1227,7 +1238,7 @@
             </a:ln>
             <a:extLst>
               <a:ext uri="{91240B29-F687-4f45-9708-019B960494DF}">
-                <a14:hiddenLine xmlns:a14="http://schemas.microsoft.com/office/drawing/2010/main" xmlns="" w="9525">
+                <a14:hiddenLine xmlns="" xmlns:a14="http://schemas.microsoft.com/office/drawing/2010/main" w="9525">
                   <a:solidFill>
                     <a:srgbClr val="000000"/>
                   </a:solidFill>
@@ -1289,7 +1300,7 @@
             </a:ln>
             <a:extLst>
               <a:ext uri="{91240B29-F687-4f45-9708-019B960494DF}">
-                <a14:hiddenLine xmlns:a14="http://schemas.microsoft.com/office/drawing/2010/main" xmlns="" w="9525">
+                <a14:hiddenLine xmlns="" xmlns:a14="http://schemas.microsoft.com/office/drawing/2010/main" w="9525">
                   <a:solidFill>
                     <a:srgbClr val="000000"/>
                   </a:solidFill>
@@ -1379,7 +1390,7 @@
             </a:ln>
             <a:extLst>
               <a:ext uri="{91240B29-F687-4f45-9708-019B960494DF}">
-                <a14:hiddenLine xmlns:a14="http://schemas.microsoft.com/office/drawing/2010/main" xmlns="" w="9525">
+                <a14:hiddenLine xmlns="" xmlns:a14="http://schemas.microsoft.com/office/drawing/2010/main" w="9525">
                   <a:solidFill>
                     <a:srgbClr val="000000"/>
                   </a:solidFill>
@@ -1469,7 +1480,7 @@
             </a:ln>
             <a:extLst>
               <a:ext uri="{91240B29-F687-4f45-9708-019B960494DF}">
-                <a14:hiddenLine xmlns:a14="http://schemas.microsoft.com/office/drawing/2010/main" xmlns="" w="9525">
+                <a14:hiddenLine xmlns="" xmlns:a14="http://schemas.microsoft.com/office/drawing/2010/main" w="9525">
                   <a:solidFill>
                     <a:srgbClr val="000000"/>
                   </a:solidFill>
@@ -1531,7 +1542,7 @@
             </a:ln>
             <a:extLst>
               <a:ext uri="{91240B29-F687-4f45-9708-019B960494DF}">
-                <a14:hiddenLine xmlns:a14="http://schemas.microsoft.com/office/drawing/2010/main" xmlns="" w="9525">
+                <a14:hiddenLine xmlns="" xmlns:a14="http://schemas.microsoft.com/office/drawing/2010/main" w="9525">
                   <a:solidFill>
                     <a:srgbClr val="000000"/>
                   </a:solidFill>
@@ -1621,7 +1632,7 @@
             </a:ln>
             <a:extLst>
               <a:ext uri="{91240B29-F687-4f45-9708-019B960494DF}">
-                <a14:hiddenLine xmlns:a14="http://schemas.microsoft.com/office/drawing/2010/main" xmlns="" w="9525">
+                <a14:hiddenLine xmlns="" xmlns:a14="http://schemas.microsoft.com/office/drawing/2010/main" w="9525">
                   <a:solidFill>
                     <a:srgbClr val="000000"/>
                   </a:solidFill>
@@ -1711,7 +1722,7 @@
             </a:ln>
             <a:extLst>
               <a:ext uri="{91240B29-F687-4f45-9708-019B960494DF}">
-                <a14:hiddenLine xmlns:a14="http://schemas.microsoft.com/office/drawing/2010/main" xmlns="" w="9525">
+                <a14:hiddenLine xmlns="" xmlns:a14="http://schemas.microsoft.com/office/drawing/2010/main" w="9525">
                   <a:solidFill>
                     <a:srgbClr val="000000"/>
                   </a:solidFill>
@@ -1767,7 +1778,7 @@
             </a:ln>
             <a:extLst>
               <a:ext uri="{91240B29-F687-4f45-9708-019B960494DF}">
-                <a14:hiddenLine xmlns:a14="http://schemas.microsoft.com/office/drawing/2010/main" xmlns="" w="9525">
+                <a14:hiddenLine xmlns="" xmlns:a14="http://schemas.microsoft.com/office/drawing/2010/main" w="9525">
                   <a:solidFill>
                     <a:srgbClr val="000000"/>
                   </a:solidFill>
@@ -1857,7 +1868,7 @@
             </a:ln>
             <a:extLst>
               <a:ext uri="{91240B29-F687-4f45-9708-019B960494DF}">
-                <a14:hiddenLine xmlns:a14="http://schemas.microsoft.com/office/drawing/2010/main" xmlns="" w="9525">
+                <a14:hiddenLine xmlns="" xmlns:a14="http://schemas.microsoft.com/office/drawing/2010/main" w="9525">
                   <a:solidFill>
                     <a:srgbClr val="000000"/>
                   </a:solidFill>
@@ -1913,7 +1924,7 @@
             </a:ln>
             <a:extLst>
               <a:ext uri="{91240B29-F687-4f45-9708-019B960494DF}">
-                <a14:hiddenLine xmlns:a14="http://schemas.microsoft.com/office/drawing/2010/main" xmlns="" w="9525">
+                <a14:hiddenLine xmlns="" xmlns:a14="http://schemas.microsoft.com/office/drawing/2010/main" w="9525">
                   <a:solidFill>
                     <a:srgbClr val="000000"/>
                   </a:solidFill>
@@ -2003,7 +2014,7 @@
             </a:ln>
             <a:extLst>
               <a:ext uri="{91240B29-F687-4f45-9708-019B960494DF}">
-                <a14:hiddenLine xmlns:a14="http://schemas.microsoft.com/office/drawing/2010/main" xmlns="" w="9525">
+                <a14:hiddenLine xmlns="" xmlns:a14="http://schemas.microsoft.com/office/drawing/2010/main" w="9525">
                   <a:solidFill>
                     <a:srgbClr val="000000"/>
                   </a:solidFill>
@@ -2071,7 +2082,7 @@
             </a:ln>
             <a:extLst>
               <a:ext uri="{91240B29-F687-4f45-9708-019B960494DF}">
-                <a14:hiddenLine xmlns:a14="http://schemas.microsoft.com/office/drawing/2010/main" xmlns="" w="9525">
+                <a14:hiddenLine xmlns="" xmlns:a14="http://schemas.microsoft.com/office/drawing/2010/main" w="9525">
                   <a:solidFill>
                     <a:srgbClr val="000000"/>
                   </a:solidFill>
@@ -2161,7 +2172,7 @@
             </a:ln>
             <a:extLst>
               <a:ext uri="{91240B29-F687-4f45-9708-019B960494DF}">
-                <a14:hiddenLine xmlns:a14="http://schemas.microsoft.com/office/drawing/2010/main" xmlns="" w="9525">
+                <a14:hiddenLine xmlns="" xmlns:a14="http://schemas.microsoft.com/office/drawing/2010/main" w="9525">
                   <a:solidFill>
                     <a:srgbClr val="000000"/>
                   </a:solidFill>
@@ -2229,7 +2240,7 @@
             </a:ln>
             <a:extLst>
               <a:ext uri="{91240B29-F687-4f45-9708-019B960494DF}">
-                <a14:hiddenLine xmlns:a14="http://schemas.microsoft.com/office/drawing/2010/main" xmlns="" w="9525">
+                <a14:hiddenLine xmlns="" xmlns:a14="http://schemas.microsoft.com/office/drawing/2010/main" w="9525">
                   <a:solidFill>
                     <a:srgbClr val="000000"/>
                   </a:solidFill>
@@ -2319,7 +2330,7 @@
             </a:ln>
             <a:extLst>
               <a:ext uri="{91240B29-F687-4f45-9708-019B960494DF}">
-                <a14:hiddenLine xmlns:a14="http://schemas.microsoft.com/office/drawing/2010/main" xmlns="" w="9525">
+                <a14:hiddenLine xmlns="" xmlns:a14="http://schemas.microsoft.com/office/drawing/2010/main" w="9525">
                   <a:solidFill>
                     <a:srgbClr val="000000"/>
                   </a:solidFill>
@@ -2353,7 +2364,7 @@
             </a:ln>
             <a:extLst>
               <a:ext uri="{91240B29-F687-4f45-9708-019B960494DF}">
-                <a14:hiddenLine xmlns:a14="http://schemas.microsoft.com/office/drawing/2010/main" xmlns="" w="9525">
+                <a14:hiddenLine xmlns="" xmlns:a14="http://schemas.microsoft.com/office/drawing/2010/main" w="9525">
                   <a:solidFill>
                     <a:srgbClr val="000000"/>
                   </a:solidFill>
@@ -2443,7 +2454,7 @@
             </a:ln>
             <a:extLst>
               <a:ext uri="{91240B29-F687-4f45-9708-019B960494DF}">
-                <a14:hiddenLine xmlns:a14="http://schemas.microsoft.com/office/drawing/2010/main" xmlns="" w="9525">
+                <a14:hiddenLine xmlns="" xmlns:a14="http://schemas.microsoft.com/office/drawing/2010/main" w="9525">
                   <a:solidFill>
                     <a:srgbClr val="000000"/>
                   </a:solidFill>
@@ -2505,7 +2516,7 @@
             </a:ln>
             <a:extLst>
               <a:ext uri="{91240B29-F687-4f45-9708-019B960494DF}">
-                <a14:hiddenLine xmlns:a14="http://schemas.microsoft.com/office/drawing/2010/main" xmlns="" w="9525">
+                <a14:hiddenLine xmlns="" xmlns:a14="http://schemas.microsoft.com/office/drawing/2010/main" w="9525">
                   <a:solidFill>
                     <a:srgbClr val="000000"/>
                   </a:solidFill>
@@ -2567,7 +2578,7 @@
             </a:ln>
             <a:extLst>
               <a:ext uri="{91240B29-F687-4f45-9708-019B960494DF}">
-                <a14:hiddenLine xmlns:a14="http://schemas.microsoft.com/office/drawing/2010/main" xmlns="" w="9525">
+                <a14:hiddenLine xmlns="" xmlns:a14="http://schemas.microsoft.com/office/drawing/2010/main" w="9525">
                   <a:solidFill>
                     <a:srgbClr val="000000"/>
                   </a:solidFill>
@@ -2657,7 +2668,7 @@
             </a:ln>
             <a:extLst>
               <a:ext uri="{91240B29-F687-4f45-9708-019B960494DF}">
-                <a14:hiddenLine xmlns:a14="http://schemas.microsoft.com/office/drawing/2010/main" xmlns="" w="9525">
+                <a14:hiddenLine xmlns="" xmlns:a14="http://schemas.microsoft.com/office/drawing/2010/main" w="9525">
                   <a:solidFill>
                     <a:srgbClr val="000000"/>
                   </a:solidFill>
@@ -2725,7 +2736,7 @@
             </a:ln>
             <a:extLst>
               <a:ext uri="{91240B29-F687-4f45-9708-019B960494DF}">
-                <a14:hiddenLine xmlns:a14="http://schemas.microsoft.com/office/drawing/2010/main" xmlns="" w="9525">
+                <a14:hiddenLine xmlns="" xmlns:a14="http://schemas.microsoft.com/office/drawing/2010/main" w="9525">
                   <a:solidFill>
                     <a:srgbClr val="000000"/>
                   </a:solidFill>
@@ -2787,7 +2798,7 @@
             </a:ln>
             <a:extLst>
               <a:ext uri="{91240B29-F687-4f45-9708-019B960494DF}">
-                <a14:hiddenLine xmlns:a14="http://schemas.microsoft.com/office/drawing/2010/main" xmlns="" w="9525">
+                <a14:hiddenLine xmlns="" xmlns:a14="http://schemas.microsoft.com/office/drawing/2010/main" w="9525">
                   <a:solidFill>
                     <a:srgbClr val="000000"/>
                   </a:solidFill>
@@ -2877,7 +2888,7 @@
             </a:ln>
             <a:extLst>
               <a:ext uri="{91240B29-F687-4f45-9708-019B960494DF}">
-                <a14:hiddenLine xmlns:a14="http://schemas.microsoft.com/office/drawing/2010/main" xmlns="" w="9525">
+                <a14:hiddenLine xmlns="" xmlns:a14="http://schemas.microsoft.com/office/drawing/2010/main" w="9525">
                   <a:solidFill>
                     <a:srgbClr val="000000"/>
                   </a:solidFill>
@@ -2939,7 +2950,7 @@
             </a:ln>
             <a:extLst>
               <a:ext uri="{91240B29-F687-4f45-9708-019B960494DF}">
-                <a14:hiddenLine xmlns:a14="http://schemas.microsoft.com/office/drawing/2010/main" xmlns="" w="9525">
+                <a14:hiddenLine xmlns="" xmlns:a14="http://schemas.microsoft.com/office/drawing/2010/main" w="9525">
                   <a:solidFill>
                     <a:srgbClr val="000000"/>
                   </a:solidFill>
@@ -3029,7 +3040,7 @@
             </a:ln>
             <a:extLst>
               <a:ext uri="{91240B29-F687-4f45-9708-019B960494DF}">
-                <a14:hiddenLine xmlns:a14="http://schemas.microsoft.com/office/drawing/2010/main" xmlns="" w="9525">
+                <a14:hiddenLine xmlns="" xmlns:a14="http://schemas.microsoft.com/office/drawing/2010/main" w="9525">
                   <a:solidFill>
                     <a:srgbClr val="000000"/>
                   </a:solidFill>
@@ -3091,7 +3102,7 @@
             </a:ln>
             <a:extLst>
               <a:ext uri="{91240B29-F687-4f45-9708-019B960494DF}">
-                <a14:hiddenLine xmlns:a14="http://schemas.microsoft.com/office/drawing/2010/main" xmlns="" w="9525">
+                <a14:hiddenLine xmlns="" xmlns:a14="http://schemas.microsoft.com/office/drawing/2010/main" w="9525">
                   <a:solidFill>
                     <a:srgbClr val="000000"/>
                   </a:solidFill>
@@ -3181,7 +3192,7 @@
             </a:ln>
             <a:extLst>
               <a:ext uri="{91240B29-F687-4f45-9708-019B960494DF}">
-                <a14:hiddenLine xmlns:a14="http://schemas.microsoft.com/office/drawing/2010/main" xmlns="" w="9525">
+                <a14:hiddenLine xmlns="" xmlns:a14="http://schemas.microsoft.com/office/drawing/2010/main" w="9525">
                   <a:solidFill>
                     <a:srgbClr val="000000"/>
                   </a:solidFill>
@@ -3215,7 +3226,7 @@
             </a:ln>
             <a:extLst>
               <a:ext uri="{91240B29-F687-4f45-9708-019B960494DF}">
-                <a14:hiddenLine xmlns:a14="http://schemas.microsoft.com/office/drawing/2010/main" xmlns="" w="9525">
+                <a14:hiddenLine xmlns="" xmlns:a14="http://schemas.microsoft.com/office/drawing/2010/main" w="9525">
                   <a:solidFill>
                     <a:srgbClr val="000000"/>
                   </a:solidFill>
@@ -3280,7 +3291,7 @@
             </a:ln>
             <a:extLst>
               <a:ext uri="{91240B29-F687-4f45-9708-019B960494DF}">
-                <a14:hiddenLine xmlns:a14="http://schemas.microsoft.com/office/drawing/2010/main" xmlns="" w="9525">
+                <a14:hiddenLine xmlns="" xmlns:a14="http://schemas.microsoft.com/office/drawing/2010/main" w="9525">
                   <a:solidFill>
                     <a:srgbClr val="000000"/>
                   </a:solidFill>
@@ -3370,7 +3381,7 @@
             </a:ln>
             <a:extLst>
               <a:ext uri="{91240B29-F687-4f45-9708-019B960494DF}">
-                <a14:hiddenLine xmlns:a14="http://schemas.microsoft.com/office/drawing/2010/main" xmlns="" w="9525">
+                <a14:hiddenLine xmlns="" xmlns:a14="http://schemas.microsoft.com/office/drawing/2010/main" w="9525">
                   <a:solidFill>
                     <a:srgbClr val="000000"/>
                   </a:solidFill>
@@ -3432,7 +3443,7 @@
             </a:ln>
             <a:extLst>
               <a:ext uri="{91240B29-F687-4f45-9708-019B960494DF}">
-                <a14:hiddenLine xmlns:a14="http://schemas.microsoft.com/office/drawing/2010/main" xmlns="" w="9525">
+                <a14:hiddenLine xmlns="" xmlns:a14="http://schemas.microsoft.com/office/drawing/2010/main" w="9525">
                   <a:solidFill>
                     <a:srgbClr val="000000"/>
                   </a:solidFill>
@@ -3522,7 +3533,7 @@
             </a:ln>
             <a:extLst>
               <a:ext uri="{91240B29-F687-4f45-9708-019B960494DF}">
-                <a14:hiddenLine xmlns:a14="http://schemas.microsoft.com/office/drawing/2010/main" xmlns="" w="9525">
+                <a14:hiddenLine xmlns="" xmlns:a14="http://schemas.microsoft.com/office/drawing/2010/main" w="9525">
                   <a:solidFill>
                     <a:srgbClr val="000000"/>
                   </a:solidFill>
@@ -3612,7 +3623,7 @@
             </a:ln>
             <a:extLst>
               <a:ext uri="{91240B29-F687-4f45-9708-019B960494DF}">
-                <a14:hiddenLine xmlns:a14="http://schemas.microsoft.com/office/drawing/2010/main" xmlns="" w="9525">
+                <a14:hiddenLine xmlns="" xmlns:a14="http://schemas.microsoft.com/office/drawing/2010/main" w="9525">
                   <a:solidFill>
                     <a:srgbClr val="000000"/>
                   </a:solidFill>
@@ -3677,7 +3688,7 @@
             </a:ln>
             <a:extLst>
               <a:ext uri="{91240B29-F687-4f45-9708-019B960494DF}">
-                <a14:hiddenLine xmlns:a14="http://schemas.microsoft.com/office/drawing/2010/main" xmlns="" w="9525">
+                <a14:hiddenLine xmlns="" xmlns:a14="http://schemas.microsoft.com/office/drawing/2010/main" w="9525">
                   <a:solidFill>
                     <a:srgbClr val="000000"/>
                   </a:solidFill>
@@ -3739,7 +3750,7 @@
             </a:ln>
             <a:extLst>
               <a:ext uri="{91240B29-F687-4f45-9708-019B960494DF}">
-                <a14:hiddenLine xmlns:a14="http://schemas.microsoft.com/office/drawing/2010/main" xmlns="" w="9525">
+                <a14:hiddenLine xmlns="" xmlns:a14="http://schemas.microsoft.com/office/drawing/2010/main" w="9525">
                   <a:solidFill>
                     <a:srgbClr val="000000"/>
                   </a:solidFill>
@@ -3829,7 +3840,7 @@
             </a:ln>
             <a:extLst>
               <a:ext uri="{91240B29-F687-4f45-9708-019B960494DF}">
-                <a14:hiddenLine xmlns:a14="http://schemas.microsoft.com/office/drawing/2010/main" xmlns="" w="9525">
+                <a14:hiddenLine xmlns="" xmlns:a14="http://schemas.microsoft.com/office/drawing/2010/main" w="9525">
                   <a:solidFill>
                     <a:srgbClr val="000000"/>
                   </a:solidFill>
@@ -3919,7 +3930,7 @@
             </a:ln>
             <a:extLst>
               <a:ext uri="{91240B29-F687-4f45-9708-019B960494DF}">
-                <a14:hiddenLine xmlns:a14="http://schemas.microsoft.com/office/drawing/2010/main" xmlns="" w="9525">
+                <a14:hiddenLine xmlns="" xmlns:a14="http://schemas.microsoft.com/office/drawing/2010/main" w="9525">
                   <a:solidFill>
                     <a:srgbClr val="000000"/>
                   </a:solidFill>
@@ -3981,7 +3992,7 @@
             </a:ln>
             <a:extLst>
               <a:ext uri="{91240B29-F687-4f45-9708-019B960494DF}">
-                <a14:hiddenLine xmlns:a14="http://schemas.microsoft.com/office/drawing/2010/main" xmlns="" w="9525">
+                <a14:hiddenLine xmlns="" xmlns:a14="http://schemas.microsoft.com/office/drawing/2010/main" w="9525">
                   <a:solidFill>
                     <a:srgbClr val="000000"/>
                   </a:solidFill>
@@ -4101,7 +4112,7 @@
             </a:ln>
             <a:extLst>
               <a:ext uri="{91240B29-F687-4f45-9708-019B960494DF}">
-                <a14:hiddenLine xmlns:a14="http://schemas.microsoft.com/office/drawing/2010/main" xmlns="" w="9525">
+                <a14:hiddenLine xmlns="" xmlns:a14="http://schemas.microsoft.com/office/drawing/2010/main" w="9525">
                   <a:solidFill>
                     <a:srgbClr val="000000"/>
                   </a:solidFill>
@@ -4169,7 +4180,7 @@
             </a:ln>
             <a:extLst>
               <a:ext uri="{91240B29-F687-4f45-9708-019B960494DF}">
-                <a14:hiddenLine xmlns:a14="http://schemas.microsoft.com/office/drawing/2010/main" xmlns="" w="9525">
+                <a14:hiddenLine xmlns="" xmlns:a14="http://schemas.microsoft.com/office/drawing/2010/main" w="9525">
                   <a:solidFill>
                     <a:srgbClr val="000000"/>
                   </a:solidFill>
@@ -4259,7 +4270,7 @@
             </a:ln>
             <a:extLst>
               <a:ext uri="{91240B29-F687-4f45-9708-019B960494DF}">
-                <a14:hiddenLine xmlns:a14="http://schemas.microsoft.com/office/drawing/2010/main" xmlns="" w="9525">
+                <a14:hiddenLine xmlns="" xmlns:a14="http://schemas.microsoft.com/office/drawing/2010/main" w="9525">
                   <a:solidFill>
                     <a:srgbClr val="000000"/>
                   </a:solidFill>
@@ -4399,7 +4410,7 @@
           <a:p>
             <a:fld id="{42A3FA0C-5CD8-4683-A8F2-458893B3FD08}" type="datetimeFigureOut">
               <a:rPr lang="ru-RU" smtClean="0"/>
-              <a:t>27.08.2026</a:t>
+              <a:t>30.08.2026</a:t>
             </a:fld>
             <a:endParaRPr lang="ru-RU"/>
           </a:p>
@@ -4666,7 +4677,7 @@
           <a:p>
             <a:fld id="{42A3FA0C-5CD8-4683-A8F2-458893B3FD08}" type="datetimeFigureOut">
               <a:rPr lang="ru-RU" smtClean="0"/>
-              <a:t>27.08.2026</a:t>
+              <a:t>30.08.2026</a:t>
             </a:fld>
             <a:endParaRPr lang="ru-RU"/>
           </a:p>
@@ -4862,7 +4873,7 @@
           <a:p>
             <a:fld id="{42A3FA0C-5CD8-4683-A8F2-458893B3FD08}" type="datetimeFigureOut">
               <a:rPr lang="ru-RU" smtClean="0"/>
-              <a:t>27.08.2026</a:t>
+              <a:t>30.08.2026</a:t>
             </a:fld>
             <a:endParaRPr lang="ru-RU"/>
           </a:p>
@@ -5125,7 +5136,7 @@
           <a:p>
             <a:fld id="{42A3FA0C-5CD8-4683-A8F2-458893B3FD08}" type="datetimeFigureOut">
               <a:rPr lang="ru-RU" smtClean="0"/>
-              <a:t>27.08.2026</a:t>
+              <a:t>30.08.2026</a:t>
             </a:fld>
             <a:endParaRPr lang="ru-RU"/>
           </a:p>
@@ -5559,7 +5570,7 @@
           <a:p>
             <a:fld id="{42A3FA0C-5CD8-4683-A8F2-458893B3FD08}" type="datetimeFigureOut">
               <a:rPr lang="ru-RU" smtClean="0"/>
-              <a:t>27.08.2026</a:t>
+              <a:t>30.08.2026</a:t>
             </a:fld>
             <a:endParaRPr lang="ru-RU"/>
           </a:p>
@@ -6105,7 +6116,7 @@
           <a:p>
             <a:fld id="{42A3FA0C-5CD8-4683-A8F2-458893B3FD08}" type="datetimeFigureOut">
               <a:rPr lang="ru-RU" smtClean="0"/>
-              <a:t>27.08.2026</a:t>
+              <a:t>30.08.2026</a:t>
             </a:fld>
             <a:endParaRPr lang="ru-RU"/>
           </a:p>
@@ -6825,7 +6836,7 @@
           <a:p>
             <a:fld id="{42A3FA0C-5CD8-4683-A8F2-458893B3FD08}" type="datetimeFigureOut">
               <a:rPr lang="ru-RU" smtClean="0"/>
-              <a:t>27.08.2026</a:t>
+              <a:t>30.08.2026</a:t>
             </a:fld>
             <a:endParaRPr lang="ru-RU"/>
           </a:p>
@@ -6995,7 +7006,7 @@
           <a:p>
             <a:fld id="{42A3FA0C-5CD8-4683-A8F2-458893B3FD08}" type="datetimeFigureOut">
               <a:rPr lang="ru-RU" smtClean="0"/>
-              <a:t>27.08.2026</a:t>
+              <a:t>30.08.2026</a:t>
             </a:fld>
             <a:endParaRPr lang="ru-RU"/>
           </a:p>
@@ -7175,7 +7186,7 @@
           <a:p>
             <a:fld id="{42A3FA0C-5CD8-4683-A8F2-458893B3FD08}" type="datetimeFigureOut">
               <a:rPr lang="ru-RU" smtClean="0"/>
-              <a:t>27.08.2026</a:t>
+              <a:t>30.08.2026</a:t>
             </a:fld>
             <a:endParaRPr lang="ru-RU"/>
           </a:p>
@@ -7345,7 +7356,7 @@
           <a:p>
             <a:fld id="{42A3FA0C-5CD8-4683-A8F2-458893B3FD08}" type="datetimeFigureOut">
               <a:rPr lang="ru-RU" smtClean="0"/>
-              <a:t>27.08.2026</a:t>
+              <a:t>30.08.2026</a:t>
             </a:fld>
             <a:endParaRPr lang="ru-RU"/>
           </a:p>
@@ -7595,7 +7606,7 @@
           <a:p>
             <a:fld id="{42A3FA0C-5CD8-4683-A8F2-458893B3FD08}" type="datetimeFigureOut">
               <a:rPr lang="ru-RU" smtClean="0"/>
-              <a:t>27.08.2026</a:t>
+              <a:t>30.08.2026</a:t>
             </a:fld>
             <a:endParaRPr lang="ru-RU"/>
           </a:p>
@@ -7827,7 +7838,7 @@
           <a:p>
             <a:fld id="{42A3FA0C-5CD8-4683-A8F2-458893B3FD08}" type="datetimeFigureOut">
               <a:rPr lang="ru-RU" smtClean="0"/>
-              <a:t>27.08.2026</a:t>
+              <a:t>30.08.2026</a:t>
             </a:fld>
             <a:endParaRPr lang="ru-RU"/>
           </a:p>
@@ -8208,7 +8219,7 @@
           <a:p>
             <a:fld id="{42A3FA0C-5CD8-4683-A8F2-458893B3FD08}" type="datetimeFigureOut">
               <a:rPr lang="ru-RU" smtClean="0"/>
-              <a:t>27.08.2026</a:t>
+              <a:t>30.08.2026</a:t>
             </a:fld>
             <a:endParaRPr lang="ru-RU"/>
           </a:p>
@@ -8326,7 +8337,7 @@
           <a:p>
             <a:fld id="{42A3FA0C-5CD8-4683-A8F2-458893B3FD08}" type="datetimeFigureOut">
               <a:rPr lang="ru-RU" smtClean="0"/>
-              <a:t>27.08.2026</a:t>
+              <a:t>30.08.2026</a:t>
             </a:fld>
             <a:endParaRPr lang="ru-RU"/>
           </a:p>
@@ -8421,7 +8432,7 @@
           <a:p>
             <a:fld id="{42A3FA0C-5CD8-4683-A8F2-458893B3FD08}" type="datetimeFigureOut">
               <a:rPr lang="ru-RU" smtClean="0"/>
-              <a:t>27.08.2026</a:t>
+              <a:t>30.08.2026</a:t>
             </a:fld>
             <a:endParaRPr lang="ru-RU"/>
           </a:p>
@@ -8670,7 +8681,7 @@
           <a:p>
             <a:fld id="{42A3FA0C-5CD8-4683-A8F2-458893B3FD08}" type="datetimeFigureOut">
               <a:rPr lang="ru-RU" smtClean="0"/>
-              <a:t>27.08.2026</a:t>
+              <a:t>30.08.2026</a:t>
             </a:fld>
             <a:endParaRPr lang="ru-RU"/>
           </a:p>
@@ -8950,7 +8961,7 @@
           <a:p>
             <a:fld id="{42A3FA0C-5CD8-4683-A8F2-458893B3FD08}" type="datetimeFigureOut">
               <a:rPr lang="ru-RU" smtClean="0"/>
-              <a:t>27.08.2026</a:t>
+              <a:t>30.08.2026</a:t>
             </a:fld>
             <a:endParaRPr lang="ru-RU"/>
           </a:p>
@@ -9073,7 +9084,7 @@
           <a:noFill/>
           <a:extLst>
             <a:ext uri="{909E8E84-426E-40dd-AFC4-6F175D3DCCD1}">
-              <a14:hiddenFill xmlns:a14="http://schemas.microsoft.com/office/drawing/2010/main" xmlns="">
+              <a14:hiddenFill xmlns="" xmlns:a14="http://schemas.microsoft.com/office/drawing/2010/main">
                 <a:solidFill>
                   <a:srgbClr val="FFFFFF"/>
                 </a:solidFill>
@@ -9147,7 +9158,7 @@
               </a:ln>
               <a:extLst>
                 <a:ext uri="{91240B29-F687-4f45-9708-019B960494DF}">
-                  <a14:hiddenLine xmlns:a14="http://schemas.microsoft.com/office/drawing/2010/main" xmlns="" w="9525">
+                  <a14:hiddenLine xmlns="" xmlns:a14="http://schemas.microsoft.com/office/drawing/2010/main" w="9525">
                     <a:solidFill>
                       <a:srgbClr val="000000"/>
                     </a:solidFill>
@@ -9237,7 +9248,7 @@
               </a:ln>
               <a:extLst>
                 <a:ext uri="{91240B29-F687-4f45-9708-019B960494DF}">
-                  <a14:hiddenLine xmlns:a14="http://schemas.microsoft.com/office/drawing/2010/main" xmlns="" w="9525">
+                  <a14:hiddenLine xmlns="" xmlns:a14="http://schemas.microsoft.com/office/drawing/2010/main" w="9525">
                     <a:solidFill>
                       <a:srgbClr val="000000"/>
                     </a:solidFill>
@@ -9327,7 +9338,7 @@
               </a:ln>
               <a:extLst>
                 <a:ext uri="{91240B29-F687-4f45-9708-019B960494DF}">
-                  <a14:hiddenLine xmlns:a14="http://schemas.microsoft.com/office/drawing/2010/main" xmlns="" w="9525">
+                  <a14:hiddenLine xmlns="" xmlns:a14="http://schemas.microsoft.com/office/drawing/2010/main" w="9525">
                     <a:solidFill>
                       <a:srgbClr val="000000"/>
                     </a:solidFill>
@@ -9389,7 +9400,7 @@
               </a:ln>
               <a:extLst>
                 <a:ext uri="{91240B29-F687-4f45-9708-019B960494DF}">
-                  <a14:hiddenLine xmlns:a14="http://schemas.microsoft.com/office/drawing/2010/main" xmlns="" w="9525">
+                  <a14:hiddenLine xmlns="" xmlns:a14="http://schemas.microsoft.com/office/drawing/2010/main" w="9525">
                     <a:solidFill>
                       <a:srgbClr val="000000"/>
                     </a:solidFill>
@@ -9479,7 +9490,7 @@
               </a:ln>
               <a:extLst>
                 <a:ext uri="{91240B29-F687-4f45-9708-019B960494DF}">
-                  <a14:hiddenLine xmlns:a14="http://schemas.microsoft.com/office/drawing/2010/main" xmlns="" w="9525">
+                  <a14:hiddenLine xmlns="" xmlns:a14="http://schemas.microsoft.com/office/drawing/2010/main" w="9525">
                     <a:solidFill>
                       <a:srgbClr val="000000"/>
                     </a:solidFill>
@@ -9541,7 +9552,7 @@
               </a:ln>
               <a:extLst>
                 <a:ext uri="{91240B29-F687-4f45-9708-019B960494DF}">
-                  <a14:hiddenLine xmlns:a14="http://schemas.microsoft.com/office/drawing/2010/main" xmlns="" w="9525">
+                  <a14:hiddenLine xmlns="" xmlns:a14="http://schemas.microsoft.com/office/drawing/2010/main" w="9525">
                     <a:solidFill>
                       <a:srgbClr val="000000"/>
                     </a:solidFill>
@@ -9603,7 +9614,7 @@
               </a:ln>
               <a:extLst>
                 <a:ext uri="{91240B29-F687-4f45-9708-019B960494DF}">
-                  <a14:hiddenLine xmlns:a14="http://schemas.microsoft.com/office/drawing/2010/main" xmlns="" w="9525">
+                  <a14:hiddenLine xmlns="" xmlns:a14="http://schemas.microsoft.com/office/drawing/2010/main" w="9525">
                     <a:solidFill>
                       <a:srgbClr val="000000"/>
                     </a:solidFill>
@@ -9693,7 +9704,7 @@
               </a:ln>
               <a:extLst>
                 <a:ext uri="{91240B29-F687-4f45-9708-019B960494DF}">
-                  <a14:hiddenLine xmlns:a14="http://schemas.microsoft.com/office/drawing/2010/main" xmlns="" w="9525">
+                  <a14:hiddenLine xmlns="" xmlns:a14="http://schemas.microsoft.com/office/drawing/2010/main" w="9525">
                     <a:solidFill>
                       <a:srgbClr val="000000"/>
                     </a:solidFill>
@@ -9783,7 +9794,7 @@
               </a:ln>
               <a:extLst>
                 <a:ext uri="{91240B29-F687-4f45-9708-019B960494DF}">
-                  <a14:hiddenLine xmlns:a14="http://schemas.microsoft.com/office/drawing/2010/main" xmlns="" w="9525">
+                  <a14:hiddenLine xmlns="" xmlns:a14="http://schemas.microsoft.com/office/drawing/2010/main" w="9525">
                     <a:solidFill>
                       <a:srgbClr val="000000"/>
                     </a:solidFill>
@@ -9845,7 +9856,7 @@
               </a:ln>
               <a:extLst>
                 <a:ext uri="{91240B29-F687-4f45-9708-019B960494DF}">
-                  <a14:hiddenLine xmlns:a14="http://schemas.microsoft.com/office/drawing/2010/main" xmlns="" w="9525">
+                  <a14:hiddenLine xmlns="" xmlns:a14="http://schemas.microsoft.com/office/drawing/2010/main" w="9525">
                     <a:solidFill>
                       <a:srgbClr val="000000"/>
                     </a:solidFill>
@@ -9955,7 +9966,7 @@
               </a:ln>
               <a:extLst>
                 <a:ext uri="{91240B29-F687-4f45-9708-019B960494DF}">
-                  <a14:hiddenLine xmlns:a14="http://schemas.microsoft.com/office/drawing/2010/main" xmlns="" w="9525">
+                  <a14:hiddenLine xmlns="" xmlns:a14="http://schemas.microsoft.com/office/drawing/2010/main" w="9525">
                     <a:solidFill>
                       <a:srgbClr val="000000"/>
                     </a:solidFill>
@@ -10039,7 +10050,7 @@
               </a:ln>
               <a:extLst>
                 <a:ext uri="{91240B29-F687-4f45-9708-019B960494DF}">
-                  <a14:hiddenLine xmlns:a14="http://schemas.microsoft.com/office/drawing/2010/main" xmlns="" w="9525">
+                  <a14:hiddenLine xmlns="" xmlns:a14="http://schemas.microsoft.com/office/drawing/2010/main" w="9525">
                     <a:solidFill>
                       <a:srgbClr val="000000"/>
                     </a:solidFill>
@@ -10101,7 +10112,7 @@
               </a:ln>
               <a:extLst>
                 <a:ext uri="{91240B29-F687-4f45-9708-019B960494DF}">
-                  <a14:hiddenLine xmlns:a14="http://schemas.microsoft.com/office/drawing/2010/main" xmlns="" w="9525">
+                  <a14:hiddenLine xmlns="" xmlns:a14="http://schemas.microsoft.com/office/drawing/2010/main" w="9525">
                     <a:solidFill>
                       <a:srgbClr val="000000"/>
                     </a:solidFill>
@@ -10163,7 +10174,7 @@
               </a:ln>
               <a:extLst>
                 <a:ext uri="{91240B29-F687-4f45-9708-019B960494DF}">
-                  <a14:hiddenLine xmlns:a14="http://schemas.microsoft.com/office/drawing/2010/main" xmlns="" w="9525">
+                  <a14:hiddenLine xmlns="" xmlns:a14="http://schemas.microsoft.com/office/drawing/2010/main" w="9525">
                     <a:solidFill>
                       <a:srgbClr val="000000"/>
                     </a:solidFill>
@@ -10253,7 +10264,7 @@
               </a:ln>
               <a:extLst>
                 <a:ext uri="{91240B29-F687-4f45-9708-019B960494DF}">
-                  <a14:hiddenLine xmlns:a14="http://schemas.microsoft.com/office/drawing/2010/main" xmlns="" w="9525">
+                  <a14:hiddenLine xmlns="" xmlns:a14="http://schemas.microsoft.com/office/drawing/2010/main" w="9525">
                     <a:solidFill>
                       <a:srgbClr val="000000"/>
                     </a:solidFill>
@@ -10287,7 +10298,7 @@
               </a:ln>
               <a:extLst>
                 <a:ext uri="{91240B29-F687-4f45-9708-019B960494DF}">
-                  <a14:hiddenLine xmlns:a14="http://schemas.microsoft.com/office/drawing/2010/main" xmlns="" w="9525">
+                  <a14:hiddenLine xmlns="" xmlns:a14="http://schemas.microsoft.com/office/drawing/2010/main" w="9525">
                     <a:solidFill>
                       <a:srgbClr val="000000"/>
                     </a:solidFill>
@@ -10352,7 +10363,7 @@
               </a:ln>
               <a:extLst>
                 <a:ext uri="{91240B29-F687-4f45-9708-019B960494DF}">
-                  <a14:hiddenLine xmlns:a14="http://schemas.microsoft.com/office/drawing/2010/main" xmlns="" w="9525">
+                  <a14:hiddenLine xmlns="" xmlns:a14="http://schemas.microsoft.com/office/drawing/2010/main" w="9525">
                     <a:solidFill>
                       <a:srgbClr val="000000"/>
                     </a:solidFill>
@@ -10442,7 +10453,7 @@
               </a:ln>
               <a:extLst>
                 <a:ext uri="{91240B29-F687-4f45-9708-019B960494DF}">
-                  <a14:hiddenLine xmlns:a14="http://schemas.microsoft.com/office/drawing/2010/main" xmlns="" w="9525">
+                  <a14:hiddenLine xmlns="" xmlns:a14="http://schemas.microsoft.com/office/drawing/2010/main" w="9525">
                     <a:solidFill>
                       <a:srgbClr val="000000"/>
                     </a:solidFill>
@@ -10504,7 +10515,7 @@
               </a:ln>
               <a:extLst>
                 <a:ext uri="{91240B29-F687-4f45-9708-019B960494DF}">
-                  <a14:hiddenLine xmlns:a14="http://schemas.microsoft.com/office/drawing/2010/main" xmlns="" w="9525">
+                  <a14:hiddenLine xmlns="" xmlns:a14="http://schemas.microsoft.com/office/drawing/2010/main" w="9525">
                     <a:solidFill>
                       <a:srgbClr val="000000"/>
                     </a:solidFill>
@@ -10594,7 +10605,7 @@
               </a:ln>
               <a:extLst>
                 <a:ext uri="{91240B29-F687-4f45-9708-019B960494DF}">
-                  <a14:hiddenLine xmlns:a14="http://schemas.microsoft.com/office/drawing/2010/main" xmlns="" w="9525">
+                  <a14:hiddenLine xmlns="" xmlns:a14="http://schemas.microsoft.com/office/drawing/2010/main" w="9525">
                     <a:solidFill>
                       <a:srgbClr val="000000"/>
                     </a:solidFill>
@@ -10659,7 +10670,7 @@
               </a:ln>
               <a:extLst>
                 <a:ext uri="{91240B29-F687-4f45-9708-019B960494DF}">
-                  <a14:hiddenLine xmlns:a14="http://schemas.microsoft.com/office/drawing/2010/main" xmlns="" w="9525">
+                  <a14:hiddenLine xmlns="" xmlns:a14="http://schemas.microsoft.com/office/drawing/2010/main" w="9525">
                     <a:solidFill>
                       <a:srgbClr val="000000"/>
                     </a:solidFill>
@@ -10721,7 +10732,7 @@
               </a:ln>
               <a:extLst>
                 <a:ext uri="{91240B29-F687-4f45-9708-019B960494DF}">
-                  <a14:hiddenLine xmlns:a14="http://schemas.microsoft.com/office/drawing/2010/main" xmlns="" w="9525">
+                  <a14:hiddenLine xmlns="" xmlns:a14="http://schemas.microsoft.com/office/drawing/2010/main" w="9525">
                     <a:solidFill>
                       <a:srgbClr val="000000"/>
                     </a:solidFill>
@@ -10811,7 +10822,7 @@
               </a:ln>
               <a:extLst>
                 <a:ext uri="{91240B29-F687-4f45-9708-019B960494DF}">
-                  <a14:hiddenLine xmlns:a14="http://schemas.microsoft.com/office/drawing/2010/main" xmlns="" w="9525">
+                  <a14:hiddenLine xmlns="" xmlns:a14="http://schemas.microsoft.com/office/drawing/2010/main" w="9525">
                     <a:solidFill>
                       <a:srgbClr val="000000"/>
                     </a:solidFill>
@@ -10901,7 +10912,7 @@
               </a:ln>
               <a:extLst>
                 <a:ext uri="{91240B29-F687-4f45-9708-019B960494DF}">
-                  <a14:hiddenLine xmlns:a14="http://schemas.microsoft.com/office/drawing/2010/main" xmlns="" w="9525">
+                  <a14:hiddenLine xmlns="" xmlns:a14="http://schemas.microsoft.com/office/drawing/2010/main" w="9525">
                     <a:solidFill>
                       <a:srgbClr val="000000"/>
                     </a:solidFill>
@@ -10966,7 +10977,7 @@
               </a:ln>
               <a:extLst>
                 <a:ext uri="{91240B29-F687-4f45-9708-019B960494DF}">
-                  <a14:hiddenLine xmlns:a14="http://schemas.microsoft.com/office/drawing/2010/main" xmlns="" w="9525">
+                  <a14:hiddenLine xmlns="" xmlns:a14="http://schemas.microsoft.com/office/drawing/2010/main" w="9525">
                     <a:solidFill>
                       <a:srgbClr val="000000"/>
                     </a:solidFill>
@@ -11086,7 +11097,7 @@
               </a:ln>
               <a:extLst>
                 <a:ext uri="{91240B29-F687-4f45-9708-019B960494DF}">
-                  <a14:hiddenLine xmlns:a14="http://schemas.microsoft.com/office/drawing/2010/main" xmlns="" w="9525">
+                  <a14:hiddenLine xmlns="" xmlns:a14="http://schemas.microsoft.com/office/drawing/2010/main" w="9525">
                     <a:solidFill>
                       <a:srgbClr val="000000"/>
                     </a:solidFill>
@@ -11167,7 +11178,7 @@
               </a:ln>
               <a:extLst>
                 <a:ext uri="{91240B29-F687-4f45-9708-019B960494DF}">
-                  <a14:hiddenLine xmlns:a14="http://schemas.microsoft.com/office/drawing/2010/main" xmlns="" w="9525">
+                  <a14:hiddenLine xmlns="" xmlns:a14="http://schemas.microsoft.com/office/drawing/2010/main" w="9525">
                     <a:solidFill>
                       <a:srgbClr val="000000"/>
                     </a:solidFill>
@@ -11282,7 +11293,7 @@
               </a:ln>
               <a:extLst>
                 <a:ext uri="{91240B29-F687-4f45-9708-019B960494DF}">
-                  <a14:hiddenLine xmlns:a14="http://schemas.microsoft.com/office/drawing/2010/main" xmlns="" w="9525">
+                  <a14:hiddenLine xmlns="" xmlns:a14="http://schemas.microsoft.com/office/drawing/2010/main" w="9525">
                     <a:solidFill>
                       <a:srgbClr val="000000"/>
                     </a:solidFill>
@@ -11372,7 +11383,7 @@
               </a:ln>
               <a:extLst>
                 <a:ext uri="{91240B29-F687-4f45-9708-019B960494DF}">
-                  <a14:hiddenLine xmlns:a14="http://schemas.microsoft.com/office/drawing/2010/main" xmlns="" w="9525">
+                  <a14:hiddenLine xmlns="" xmlns:a14="http://schemas.microsoft.com/office/drawing/2010/main" w="9525">
                     <a:solidFill>
                       <a:srgbClr val="000000"/>
                     </a:solidFill>
@@ -11437,7 +11448,7 @@
               </a:ln>
               <a:extLst>
                 <a:ext uri="{91240B29-F687-4f45-9708-019B960494DF}">
-                  <a14:hiddenLine xmlns:a14="http://schemas.microsoft.com/office/drawing/2010/main" xmlns="" w="9525">
+                  <a14:hiddenLine xmlns="" xmlns:a14="http://schemas.microsoft.com/office/drawing/2010/main" w="9525">
                     <a:solidFill>
                       <a:srgbClr val="000000"/>
                     </a:solidFill>
@@ -11527,7 +11538,7 @@
               </a:ln>
               <a:extLst>
                 <a:ext uri="{91240B29-F687-4f45-9708-019B960494DF}">
-                  <a14:hiddenLine xmlns:a14="http://schemas.microsoft.com/office/drawing/2010/main" xmlns="" w="9525">
+                  <a14:hiddenLine xmlns="" xmlns:a14="http://schemas.microsoft.com/office/drawing/2010/main" w="9525">
                     <a:solidFill>
                       <a:srgbClr val="000000"/>
                     </a:solidFill>
@@ -11595,7 +11606,7 @@
               </a:ln>
               <a:extLst>
                 <a:ext uri="{91240B29-F687-4f45-9708-019B960494DF}">
-                  <a14:hiddenLine xmlns:a14="http://schemas.microsoft.com/office/drawing/2010/main" xmlns="" w="9525">
+                  <a14:hiddenLine xmlns="" xmlns:a14="http://schemas.microsoft.com/office/drawing/2010/main" w="9525">
                     <a:solidFill>
                       <a:srgbClr val="000000"/>
                     </a:solidFill>
@@ -11685,7 +11696,7 @@
               </a:ln>
               <a:extLst>
                 <a:ext uri="{91240B29-F687-4f45-9708-019B960494DF}">
-                  <a14:hiddenLine xmlns:a14="http://schemas.microsoft.com/office/drawing/2010/main" xmlns="" w="9525">
+                  <a14:hiddenLine xmlns="" xmlns:a14="http://schemas.microsoft.com/office/drawing/2010/main" w="9525">
                     <a:solidFill>
                       <a:srgbClr val="000000"/>
                     </a:solidFill>
@@ -11753,7 +11764,7 @@
               </a:ln>
               <a:extLst>
                 <a:ext uri="{91240B29-F687-4f45-9708-019B960494DF}">
-                  <a14:hiddenLine xmlns:a14="http://schemas.microsoft.com/office/drawing/2010/main" xmlns="" w="9525">
+                  <a14:hiddenLine xmlns="" xmlns:a14="http://schemas.microsoft.com/office/drawing/2010/main" w="9525">
                     <a:solidFill>
                       <a:srgbClr val="000000"/>
                     </a:solidFill>
@@ -11843,7 +11854,7 @@
               </a:ln>
               <a:extLst>
                 <a:ext uri="{91240B29-F687-4f45-9708-019B960494DF}">
-                  <a14:hiddenLine xmlns:a14="http://schemas.microsoft.com/office/drawing/2010/main" xmlns="" w="9525">
+                  <a14:hiddenLine xmlns="" xmlns:a14="http://schemas.microsoft.com/office/drawing/2010/main" w="9525">
                     <a:solidFill>
                       <a:srgbClr val="000000"/>
                     </a:solidFill>
@@ -11877,7 +11888,7 @@
               </a:ln>
               <a:extLst>
                 <a:ext uri="{91240B29-F687-4f45-9708-019B960494DF}">
-                  <a14:hiddenLine xmlns:a14="http://schemas.microsoft.com/office/drawing/2010/main" xmlns="" w="9525">
+                  <a14:hiddenLine xmlns="" xmlns:a14="http://schemas.microsoft.com/office/drawing/2010/main" w="9525">
                     <a:solidFill>
                       <a:srgbClr val="000000"/>
                     </a:solidFill>
@@ -12017,7 +12028,7 @@
           <a:p>
             <a:fld id="{42A3FA0C-5CD8-4683-A8F2-458893B3FD08}" type="datetimeFigureOut">
               <a:rPr lang="ru-RU" smtClean="0"/>
-              <a:t>27.08.2026</a:t>
+              <a:t>30.08.2026</a:t>
             </a:fld>
             <a:endParaRPr lang="ru-RU"/>
           </a:p>
@@ -12632,6 +12643,1590 @@
 </p:sld>
 </file>
 
+<file path=ppt/slides/slide12.xml><?xml version="1.0" encoding="utf-8"?>
+<p:sld xmlns:a="http://schemas.openxmlformats.org/drawingml/2006/main" xmlns:r="http://schemas.openxmlformats.org/officeDocument/2006/relationships" xmlns:p="http://schemas.openxmlformats.org/presentationml/2006/main">
+  <p:cSld>
+    <p:spTree>
+      <p:nvGrpSpPr>
+        <p:cNvPr id="1" name=""/>
+        <p:cNvGrpSpPr/>
+        <p:nvPr/>
+      </p:nvGrpSpPr>
+      <p:grpSpPr>
+        <a:xfrm>
+          <a:off x="0" y="0"/>
+          <a:ext cx="0" cy="0"/>
+          <a:chOff x="0" y="0"/>
+          <a:chExt cx="0" cy="0"/>
+        </a:xfrm>
+      </p:grpSpPr>
+      <p:sp>
+        <p:nvSpPr>
+          <p:cNvPr id="3" name="Объект 2"/>
+          <p:cNvSpPr>
+            <a:spLocks noGrp="1"/>
+          </p:cNvSpPr>
+          <p:nvPr>
+            <p:ph idx="1"/>
+          </p:nvPr>
+        </p:nvSpPr>
+        <p:spPr>
+          <a:xfrm>
+            <a:off x="1097450" y="914400"/>
+            <a:ext cx="9905999" cy="5492263"/>
+          </a:xfrm>
+        </p:spPr>
+        <p:txBody>
+          <a:bodyPr>
+            <a:normAutofit/>
+          </a:bodyPr>
+          <a:lstStyle/>
+          <a:p>
+            <a:pPr marL="0" indent="0">
+              <a:buNone/>
+            </a:pPr>
+            <a:r>
+              <a:rPr lang="ru-RU" sz="1800" b="1" dirty="0"/>
+              <a:t>Контекст:</a:t>
+            </a:r>
+            <a:r>
+              <a:rPr lang="ru-RU" sz="1800" dirty="0"/>
+              <a:t> Коммутатор с 4 портами только что включили (таблица MAC-адресов </a:t>
+            </a:r>
+            <a:r>
+              <a:rPr lang="ru-RU" sz="1800" b="1" dirty="0"/>
+              <a:t>пуста</a:t>
+            </a:r>
+            <a:r>
+              <a:rPr lang="ru-RU" sz="1800" dirty="0"/>
+              <a:t>).</a:t>
+            </a:r>
+          </a:p>
+          <a:p>
+            <a:r>
+              <a:rPr lang="ru-RU" sz="1800" dirty="0"/>
+              <a:t>К порту 1 подключен узел </a:t>
+            </a:r>
+            <a:r>
+              <a:rPr lang="ru-RU" sz="1800" b="1" dirty="0"/>
+              <a:t>A</a:t>
+            </a:r>
+            <a:endParaRPr lang="ru-RU" sz="1800" dirty="0"/>
+          </a:p>
+          <a:p>
+            <a:r>
+              <a:rPr lang="ru-RU" sz="1800" dirty="0"/>
+              <a:t>К порту 2 подключен узел </a:t>
+            </a:r>
+            <a:r>
+              <a:rPr lang="ru-RU" sz="1800" b="1" dirty="0"/>
+              <a:t>B</a:t>
+            </a:r>
+            <a:endParaRPr lang="ru-RU" sz="1800" dirty="0"/>
+          </a:p>
+          <a:p>
+            <a:r>
+              <a:rPr lang="ru-RU" sz="1800" dirty="0"/>
+              <a:t>К порту 3 подключен узел </a:t>
+            </a:r>
+            <a:r>
+              <a:rPr lang="ru-RU" sz="1800" b="1" dirty="0"/>
+              <a:t>C</a:t>
+            </a:r>
+            <a:endParaRPr lang="ru-RU" sz="1800" dirty="0"/>
+          </a:p>
+          <a:p>
+            <a:r>
+              <a:rPr lang="ru-RU" sz="1800" dirty="0"/>
+              <a:t>Порт 4 свободен</a:t>
+            </a:r>
+            <a:r>
+              <a:rPr lang="ru-RU" sz="1800" dirty="0" smtClean="0"/>
+              <a:t>.</a:t>
+            </a:r>
+            <a:endParaRPr lang="en-US" sz="1800" dirty="0" smtClean="0"/>
+          </a:p>
+          <a:p>
+            <a:pPr marL="0" indent="0">
+              <a:buNone/>
+            </a:pPr>
+            <a:r>
+              <a:rPr lang="ru-RU" sz="1800" b="1" dirty="0"/>
+              <a:t>События:</a:t>
+            </a:r>
+          </a:p>
+          <a:p>
+            <a:r>
+              <a:rPr lang="ru-RU" sz="1800" dirty="0"/>
+              <a:t>Узел A отправляет кадр узлу B.</a:t>
+            </a:r>
+          </a:p>
+          <a:p>
+            <a:r>
+              <a:rPr lang="ru-RU" sz="1800" dirty="0"/>
+              <a:t>Узел B сразу отправляет ответный кадр узлу A</a:t>
+            </a:r>
+            <a:r>
+              <a:rPr lang="ru-RU" sz="1800" dirty="0" smtClean="0"/>
+              <a:t>.</a:t>
+            </a:r>
+            <a:endParaRPr lang="en-US" sz="1800" dirty="0" smtClean="0"/>
+          </a:p>
+          <a:p>
+            <a:pPr marL="0" indent="0">
+              <a:buNone/>
+            </a:pPr>
+            <a:r>
+              <a:rPr lang="ru-RU" sz="1800" b="1" dirty="0"/>
+              <a:t>Вопросы:</a:t>
+            </a:r>
+          </a:p>
+          <a:p>
+            <a:r>
+              <a:rPr lang="ru-RU" sz="1800" dirty="0"/>
+              <a:t>Куда коммутатор перешлет первый кадр (от A к B) и какую запись сделает в таблице?</a:t>
+            </a:r>
+          </a:p>
+          <a:p>
+            <a:r>
+              <a:rPr lang="ru-RU" sz="1800" dirty="0"/>
+              <a:t>Куда коммутатор перешлет второй кадр (от B к A) и какую запись добавит?</a:t>
+            </a:r>
+          </a:p>
+          <a:p>
+            <a:pPr marL="0" indent="0">
+              <a:buNone/>
+            </a:pPr>
+            <a:endParaRPr lang="en-US" sz="1800" dirty="0"/>
+          </a:p>
+          <a:p>
+            <a:pPr marL="0" indent="0">
+              <a:buNone/>
+            </a:pPr>
+            <a:endParaRPr lang="ru-RU" sz="1800" dirty="0"/>
+          </a:p>
+          <a:p>
+            <a:pPr marL="0" indent="0">
+              <a:buNone/>
+            </a:pPr>
+            <a:endParaRPr lang="en-US" sz="1800" dirty="0"/>
+          </a:p>
+          <a:p>
+            <a:pPr marL="0" indent="0">
+              <a:buNone/>
+            </a:pPr>
+            <a:endParaRPr lang="ru-RU" sz="1800" dirty="0"/>
+          </a:p>
+          <a:p>
+            <a:pPr marL="0" indent="0">
+              <a:buNone/>
+            </a:pPr>
+            <a:endParaRPr lang="ru-RU" dirty="0"/>
+          </a:p>
+        </p:txBody>
+      </p:sp>
+    </p:spTree>
+    <p:extLst>
+      <p:ext uri="{BB962C8B-B14F-4D97-AF65-F5344CB8AC3E}">
+        <p14:creationId xmlns:p14="http://schemas.microsoft.com/office/powerpoint/2010/main" val="520317886"/>
+      </p:ext>
+    </p:extLst>
+  </p:cSld>
+  <p:clrMapOvr>
+    <a:masterClrMapping/>
+  </p:clrMapOvr>
+</p:sld>
+</file>
+
+<file path=ppt/slides/slide13.xml><?xml version="1.0" encoding="utf-8"?>
+<p:sld xmlns:a="http://schemas.openxmlformats.org/drawingml/2006/main" xmlns:r="http://schemas.openxmlformats.org/officeDocument/2006/relationships" xmlns:p="http://schemas.openxmlformats.org/presentationml/2006/main">
+  <p:cSld>
+    <p:spTree>
+      <p:nvGrpSpPr>
+        <p:cNvPr id="1" name=""/>
+        <p:cNvGrpSpPr/>
+        <p:nvPr/>
+      </p:nvGrpSpPr>
+      <p:grpSpPr>
+        <a:xfrm>
+          <a:off x="0" y="0"/>
+          <a:ext cx="0" cy="0"/>
+          <a:chOff x="0" y="0"/>
+          <a:chExt cx="0" cy="0"/>
+        </a:xfrm>
+      </p:grpSpPr>
+      <p:sp>
+        <p:nvSpPr>
+          <p:cNvPr id="2" name="Заголовок 1"/>
+          <p:cNvSpPr>
+            <a:spLocks noGrp="1"/>
+          </p:cNvSpPr>
+          <p:nvPr>
+            <p:ph type="title"/>
+          </p:nvPr>
+        </p:nvSpPr>
+        <p:spPr/>
+        <p:txBody>
+          <a:bodyPr/>
+          <a:lstStyle/>
+          <a:p>
+            <a:r>
+              <a:rPr lang="ru-RU" dirty="0"/>
+              <a:t>Сопоставьте технологию/стандарт (1–4) с её ключевой особенностью (А–Г):</a:t>
+            </a:r>
+            <a:endParaRPr lang="ru-RU" dirty="0"/>
+          </a:p>
+        </p:txBody>
+      </p:sp>
+      <p:graphicFrame>
+        <p:nvGraphicFramePr>
+          <p:cNvPr id="4" name="Объект 3"/>
+          <p:cNvGraphicFramePr>
+            <a:graphicFrameLocks noGrp="1"/>
+          </p:cNvGraphicFramePr>
+          <p:nvPr>
+            <p:ph idx="1"/>
+            <p:extLst>
+              <p:ext uri="{D42A27DB-BD31-4B8C-83A1-F6EECF244321}">
+                <p14:modId xmlns:p14="http://schemas.microsoft.com/office/powerpoint/2010/main" val="3197115935"/>
+              </p:ext>
+            </p:extLst>
+          </p:nvPr>
+        </p:nvGraphicFramePr>
+        <p:xfrm>
+          <a:off x="1141413" y="2547779"/>
+          <a:ext cx="9906000" cy="2945130"/>
+        </p:xfrm>
+        <a:graphic>
+          <a:graphicData uri="http://schemas.openxmlformats.org/drawingml/2006/table">
+            <a:tbl>
+              <a:tblPr/>
+              <a:tblGrid>
+                <a:gridCol w="4953000">
+                  <a:extLst>
+                    <a:ext uri="{9D8B030D-6E8A-4147-A177-3AD203B41FA5}">
+                      <a16:colId xmlns:a16="http://schemas.microsoft.com/office/drawing/2014/main" val="2975253219"/>
+                    </a:ext>
+                  </a:extLst>
+                </a:gridCol>
+                <a:gridCol w="4953000">
+                  <a:extLst>
+                    <a:ext uri="{9D8B030D-6E8A-4147-A177-3AD203B41FA5}">
+                      <a16:colId xmlns:a16="http://schemas.microsoft.com/office/drawing/2014/main" val="179604067"/>
+                    </a:ext>
+                  </a:extLst>
+                </a:gridCol>
+              </a:tblGrid>
+              <a:tr h="0">
+                <a:tc>
+                  <a:txBody>
+                    <a:bodyPr/>
+                    <a:lstStyle/>
+                    <a:p>
+                      <a:pPr algn="l"/>
+                      <a:r>
+                        <a:rPr lang="ru-RU" dirty="0">
+                          <a:effectLst/>
+                        </a:rPr>
+                        <a:t>Технология / Стандарт</a:t>
+                      </a:r>
+                    </a:p>
+                  </a:txBody>
+                  <a:tcPr marL="95250" marR="95250" marT="47625" marB="47625" anchor="ctr">
+                    <a:lnL w="12700" cap="flat" cmpd="sng" algn="ctr">
+                      <a:solidFill>
+                        <a:schemeClr val="tx1"/>
+                      </a:solidFill>
+                      <a:prstDash val="solid"/>
+                      <a:round/>
+                      <a:headEnd type="none" w="med" len="med"/>
+                      <a:tailEnd type="none" w="med" len="med"/>
+                    </a:lnL>
+                    <a:lnR w="12700" cap="flat" cmpd="sng" algn="ctr">
+                      <a:solidFill>
+                        <a:schemeClr val="tx1"/>
+                      </a:solidFill>
+                      <a:prstDash val="solid"/>
+                      <a:round/>
+                      <a:headEnd type="none" w="med" len="med"/>
+                      <a:tailEnd type="none" w="med" len="med"/>
+                    </a:lnR>
+                    <a:lnT w="12700" cap="flat" cmpd="sng" algn="ctr">
+                      <a:solidFill>
+                        <a:schemeClr val="tx1"/>
+                      </a:solidFill>
+                      <a:prstDash val="solid"/>
+                      <a:round/>
+                      <a:headEnd type="none" w="med" len="med"/>
+                      <a:tailEnd type="none" w="med" len="med"/>
+                    </a:lnT>
+                    <a:lnB w="12700" cap="flat" cmpd="sng" algn="ctr">
+                      <a:solidFill>
+                        <a:schemeClr val="tx1"/>
+                      </a:solidFill>
+                      <a:prstDash val="solid"/>
+                      <a:round/>
+                      <a:headEnd type="none" w="med" len="med"/>
+                      <a:tailEnd type="none" w="med" len="med"/>
+                    </a:lnB>
+                  </a:tcPr>
+                </a:tc>
+                <a:tc>
+                  <a:txBody>
+                    <a:bodyPr/>
+                    <a:lstStyle/>
+                    <a:p>
+                      <a:pPr algn="l"/>
+                      <a:r>
+                        <a:rPr lang="ru-RU">
+                          <a:effectLst/>
+                        </a:rPr>
+                        <a:t>Особенность</a:t>
+                      </a:r>
+                    </a:p>
+                  </a:txBody>
+                  <a:tcPr marL="95250" marR="95250" marT="47625" marB="47625" anchor="ctr">
+                    <a:lnL w="12700" cap="flat" cmpd="sng" algn="ctr">
+                      <a:solidFill>
+                        <a:schemeClr val="tx1"/>
+                      </a:solidFill>
+                      <a:prstDash val="solid"/>
+                      <a:round/>
+                      <a:headEnd type="none" w="med" len="med"/>
+                      <a:tailEnd type="none" w="med" len="med"/>
+                    </a:lnL>
+                    <a:lnR w="12700" cap="flat" cmpd="sng" algn="ctr">
+                      <a:solidFill>
+                        <a:schemeClr val="tx1"/>
+                      </a:solidFill>
+                      <a:prstDash val="solid"/>
+                      <a:round/>
+                      <a:headEnd type="none" w="med" len="med"/>
+                      <a:tailEnd type="none" w="med" len="med"/>
+                    </a:lnR>
+                    <a:lnT w="12700" cap="flat" cmpd="sng" algn="ctr">
+                      <a:solidFill>
+                        <a:schemeClr val="tx1"/>
+                      </a:solidFill>
+                      <a:prstDash val="solid"/>
+                      <a:round/>
+                      <a:headEnd type="none" w="med" len="med"/>
+                      <a:tailEnd type="none" w="med" len="med"/>
+                    </a:lnT>
+                    <a:lnB w="12700" cap="flat" cmpd="sng" algn="ctr">
+                      <a:solidFill>
+                        <a:schemeClr val="tx1"/>
+                      </a:solidFill>
+                      <a:prstDash val="solid"/>
+                      <a:round/>
+                      <a:headEnd type="none" w="med" len="med"/>
+                      <a:tailEnd type="none" w="med" len="med"/>
+                    </a:lnB>
+                  </a:tcPr>
+                </a:tc>
+                <a:extLst>
+                  <a:ext uri="{0D108BD9-81ED-4DB2-BD59-A6C34878D82A}">
+                    <a16:rowId xmlns:a16="http://schemas.microsoft.com/office/drawing/2014/main" val="633502444"/>
+                  </a:ext>
+                </a:extLst>
+              </a:tr>
+              <a:tr h="0">
+                <a:tc>
+                  <a:txBody>
+                    <a:bodyPr/>
+                    <a:lstStyle/>
+                    <a:p>
+                      <a:pPr algn="l"/>
+                      <a:r>
+                        <a:rPr lang="af-ZA" b="1" dirty="0">
+                          <a:effectLst/>
+                        </a:rPr>
+                        <a:t>1. 10BASE-T</a:t>
+                      </a:r>
+                      <a:endParaRPr lang="af-ZA" dirty="0">
+                        <a:effectLst/>
+                      </a:endParaRPr>
+                    </a:p>
+                  </a:txBody>
+                  <a:tcPr marL="95250" marR="95250" marT="47625" marB="47625" anchor="ctr">
+                    <a:lnL w="12700" cap="flat" cmpd="sng" algn="ctr">
+                      <a:solidFill>
+                        <a:schemeClr val="tx1"/>
+                      </a:solidFill>
+                      <a:prstDash val="solid"/>
+                      <a:round/>
+                      <a:headEnd type="none" w="med" len="med"/>
+                      <a:tailEnd type="none" w="med" len="med"/>
+                    </a:lnL>
+                    <a:lnR w="12700" cap="flat" cmpd="sng" algn="ctr">
+                      <a:solidFill>
+                        <a:schemeClr val="tx1"/>
+                      </a:solidFill>
+                      <a:prstDash val="solid"/>
+                      <a:round/>
+                      <a:headEnd type="none" w="med" len="med"/>
+                      <a:tailEnd type="none" w="med" len="med"/>
+                    </a:lnR>
+                    <a:lnT w="12700" cap="flat" cmpd="sng" algn="ctr">
+                      <a:solidFill>
+                        <a:schemeClr val="tx1"/>
+                      </a:solidFill>
+                      <a:prstDash val="solid"/>
+                      <a:round/>
+                      <a:headEnd type="none" w="med" len="med"/>
+                      <a:tailEnd type="none" w="med" len="med"/>
+                    </a:lnT>
+                    <a:lnB w="12700" cap="flat" cmpd="sng" algn="ctr">
+                      <a:solidFill>
+                        <a:schemeClr val="tx1"/>
+                      </a:solidFill>
+                      <a:prstDash val="solid"/>
+                      <a:round/>
+                      <a:headEnd type="none" w="med" len="med"/>
+                      <a:tailEnd type="none" w="med" len="med"/>
+                    </a:lnB>
+                  </a:tcPr>
+                </a:tc>
+                <a:tc>
+                  <a:txBody>
+                    <a:bodyPr/>
+                    <a:lstStyle/>
+                    <a:p>
+                      <a:pPr algn="l"/>
+                      <a:r>
+                        <a:rPr lang="ru-RU" b="1">
+                          <a:effectLst/>
+                        </a:rPr>
+                        <a:t>А.</a:t>
+                      </a:r>
+                      <a:r>
+                        <a:rPr lang="ru-RU">
+                          <a:effectLst/>
+                        </a:rPr>
+                        <a:t> Полный отказ от Half-Duplex и CSMA/CD на уровне стандарта</a:t>
+                      </a:r>
+                    </a:p>
+                  </a:txBody>
+                  <a:tcPr marL="95250" marR="95250" marT="47625" marB="47625" anchor="ctr">
+                    <a:lnL w="12700" cap="flat" cmpd="sng" algn="ctr">
+                      <a:solidFill>
+                        <a:schemeClr val="tx1"/>
+                      </a:solidFill>
+                      <a:prstDash val="solid"/>
+                      <a:round/>
+                      <a:headEnd type="none" w="med" len="med"/>
+                      <a:tailEnd type="none" w="med" len="med"/>
+                    </a:lnL>
+                    <a:lnR w="12700" cap="flat" cmpd="sng" algn="ctr">
+                      <a:solidFill>
+                        <a:schemeClr val="tx1"/>
+                      </a:solidFill>
+                      <a:prstDash val="solid"/>
+                      <a:round/>
+                      <a:headEnd type="none" w="med" len="med"/>
+                      <a:tailEnd type="none" w="med" len="med"/>
+                    </a:lnR>
+                    <a:lnT w="12700" cap="flat" cmpd="sng" algn="ctr">
+                      <a:solidFill>
+                        <a:schemeClr val="tx1"/>
+                      </a:solidFill>
+                      <a:prstDash val="solid"/>
+                      <a:round/>
+                      <a:headEnd type="none" w="med" len="med"/>
+                      <a:tailEnd type="none" w="med" len="med"/>
+                    </a:lnT>
+                    <a:lnB w="12700" cap="flat" cmpd="sng" algn="ctr">
+                      <a:solidFill>
+                        <a:schemeClr val="tx1"/>
+                      </a:solidFill>
+                      <a:prstDash val="solid"/>
+                      <a:round/>
+                      <a:headEnd type="none" w="med" len="med"/>
+                      <a:tailEnd type="none" w="med" len="med"/>
+                    </a:lnB>
+                  </a:tcPr>
+                </a:tc>
+                <a:extLst>
+                  <a:ext uri="{0D108BD9-81ED-4DB2-BD59-A6C34878D82A}">
+                    <a16:rowId xmlns:a16="http://schemas.microsoft.com/office/drawing/2014/main" val="3160696781"/>
+                  </a:ext>
+                </a:extLst>
+              </a:tr>
+              <a:tr h="0">
+                <a:tc>
+                  <a:txBody>
+                    <a:bodyPr/>
+                    <a:lstStyle/>
+                    <a:p>
+                      <a:pPr algn="l"/>
+                      <a:r>
+                        <a:rPr lang="af-ZA" b="1" dirty="0">
+                          <a:effectLst/>
+                        </a:rPr>
+                        <a:t>2. 1000BASE-T</a:t>
+                      </a:r>
+                      <a:endParaRPr lang="af-ZA" dirty="0">
+                        <a:effectLst/>
+                      </a:endParaRPr>
+                    </a:p>
+                  </a:txBody>
+                  <a:tcPr marL="95250" marR="95250" marT="47625" marB="47625" anchor="ctr">
+                    <a:lnL w="12700" cap="flat" cmpd="sng" algn="ctr">
+                      <a:solidFill>
+                        <a:schemeClr val="tx1"/>
+                      </a:solidFill>
+                      <a:prstDash val="solid"/>
+                      <a:round/>
+                      <a:headEnd type="none" w="med" len="med"/>
+                      <a:tailEnd type="none" w="med" len="med"/>
+                    </a:lnL>
+                    <a:lnR w="12700" cap="flat" cmpd="sng" algn="ctr">
+                      <a:solidFill>
+                        <a:schemeClr val="tx1"/>
+                      </a:solidFill>
+                      <a:prstDash val="solid"/>
+                      <a:round/>
+                      <a:headEnd type="none" w="med" len="med"/>
+                      <a:tailEnd type="none" w="med" len="med"/>
+                    </a:lnR>
+                    <a:lnT w="12700" cap="flat" cmpd="sng" algn="ctr">
+                      <a:solidFill>
+                        <a:schemeClr val="tx1"/>
+                      </a:solidFill>
+                      <a:prstDash val="solid"/>
+                      <a:round/>
+                      <a:headEnd type="none" w="med" len="med"/>
+                      <a:tailEnd type="none" w="med" len="med"/>
+                    </a:lnT>
+                    <a:lnB w="12700" cap="flat" cmpd="sng" algn="ctr">
+                      <a:solidFill>
+                        <a:schemeClr val="tx1"/>
+                      </a:solidFill>
+                      <a:prstDash val="solid"/>
+                      <a:round/>
+                      <a:headEnd type="none" w="med" len="med"/>
+                      <a:tailEnd type="none" w="med" len="med"/>
+                    </a:lnB>
+                  </a:tcPr>
+                </a:tc>
+                <a:tc>
+                  <a:txBody>
+                    <a:bodyPr/>
+                    <a:lstStyle/>
+                    <a:p>
+                      <a:pPr algn="l"/>
+                      <a:r>
+                        <a:rPr lang="ru-RU" b="1" dirty="0">
+                          <a:effectLst/>
+                        </a:rPr>
+                        <a:t>Б.</a:t>
+                      </a:r>
+                      <a:r>
+                        <a:rPr lang="ru-RU" dirty="0">
+                          <a:effectLst/>
+                        </a:rPr>
+                        <a:t> Оптика на длине волны ~1310 </a:t>
+                      </a:r>
+                      <a:r>
+                        <a:rPr lang="ru-RU" dirty="0" err="1">
+                          <a:effectLst/>
+                        </a:rPr>
+                        <a:t>нм</a:t>
+                      </a:r>
+                      <a:r>
+                        <a:rPr lang="ru-RU" dirty="0">
+                          <a:effectLst/>
+                        </a:rPr>
+                        <a:t>, дальность до 5 км по </a:t>
+                      </a:r>
+                      <a:r>
+                        <a:rPr lang="ru-RU" dirty="0" err="1">
+                          <a:effectLst/>
+                        </a:rPr>
+                        <a:t>одномоду</a:t>
+                      </a:r>
+                      <a:endParaRPr lang="ru-RU" dirty="0">
+                        <a:effectLst/>
+                      </a:endParaRPr>
+                    </a:p>
+                  </a:txBody>
+                  <a:tcPr marL="95250" marR="95250" marT="47625" marB="47625" anchor="ctr">
+                    <a:lnL w="12700" cap="flat" cmpd="sng" algn="ctr">
+                      <a:solidFill>
+                        <a:schemeClr val="tx1"/>
+                      </a:solidFill>
+                      <a:prstDash val="solid"/>
+                      <a:round/>
+                      <a:headEnd type="none" w="med" len="med"/>
+                      <a:tailEnd type="none" w="med" len="med"/>
+                    </a:lnL>
+                    <a:lnR w="12700" cap="flat" cmpd="sng" algn="ctr">
+                      <a:solidFill>
+                        <a:schemeClr val="tx1"/>
+                      </a:solidFill>
+                      <a:prstDash val="solid"/>
+                      <a:round/>
+                      <a:headEnd type="none" w="med" len="med"/>
+                      <a:tailEnd type="none" w="med" len="med"/>
+                    </a:lnR>
+                    <a:lnT w="12700" cap="flat" cmpd="sng" algn="ctr">
+                      <a:solidFill>
+                        <a:schemeClr val="tx1"/>
+                      </a:solidFill>
+                      <a:prstDash val="solid"/>
+                      <a:round/>
+                      <a:headEnd type="none" w="med" len="med"/>
+                      <a:tailEnd type="none" w="med" len="med"/>
+                    </a:lnT>
+                    <a:lnB w="12700" cap="flat" cmpd="sng" algn="ctr">
+                      <a:solidFill>
+                        <a:schemeClr val="tx1"/>
+                      </a:solidFill>
+                      <a:prstDash val="solid"/>
+                      <a:round/>
+                      <a:headEnd type="none" w="med" len="med"/>
+                      <a:tailEnd type="none" w="med" len="med"/>
+                    </a:lnB>
+                  </a:tcPr>
+                </a:tc>
+                <a:extLst>
+                  <a:ext uri="{0D108BD9-81ED-4DB2-BD59-A6C34878D82A}">
+                    <a16:rowId xmlns:a16="http://schemas.microsoft.com/office/drawing/2014/main" val="53294588"/>
+                  </a:ext>
+                </a:extLst>
+              </a:tr>
+              <a:tr h="0">
+                <a:tc>
+                  <a:txBody>
+                    <a:bodyPr/>
+                    <a:lstStyle/>
+                    <a:p>
+                      <a:pPr algn="l"/>
+                      <a:r>
+                        <a:rPr lang="af-ZA" b="1">
+                          <a:effectLst/>
+                        </a:rPr>
+                        <a:t>3. 1000BASE-LX</a:t>
+                      </a:r>
+                      <a:endParaRPr lang="af-ZA">
+                        <a:effectLst/>
+                      </a:endParaRPr>
+                    </a:p>
+                  </a:txBody>
+                  <a:tcPr marL="95250" marR="95250" marT="47625" marB="47625" anchor="ctr">
+                    <a:lnL w="12700" cap="flat" cmpd="sng" algn="ctr">
+                      <a:solidFill>
+                        <a:schemeClr val="tx1"/>
+                      </a:solidFill>
+                      <a:prstDash val="solid"/>
+                      <a:round/>
+                      <a:headEnd type="none" w="med" len="med"/>
+                      <a:tailEnd type="none" w="med" len="med"/>
+                    </a:lnL>
+                    <a:lnR w="12700" cap="flat" cmpd="sng" algn="ctr">
+                      <a:solidFill>
+                        <a:schemeClr val="tx1"/>
+                      </a:solidFill>
+                      <a:prstDash val="solid"/>
+                      <a:round/>
+                      <a:headEnd type="none" w="med" len="med"/>
+                      <a:tailEnd type="none" w="med" len="med"/>
+                    </a:lnR>
+                    <a:lnT w="12700" cap="flat" cmpd="sng" algn="ctr">
+                      <a:solidFill>
+                        <a:schemeClr val="tx1"/>
+                      </a:solidFill>
+                      <a:prstDash val="solid"/>
+                      <a:round/>
+                      <a:headEnd type="none" w="med" len="med"/>
+                      <a:tailEnd type="none" w="med" len="med"/>
+                    </a:lnT>
+                    <a:lnB w="12700" cap="flat" cmpd="sng" algn="ctr">
+                      <a:solidFill>
+                        <a:schemeClr val="tx1"/>
+                      </a:solidFill>
+                      <a:prstDash val="solid"/>
+                      <a:round/>
+                      <a:headEnd type="none" w="med" len="med"/>
+                      <a:tailEnd type="none" w="med" len="med"/>
+                    </a:lnB>
+                  </a:tcPr>
+                </a:tc>
+                <a:tc>
+                  <a:txBody>
+                    <a:bodyPr/>
+                    <a:lstStyle/>
+                    <a:p>
+                      <a:pPr algn="l"/>
+                      <a:r>
+                        <a:rPr lang="ru-RU" b="1" dirty="0">
+                          <a:effectLst/>
+                        </a:rPr>
+                        <a:t>В.</a:t>
+                      </a:r>
+                      <a:r>
+                        <a:rPr lang="ru-RU" dirty="0">
+                          <a:effectLst/>
+                        </a:rPr>
+                        <a:t> Передача 1 Гбит/с по 4 витым парам (по 250 Мбит/с на пару)</a:t>
+                      </a:r>
+                    </a:p>
+                  </a:txBody>
+                  <a:tcPr marL="95250" marR="95250" marT="47625" marB="47625" anchor="ctr">
+                    <a:lnL w="12700" cap="flat" cmpd="sng" algn="ctr">
+                      <a:solidFill>
+                        <a:schemeClr val="tx1"/>
+                      </a:solidFill>
+                      <a:prstDash val="solid"/>
+                      <a:round/>
+                      <a:headEnd type="none" w="med" len="med"/>
+                      <a:tailEnd type="none" w="med" len="med"/>
+                    </a:lnL>
+                    <a:lnR w="12700" cap="flat" cmpd="sng" algn="ctr">
+                      <a:solidFill>
+                        <a:schemeClr val="tx1"/>
+                      </a:solidFill>
+                      <a:prstDash val="solid"/>
+                      <a:round/>
+                      <a:headEnd type="none" w="med" len="med"/>
+                      <a:tailEnd type="none" w="med" len="med"/>
+                    </a:lnR>
+                    <a:lnT w="12700" cap="flat" cmpd="sng" algn="ctr">
+                      <a:solidFill>
+                        <a:schemeClr val="tx1"/>
+                      </a:solidFill>
+                      <a:prstDash val="solid"/>
+                      <a:round/>
+                      <a:headEnd type="none" w="med" len="med"/>
+                      <a:tailEnd type="none" w="med" len="med"/>
+                    </a:lnT>
+                    <a:lnB w="12700" cap="flat" cmpd="sng" algn="ctr">
+                      <a:solidFill>
+                        <a:schemeClr val="tx1"/>
+                      </a:solidFill>
+                      <a:prstDash val="solid"/>
+                      <a:round/>
+                      <a:headEnd type="none" w="med" len="med"/>
+                      <a:tailEnd type="none" w="med" len="med"/>
+                    </a:lnB>
+                  </a:tcPr>
+                </a:tc>
+                <a:extLst>
+                  <a:ext uri="{0D108BD9-81ED-4DB2-BD59-A6C34878D82A}">
+                    <a16:rowId xmlns:a16="http://schemas.microsoft.com/office/drawing/2014/main" val="1277358185"/>
+                  </a:ext>
+                </a:extLst>
+              </a:tr>
+              <a:tr h="0">
+                <a:tc>
+                  <a:txBody>
+                    <a:bodyPr/>
+                    <a:lstStyle/>
+                    <a:p>
+                      <a:pPr algn="l"/>
+                      <a:r>
+                        <a:rPr lang="af-ZA" b="1">
+                          <a:effectLst/>
+                        </a:rPr>
+                        <a:t>4. 10GBASE</a:t>
+                      </a:r>
+                      <a:endParaRPr lang="af-ZA">
+                        <a:effectLst/>
+                      </a:endParaRPr>
+                    </a:p>
+                  </a:txBody>
+                  <a:tcPr marL="95250" marR="95250" marT="47625" marB="47625" anchor="ctr">
+                    <a:lnL w="12700" cap="flat" cmpd="sng" algn="ctr">
+                      <a:solidFill>
+                        <a:schemeClr val="tx1"/>
+                      </a:solidFill>
+                      <a:prstDash val="solid"/>
+                      <a:round/>
+                      <a:headEnd type="none" w="med" len="med"/>
+                      <a:tailEnd type="none" w="med" len="med"/>
+                    </a:lnL>
+                    <a:lnR w="12700" cap="flat" cmpd="sng" algn="ctr">
+                      <a:solidFill>
+                        <a:schemeClr val="tx1"/>
+                      </a:solidFill>
+                      <a:prstDash val="solid"/>
+                      <a:round/>
+                      <a:headEnd type="none" w="med" len="med"/>
+                      <a:tailEnd type="none" w="med" len="med"/>
+                    </a:lnR>
+                    <a:lnT w="12700" cap="flat" cmpd="sng" algn="ctr">
+                      <a:solidFill>
+                        <a:schemeClr val="tx1"/>
+                      </a:solidFill>
+                      <a:prstDash val="solid"/>
+                      <a:round/>
+                      <a:headEnd type="none" w="med" len="med"/>
+                      <a:tailEnd type="none" w="med" len="med"/>
+                    </a:lnT>
+                    <a:lnB w="12700" cap="flat" cmpd="sng" algn="ctr">
+                      <a:solidFill>
+                        <a:schemeClr val="tx1"/>
+                      </a:solidFill>
+                      <a:prstDash val="solid"/>
+                      <a:round/>
+                      <a:headEnd type="none" w="med" len="med"/>
+                      <a:tailEnd type="none" w="med" len="med"/>
+                    </a:lnB>
+                  </a:tcPr>
+                </a:tc>
+                <a:tc>
+                  <a:txBody>
+                    <a:bodyPr/>
+                    <a:lstStyle/>
+                    <a:p>
+                      <a:pPr algn="l"/>
+                      <a:r>
+                        <a:rPr lang="ru-RU" b="1" dirty="0">
+                          <a:effectLst/>
+                        </a:rPr>
+                        <a:t>Г.</a:t>
+                      </a:r>
+                      <a:r>
+                        <a:rPr lang="ru-RU" dirty="0">
+                          <a:effectLst/>
+                        </a:rPr>
+                        <a:t> Первое появление импульсов NLP для проверки линии</a:t>
+                      </a:r>
+                    </a:p>
+                  </a:txBody>
+                  <a:tcPr marL="95250" marR="95250" marT="47625" marB="47625" anchor="ctr">
+                    <a:lnL w="12700" cap="flat" cmpd="sng" algn="ctr">
+                      <a:solidFill>
+                        <a:schemeClr val="tx1"/>
+                      </a:solidFill>
+                      <a:prstDash val="solid"/>
+                      <a:round/>
+                      <a:headEnd type="none" w="med" len="med"/>
+                      <a:tailEnd type="none" w="med" len="med"/>
+                    </a:lnL>
+                    <a:lnR w="12700" cap="flat" cmpd="sng" algn="ctr">
+                      <a:solidFill>
+                        <a:schemeClr val="tx1"/>
+                      </a:solidFill>
+                      <a:prstDash val="solid"/>
+                      <a:round/>
+                      <a:headEnd type="none" w="med" len="med"/>
+                      <a:tailEnd type="none" w="med" len="med"/>
+                    </a:lnR>
+                    <a:lnT w="12700" cap="flat" cmpd="sng" algn="ctr">
+                      <a:solidFill>
+                        <a:schemeClr val="tx1"/>
+                      </a:solidFill>
+                      <a:prstDash val="solid"/>
+                      <a:round/>
+                      <a:headEnd type="none" w="med" len="med"/>
+                      <a:tailEnd type="none" w="med" len="med"/>
+                    </a:lnT>
+                    <a:lnB w="12700" cap="flat" cmpd="sng" algn="ctr">
+                      <a:solidFill>
+                        <a:schemeClr val="tx1"/>
+                      </a:solidFill>
+                      <a:prstDash val="solid"/>
+                      <a:round/>
+                      <a:headEnd type="none" w="med" len="med"/>
+                      <a:tailEnd type="none" w="med" len="med"/>
+                    </a:lnB>
+                  </a:tcPr>
+                </a:tc>
+                <a:extLst>
+                  <a:ext uri="{0D108BD9-81ED-4DB2-BD59-A6C34878D82A}">
+                    <a16:rowId xmlns:a16="http://schemas.microsoft.com/office/drawing/2014/main" val="3170674355"/>
+                  </a:ext>
+                </a:extLst>
+              </a:tr>
+            </a:tbl>
+          </a:graphicData>
+        </a:graphic>
+      </p:graphicFrame>
+    </p:spTree>
+    <p:extLst>
+      <p:ext uri="{BB962C8B-B14F-4D97-AF65-F5344CB8AC3E}">
+        <p14:creationId xmlns:p14="http://schemas.microsoft.com/office/powerpoint/2010/main" val="295961537"/>
+      </p:ext>
+    </p:extLst>
+  </p:cSld>
+  <p:clrMapOvr>
+    <a:masterClrMapping/>
+  </p:clrMapOvr>
+</p:sld>
+</file>
+
+<file path=ppt/slides/slide14.xml><?xml version="1.0" encoding="utf-8"?>
+<p:sld xmlns:a="http://schemas.openxmlformats.org/drawingml/2006/main" xmlns:r="http://schemas.openxmlformats.org/officeDocument/2006/relationships" xmlns:p="http://schemas.openxmlformats.org/presentationml/2006/main">
+  <p:cSld>
+    <p:spTree>
+      <p:nvGrpSpPr>
+        <p:cNvPr id="1" name=""/>
+        <p:cNvGrpSpPr/>
+        <p:nvPr/>
+      </p:nvGrpSpPr>
+      <p:grpSpPr>
+        <a:xfrm>
+          <a:off x="0" y="0"/>
+          <a:ext cx="0" cy="0"/>
+          <a:chOff x="0" y="0"/>
+          <a:chExt cx="0" cy="0"/>
+        </a:xfrm>
+      </p:grpSpPr>
+      <p:sp>
+        <p:nvSpPr>
+          <p:cNvPr id="2" name="Заголовок 1"/>
+          <p:cNvSpPr>
+            <a:spLocks noGrp="1"/>
+          </p:cNvSpPr>
+          <p:nvPr>
+            <p:ph type="title"/>
+          </p:nvPr>
+        </p:nvSpPr>
+        <p:spPr/>
+        <p:txBody>
+          <a:bodyPr>
+            <a:normAutofit fontScale="90000"/>
+          </a:bodyPr>
+          <a:lstStyle/>
+          <a:p>
+            <a:r>
+              <a:rPr lang="ru-RU" dirty="0"/>
+              <a:t>Определите, верны ли следующие утверждения (если нет — объясните, в чём ошибка):</a:t>
+            </a:r>
+            <a:endParaRPr lang="ru-RU" dirty="0"/>
+          </a:p>
+        </p:txBody>
+      </p:sp>
+      <p:sp>
+        <p:nvSpPr>
+          <p:cNvPr id="3" name="Объект 2"/>
+          <p:cNvSpPr>
+            <a:spLocks noGrp="1"/>
+          </p:cNvSpPr>
+          <p:nvPr>
+            <p:ph idx="1"/>
+          </p:nvPr>
+        </p:nvSpPr>
+        <p:spPr/>
+        <p:txBody>
+          <a:bodyPr>
+            <a:normAutofit fontScale="92500" lnSpcReduction="10000"/>
+          </a:bodyPr>
+          <a:lstStyle/>
+          <a:p>
+            <a:r>
+              <a:rPr lang="ru-RU" b="1" dirty="0"/>
+              <a:t>Коммутатор делит сеть на несколько широковещательных доменов (по одному на каждый порт).</a:t>
+            </a:r>
+            <a:r>
+              <a:rPr lang="ru-RU" dirty="0"/>
+              <a:t> </a:t>
+            </a:r>
+            <a:r>
+              <a:rPr lang="ru-RU" i="1" dirty="0"/>
+              <a:t>(Правда / Ложь)</a:t>
+            </a:r>
+            <a:endParaRPr lang="ru-RU" dirty="0"/>
+          </a:p>
+          <a:p>
+            <a:r>
+              <a:rPr lang="ru-RU" b="1" dirty="0"/>
+              <a:t>Чтобы включить </a:t>
+            </a:r>
+            <a:r>
+              <a:rPr lang="ru-RU" b="1" dirty="0" err="1"/>
+              <a:t>Full</a:t>
+            </a:r>
+            <a:r>
+              <a:rPr lang="ru-RU" b="1" dirty="0"/>
+              <a:t> </a:t>
+            </a:r>
+            <a:r>
+              <a:rPr lang="ru-RU" b="1" dirty="0" err="1"/>
+              <a:t>Duplex</a:t>
+            </a:r>
+            <a:r>
+              <a:rPr lang="ru-RU" b="1" dirty="0"/>
+              <a:t> на </a:t>
+            </a:r>
+            <a:r>
+              <a:rPr lang="ru-RU" b="1" dirty="0" err="1"/>
+              <a:t>линке</a:t>
+            </a:r>
+            <a:r>
+              <a:rPr lang="ru-RU" b="1" dirty="0"/>
+              <a:t> «точка-точка», нужно отключить алгоритм CSMA/CD.</a:t>
+            </a:r>
+            <a:r>
+              <a:rPr lang="ru-RU" dirty="0"/>
+              <a:t> </a:t>
+            </a:r>
+            <a:r>
+              <a:rPr lang="ru-RU" i="1" dirty="0"/>
+              <a:t>(Правда / Ложь)</a:t>
+            </a:r>
+            <a:endParaRPr lang="ru-RU" dirty="0"/>
+          </a:p>
+          <a:p>
+            <a:r>
+              <a:rPr lang="ru-RU" b="1" dirty="0"/>
+              <a:t>Для соединения двух коммутаторов без поддержки </a:t>
+            </a:r>
+            <a:r>
+              <a:rPr lang="ru-RU" b="1" dirty="0" err="1"/>
+              <a:t>Auto</a:t>
+            </a:r>
+            <a:r>
+              <a:rPr lang="ru-RU" b="1" dirty="0"/>
+              <a:t> MDI-X нужен прямой </a:t>
+            </a:r>
+            <a:r>
+              <a:rPr lang="ru-RU" b="1" dirty="0" err="1"/>
+              <a:t>патч</a:t>
+            </a:r>
+            <a:r>
+              <a:rPr lang="ru-RU" b="1" dirty="0"/>
+              <a:t>-корд.</a:t>
+            </a:r>
+            <a:r>
+              <a:rPr lang="ru-RU" dirty="0"/>
+              <a:t> </a:t>
+            </a:r>
+            <a:r>
+              <a:rPr lang="ru-RU" i="1" dirty="0"/>
+              <a:t>(Правда / Ложь)</a:t>
+            </a:r>
+            <a:endParaRPr lang="ru-RU" dirty="0"/>
+          </a:p>
+          <a:p>
+            <a:r>
+              <a:rPr lang="ru-RU" b="1" dirty="0"/>
+              <a:t>Один пакет FLP (</a:t>
+            </a:r>
+            <a:r>
+              <a:rPr lang="ru-RU" b="1" dirty="0" err="1"/>
+              <a:t>Fast</a:t>
+            </a:r>
+            <a:r>
+              <a:rPr lang="ru-RU" b="1" dirty="0"/>
+              <a:t> </a:t>
+            </a:r>
+            <a:r>
+              <a:rPr lang="ru-RU" b="1" dirty="0" err="1"/>
+              <a:t>Link</a:t>
+            </a:r>
+            <a:r>
+              <a:rPr lang="ru-RU" b="1" dirty="0"/>
+              <a:t> </a:t>
+            </a:r>
+            <a:r>
+              <a:rPr lang="ru-RU" b="1" dirty="0" err="1"/>
+              <a:t>Pulse</a:t>
+            </a:r>
+            <a:r>
+              <a:rPr lang="ru-RU" b="1" dirty="0"/>
+              <a:t>) передает ровно 16 бит информации (</a:t>
+            </a:r>
+            <a:r>
+              <a:rPr lang="ru-RU" b="1" dirty="0" err="1"/>
+              <a:t>Link</a:t>
+            </a:r>
+            <a:r>
+              <a:rPr lang="ru-RU" b="1" dirty="0"/>
+              <a:t> </a:t>
+            </a:r>
+            <a:r>
+              <a:rPr lang="ru-RU" b="1" dirty="0" err="1"/>
+              <a:t>Code</a:t>
+            </a:r>
+            <a:r>
+              <a:rPr lang="ru-RU" b="1" dirty="0"/>
+              <a:t> </a:t>
+            </a:r>
+            <a:r>
+              <a:rPr lang="ru-RU" b="1" dirty="0" err="1"/>
+              <a:t>Word</a:t>
+            </a:r>
+            <a:r>
+              <a:rPr lang="ru-RU" b="1" dirty="0"/>
+              <a:t>).</a:t>
+            </a:r>
+            <a:r>
+              <a:rPr lang="ru-RU" dirty="0"/>
+              <a:t> </a:t>
+            </a:r>
+            <a:r>
+              <a:rPr lang="ru-RU" i="1" dirty="0"/>
+              <a:t>(Правда / Ложь)</a:t>
+            </a:r>
+            <a:endParaRPr lang="ru-RU" dirty="0"/>
+          </a:p>
+          <a:p>
+            <a:pPr marL="0" indent="0">
+              <a:buNone/>
+            </a:pPr>
+            <a:endParaRPr lang="ru-RU" dirty="0"/>
+          </a:p>
+        </p:txBody>
+      </p:sp>
+    </p:spTree>
+    <p:extLst>
+      <p:ext uri="{BB962C8B-B14F-4D97-AF65-F5344CB8AC3E}">
+        <p14:creationId xmlns:p14="http://schemas.microsoft.com/office/powerpoint/2010/main" val="4141854268"/>
+      </p:ext>
+    </p:extLst>
+  </p:cSld>
+  <p:clrMapOvr>
+    <a:masterClrMapping/>
+  </p:clrMapOvr>
+</p:sld>
+</file>
+
+<file path=ppt/slides/slide15.xml><?xml version="1.0" encoding="utf-8"?>
+<p:sld xmlns:a="http://schemas.openxmlformats.org/drawingml/2006/main" xmlns:r="http://schemas.openxmlformats.org/officeDocument/2006/relationships" xmlns:p="http://schemas.openxmlformats.org/presentationml/2006/main">
+  <p:cSld>
+    <p:spTree>
+      <p:nvGrpSpPr>
+        <p:cNvPr id="1" name=""/>
+        <p:cNvGrpSpPr/>
+        <p:nvPr/>
+      </p:nvGrpSpPr>
+      <p:grpSpPr>
+        <a:xfrm>
+          <a:off x="0" y="0"/>
+          <a:ext cx="0" cy="0"/>
+          <a:chOff x="0" y="0"/>
+          <a:chExt cx="0" cy="0"/>
+        </a:xfrm>
+      </p:grpSpPr>
+      <p:sp>
+        <p:nvSpPr>
+          <p:cNvPr id="2" name="Заголовок 1"/>
+          <p:cNvSpPr>
+            <a:spLocks noGrp="1"/>
+          </p:cNvSpPr>
+          <p:nvPr>
+            <p:ph type="title"/>
+          </p:nvPr>
+        </p:nvSpPr>
+        <p:spPr/>
+        <p:txBody>
+          <a:bodyPr/>
+          <a:lstStyle/>
+          <a:p>
+            <a:r>
+              <a:rPr lang="ru-RU" dirty="0"/>
+              <a:t>Заполните пропуски нужными словами или числами:</a:t>
+            </a:r>
+            <a:endParaRPr lang="ru-RU" dirty="0"/>
+          </a:p>
+        </p:txBody>
+      </p:sp>
+      <p:sp>
+        <p:nvSpPr>
+          <p:cNvPr id="3" name="Объект 2"/>
+          <p:cNvSpPr>
+            <a:spLocks noGrp="1"/>
+          </p:cNvSpPr>
+          <p:nvPr>
+            <p:ph idx="1"/>
+          </p:nvPr>
+        </p:nvSpPr>
+        <p:spPr/>
+        <p:txBody>
+          <a:bodyPr/>
+          <a:lstStyle/>
+          <a:p>
+            <a:r>
+              <a:rPr lang="ru-RU" dirty="0"/>
+              <a:t>В </a:t>
+            </a:r>
+            <a:r>
+              <a:rPr lang="ru-RU" dirty="0" err="1"/>
+              <a:t>автосогласовании</a:t>
+            </a:r>
+            <a:r>
+              <a:rPr lang="ru-RU" dirty="0"/>
+              <a:t> серия FLP состоит из </a:t>
+            </a:r>
+            <a:r>
+              <a:rPr lang="ru-RU" b="1" dirty="0"/>
+              <a:t>[ ? ]</a:t>
+            </a:r>
+            <a:r>
+              <a:rPr lang="ru-RU" dirty="0"/>
+              <a:t> импульсов: нечётные импульсы являются тактовыми, а чётные — </a:t>
+            </a:r>
+            <a:r>
+              <a:rPr lang="ru-RU" b="1" dirty="0"/>
+              <a:t>[ ? ]</a:t>
+            </a:r>
+            <a:r>
+              <a:rPr lang="ru-RU" dirty="0"/>
+              <a:t>.</a:t>
+            </a:r>
+          </a:p>
+          <a:p>
+            <a:r>
+              <a:rPr lang="ru-RU" dirty="0"/>
+              <a:t>В режиме </a:t>
+            </a:r>
+            <a:r>
+              <a:rPr lang="ru-RU" dirty="0" err="1"/>
+              <a:t>Full</a:t>
+            </a:r>
+            <a:r>
+              <a:rPr lang="ru-RU" dirty="0"/>
+              <a:t> </a:t>
+            </a:r>
+            <a:r>
+              <a:rPr lang="ru-RU" dirty="0" err="1"/>
+              <a:t>Duplex</a:t>
+            </a:r>
+            <a:r>
+              <a:rPr lang="ru-RU" dirty="0"/>
+              <a:t> коллизии не возникают на физическом уровне, однако если перевести адаптеры в </a:t>
+            </a:r>
+            <a:r>
+              <a:rPr lang="ru-RU" dirty="0" err="1"/>
+              <a:t>Full</a:t>
+            </a:r>
+            <a:r>
+              <a:rPr lang="ru-RU" dirty="0"/>
+              <a:t> </a:t>
+            </a:r>
+            <a:r>
+              <a:rPr lang="ru-RU" dirty="0" err="1"/>
+              <a:t>Duplex</a:t>
+            </a:r>
+            <a:r>
+              <a:rPr lang="ru-RU" dirty="0"/>
+              <a:t> при подключении к </a:t>
+            </a:r>
+            <a:r>
+              <a:rPr lang="ru-RU" b="1" dirty="0"/>
+              <a:t>[ ? ]</a:t>
+            </a:r>
+            <a:r>
+              <a:rPr lang="ru-RU" dirty="0"/>
+              <a:t>, сеть начнет терять данные из-за неучтённых коллизий.</a:t>
+            </a:r>
+          </a:p>
+          <a:p>
+            <a:r>
+              <a:rPr lang="ru-RU" dirty="0"/>
+              <a:t>Технология, которая автоматически меняет местами </a:t>
+            </a:r>
+            <a:r>
+              <a:rPr lang="ru-RU" dirty="0" err="1"/>
+              <a:t>Tx</a:t>
+            </a:r>
+            <a:r>
+              <a:rPr lang="ru-RU" dirty="0"/>
+              <a:t> и </a:t>
+            </a:r>
+            <a:r>
+              <a:rPr lang="ru-RU" dirty="0" err="1"/>
+              <a:t>Rx</a:t>
+            </a:r>
+            <a:r>
+              <a:rPr lang="ru-RU" dirty="0"/>
+              <a:t> при неправильном типе кабеля, называется </a:t>
+            </a:r>
+            <a:r>
+              <a:rPr lang="ru-RU" b="1" dirty="0"/>
+              <a:t>[ ? ]</a:t>
+            </a:r>
+            <a:r>
+              <a:rPr lang="ru-RU" dirty="0"/>
+              <a:t>.</a:t>
+            </a:r>
+          </a:p>
+          <a:p>
+            <a:pPr marL="0" indent="0">
+              <a:buNone/>
+            </a:pPr>
+            <a:endParaRPr lang="ru-RU" dirty="0"/>
+          </a:p>
+        </p:txBody>
+      </p:sp>
+    </p:spTree>
+    <p:extLst>
+      <p:ext uri="{BB962C8B-B14F-4D97-AF65-F5344CB8AC3E}">
+        <p14:creationId xmlns:p14="http://schemas.microsoft.com/office/powerpoint/2010/main" val="2166604983"/>
+      </p:ext>
+    </p:extLst>
+  </p:cSld>
+  <p:clrMapOvr>
+    <a:masterClrMapping/>
+  </p:clrMapOvr>
+</p:sld>
+</file>
+
+<file path=ppt/slides/slide16.xml><?xml version="1.0" encoding="utf-8"?>
+<p:sld xmlns:a="http://schemas.openxmlformats.org/drawingml/2006/main" xmlns:r="http://schemas.openxmlformats.org/officeDocument/2006/relationships" xmlns:p="http://schemas.openxmlformats.org/presentationml/2006/main">
+  <p:cSld>
+    <p:spTree>
+      <p:nvGrpSpPr>
+        <p:cNvPr id="1" name=""/>
+        <p:cNvGrpSpPr/>
+        <p:nvPr/>
+      </p:nvGrpSpPr>
+      <p:grpSpPr>
+        <a:xfrm>
+          <a:off x="0" y="0"/>
+          <a:ext cx="0" cy="0"/>
+          <a:chOff x="0" y="0"/>
+          <a:chExt cx="0" cy="0"/>
+        </a:xfrm>
+      </p:grpSpPr>
+      <p:pic>
+        <p:nvPicPr>
+          <p:cNvPr id="4" name="Объект 3"/>
+          <p:cNvPicPr>
+            <a:picLocks noGrp="1" noChangeAspect="1"/>
+          </p:cNvPicPr>
+          <p:nvPr>
+            <p:ph sz="half" idx="1"/>
+          </p:nvPr>
+        </p:nvPicPr>
+        <p:blipFill>
+          <a:blip r:embed="rId2"/>
+          <a:stretch>
+            <a:fillRect/>
+          </a:stretch>
+        </p:blipFill>
+        <p:spPr>
+          <a:xfrm>
+            <a:off x="1963535" y="2249488"/>
+            <a:ext cx="3234142" cy="3541712"/>
+          </a:xfrm>
+          <a:prstGeom prst="rect">
+            <a:avLst/>
+          </a:prstGeom>
+        </p:spPr>
+      </p:pic>
+      <p:sp>
+        <p:nvSpPr>
+          <p:cNvPr id="11" name="Объект 10"/>
+          <p:cNvSpPr>
+            <a:spLocks noGrp="1"/>
+          </p:cNvSpPr>
+          <p:nvPr>
+            <p:ph sz="half" idx="2"/>
+          </p:nvPr>
+        </p:nvSpPr>
+        <p:spPr>
+          <a:xfrm>
+            <a:off x="6172200" y="2249486"/>
+            <a:ext cx="4875211" cy="2129083"/>
+          </a:xfrm>
+        </p:spPr>
+        <p:txBody>
+          <a:bodyPr/>
+          <a:lstStyle/>
+          <a:p>
+            <a:r>
+              <a:rPr lang="ru-RU" dirty="0"/>
+              <a:t>Сколько </a:t>
+            </a:r>
+            <a:r>
+              <a:rPr lang="ru-RU" b="1" dirty="0"/>
+              <a:t>доменов коллизий</a:t>
+            </a:r>
+            <a:r>
+              <a:rPr lang="ru-RU" dirty="0"/>
+              <a:t> в этой сети?</a:t>
+            </a:r>
+          </a:p>
+          <a:p>
+            <a:r>
+              <a:rPr lang="ru-RU" dirty="0"/>
+              <a:t>Сколько </a:t>
+            </a:r>
+            <a:r>
+              <a:rPr lang="ru-RU" b="1" dirty="0"/>
+              <a:t>широковещательных доменов</a:t>
+            </a:r>
+            <a:r>
+              <a:rPr lang="ru-RU" dirty="0"/>
+              <a:t> в этой сети?</a:t>
+            </a:r>
+          </a:p>
+          <a:p>
+            <a:pPr marL="0" indent="0">
+              <a:buNone/>
+            </a:pPr>
+            <a:endParaRPr lang="ru-RU" dirty="0"/>
+          </a:p>
+        </p:txBody>
+      </p:sp>
+    </p:spTree>
+    <p:extLst>
+      <p:ext uri="{BB962C8B-B14F-4D97-AF65-F5344CB8AC3E}">
+        <p14:creationId xmlns:p14="http://schemas.microsoft.com/office/powerpoint/2010/main" val="2381247208"/>
+      </p:ext>
+    </p:extLst>
+  </p:cSld>
+  <p:clrMapOvr>
+    <a:masterClrMapping/>
+  </p:clrMapOvr>
+</p:sld>
+</file>
+
+<file path=ppt/slides/slide17.xml><?xml version="1.0" encoding="utf-8"?>
+<p:sld xmlns:a="http://schemas.openxmlformats.org/drawingml/2006/main" xmlns:r="http://schemas.openxmlformats.org/officeDocument/2006/relationships" xmlns:p="http://schemas.openxmlformats.org/presentationml/2006/main">
+  <p:cSld>
+    <p:spTree>
+      <p:nvGrpSpPr>
+        <p:cNvPr id="1" name=""/>
+        <p:cNvGrpSpPr/>
+        <p:nvPr/>
+      </p:nvGrpSpPr>
+      <p:grpSpPr>
+        <a:xfrm>
+          <a:off x="0" y="0"/>
+          <a:ext cx="0" cy="0"/>
+          <a:chOff x="0" y="0"/>
+          <a:chExt cx="0" cy="0"/>
+        </a:xfrm>
+      </p:grpSpPr>
+      <p:sp>
+        <p:nvSpPr>
+          <p:cNvPr id="2" name="Заголовок 1"/>
+          <p:cNvSpPr>
+            <a:spLocks noGrp="1"/>
+          </p:cNvSpPr>
+          <p:nvPr>
+            <p:ph type="title"/>
+          </p:nvPr>
+        </p:nvSpPr>
+        <p:spPr/>
+        <p:txBody>
+          <a:bodyPr/>
+          <a:lstStyle/>
+          <a:p>
+            <a:r>
+              <a:rPr lang="ru-RU" dirty="0"/>
+              <a:t>Изучите утверждения об импульсах </a:t>
+            </a:r>
+            <a:r>
+              <a:rPr lang="ru-RU" dirty="0" err="1"/>
+              <a:t>автосогласования</a:t>
+            </a:r>
+            <a:r>
+              <a:rPr lang="ru-RU" dirty="0"/>
+              <a:t> и отметьте </a:t>
+            </a:r>
+            <a:r>
+              <a:rPr lang="ru-RU" b="1" dirty="0"/>
+              <a:t>верные</a:t>
+            </a:r>
+            <a:r>
+              <a:rPr lang="ru-RU" dirty="0"/>
+              <a:t>:</a:t>
+            </a:r>
+            <a:endParaRPr lang="ru-RU" dirty="0"/>
+          </a:p>
+        </p:txBody>
+      </p:sp>
+      <p:sp>
+        <p:nvSpPr>
+          <p:cNvPr id="5" name="Объект 4"/>
+          <p:cNvSpPr>
+            <a:spLocks noGrp="1"/>
+          </p:cNvSpPr>
+          <p:nvPr>
+            <p:ph idx="1"/>
+          </p:nvPr>
+        </p:nvSpPr>
+        <p:spPr/>
+        <p:txBody>
+          <a:bodyPr/>
+          <a:lstStyle/>
+          <a:p>
+            <a:r>
+              <a:rPr lang="ru-RU" dirty="0"/>
+              <a:t>Серия FLP длится 2 </a:t>
+            </a:r>
+            <a:r>
+              <a:rPr lang="ru-RU" dirty="0" err="1"/>
+              <a:t>мс</a:t>
+            </a:r>
+            <a:r>
+              <a:rPr lang="ru-RU" dirty="0"/>
+              <a:t> и повторяется каждые 16 </a:t>
+            </a:r>
+            <a:r>
+              <a:rPr lang="ru-RU" dirty="0" err="1"/>
+              <a:t>мс</a:t>
+            </a:r>
+            <a:r>
+              <a:rPr lang="ru-RU" dirty="0"/>
+              <a:t>.</a:t>
+            </a:r>
+          </a:p>
+          <a:p>
+            <a:r>
+              <a:rPr lang="ru-RU" dirty="0"/>
+              <a:t>В серии FLP передается ровно 33 импульса.</a:t>
+            </a:r>
+          </a:p>
+          <a:p>
+            <a:r>
+              <a:rPr lang="ru-RU" dirty="0"/>
+              <a:t>Нечётные импульсы несут информационные биты (0 или 1), а чётные задают тактовую частоту.</a:t>
+            </a:r>
+          </a:p>
+          <a:p>
+            <a:r>
+              <a:rPr lang="ru-RU" dirty="0"/>
+              <a:t>Полезная нагрузка пакета FLP называется LCW (</a:t>
+            </a:r>
+            <a:r>
+              <a:rPr lang="ru-RU" dirty="0" err="1"/>
+              <a:t>Link</a:t>
+            </a:r>
+            <a:r>
+              <a:rPr lang="ru-RU" dirty="0"/>
+              <a:t> </a:t>
+            </a:r>
+            <a:r>
+              <a:rPr lang="ru-RU" dirty="0" err="1"/>
+              <a:t>Code</a:t>
+            </a:r>
+            <a:r>
+              <a:rPr lang="ru-RU" dirty="0"/>
+              <a:t> </a:t>
+            </a:r>
+            <a:r>
+              <a:rPr lang="ru-RU" dirty="0" err="1"/>
+              <a:t>Word</a:t>
+            </a:r>
+            <a:r>
+              <a:rPr lang="ru-RU" dirty="0"/>
+              <a:t>) и имеет размер 16 бит (2 байта).</a:t>
+            </a:r>
+          </a:p>
+          <a:p>
+            <a:endParaRPr lang="ru-RU" dirty="0"/>
+          </a:p>
+        </p:txBody>
+      </p:sp>
+    </p:spTree>
+    <p:extLst>
+      <p:ext uri="{BB962C8B-B14F-4D97-AF65-F5344CB8AC3E}">
+        <p14:creationId xmlns:p14="http://schemas.microsoft.com/office/powerpoint/2010/main" val="23082924"/>
+      </p:ext>
+    </p:extLst>
+  </p:cSld>
+  <p:clrMapOvr>
+    <a:masterClrMapping/>
+  </p:clrMapOvr>
+</p:sld>
+</file>
+
 <file path=ppt/slides/slide2.xml><?xml version="1.0" encoding="utf-8"?>
 <p:sld xmlns:a="http://schemas.openxmlformats.org/drawingml/2006/main" xmlns:r="http://schemas.openxmlformats.org/officeDocument/2006/relationships" xmlns:p="http://schemas.openxmlformats.org/presentationml/2006/main">
   <p:cSld>
@@ -12964,7 +14559,6 @@
               <a:rPr lang="ru-RU" dirty="0"/>
               <a:t> во все порты, кроме порта-источника).</a:t>
             </a:r>
-            <a:endParaRPr lang="ru-RU" dirty="0"/>
           </a:p>
           <a:p>
             <a:endParaRPr lang="ru-RU" dirty="0"/>

--- a/1.6 Ethernet Basic/1.6 Ethernet Basic.pptx
+++ b/1.6 Ethernet Basic/1.6 Ethernet Basic.pptx
@@ -185,7 +185,7 @@
           <a:noFill/>
           <a:extLst>
             <a:ext uri="{909E8E84-426E-40dd-AFC4-6F175D3DCCD1}">
-              <a14:hiddenFill xmlns="" xmlns:a14="http://schemas.microsoft.com/office/drawing/2010/main">
+              <a14:hiddenFill xmlns:a14="http://schemas.microsoft.com/office/drawing/2010/main" xmlns="">
                 <a:solidFill>
                   <a:srgbClr val="FFFFFF"/>
                 </a:solidFill>
@@ -244,7 +244,7 @@
             </a:ln>
             <a:extLst>
               <a:ext uri="{91240B29-F687-4f45-9708-019B960494DF}">
-                <a14:hiddenLine xmlns="" xmlns:a14="http://schemas.microsoft.com/office/drawing/2010/main" w="9525">
+                <a14:hiddenLine xmlns:a14="http://schemas.microsoft.com/office/drawing/2010/main" xmlns="" w="9525">
                   <a:solidFill>
                     <a:srgbClr val="000000"/>
                   </a:solidFill>
@@ -334,7 +334,7 @@
             </a:ln>
             <a:extLst>
               <a:ext uri="{91240B29-F687-4f45-9708-019B960494DF}">
-                <a14:hiddenLine xmlns="" xmlns:a14="http://schemas.microsoft.com/office/drawing/2010/main" w="9525">
+                <a14:hiddenLine xmlns:a14="http://schemas.microsoft.com/office/drawing/2010/main" xmlns="" w="9525">
                   <a:solidFill>
                     <a:srgbClr val="000000"/>
                   </a:solidFill>
@@ -424,7 +424,7 @@
             </a:ln>
             <a:extLst>
               <a:ext uri="{91240B29-F687-4f45-9708-019B960494DF}">
-                <a14:hiddenLine xmlns="" xmlns:a14="http://schemas.microsoft.com/office/drawing/2010/main" w="9525">
+                <a14:hiddenLine xmlns:a14="http://schemas.microsoft.com/office/drawing/2010/main" xmlns="" w="9525">
                   <a:solidFill>
                     <a:srgbClr val="000000"/>
                   </a:solidFill>
@@ -458,7 +458,7 @@
             </a:ln>
             <a:extLst>
               <a:ext uri="{91240B29-F687-4f45-9708-019B960494DF}">
-                <a14:hiddenLine xmlns="" xmlns:a14="http://schemas.microsoft.com/office/drawing/2010/main" w="9525">
+                <a14:hiddenLine xmlns:a14="http://schemas.microsoft.com/office/drawing/2010/main" xmlns="" w="9525">
                   <a:solidFill>
                     <a:srgbClr val="000000"/>
                   </a:solidFill>
@@ -548,7 +548,7 @@
             </a:ln>
             <a:extLst>
               <a:ext uri="{91240B29-F687-4f45-9708-019B960494DF}">
-                <a14:hiddenLine xmlns="" xmlns:a14="http://schemas.microsoft.com/office/drawing/2010/main" w="9525">
+                <a14:hiddenLine xmlns:a14="http://schemas.microsoft.com/office/drawing/2010/main" xmlns="" w="9525">
                   <a:solidFill>
                     <a:srgbClr val="000000"/>
                   </a:solidFill>
@@ -610,7 +610,7 @@
             </a:ln>
             <a:extLst>
               <a:ext uri="{91240B29-F687-4f45-9708-019B960494DF}">
-                <a14:hiddenLine xmlns="" xmlns:a14="http://schemas.microsoft.com/office/drawing/2010/main" w="9525">
+                <a14:hiddenLine xmlns:a14="http://schemas.microsoft.com/office/drawing/2010/main" xmlns="" w="9525">
                   <a:solidFill>
                     <a:srgbClr val="000000"/>
                   </a:solidFill>
@@ -672,7 +672,7 @@
             </a:ln>
             <a:extLst>
               <a:ext uri="{91240B29-F687-4f45-9708-019B960494DF}">
-                <a14:hiddenLine xmlns="" xmlns:a14="http://schemas.microsoft.com/office/drawing/2010/main" w="9525">
+                <a14:hiddenLine xmlns:a14="http://schemas.microsoft.com/office/drawing/2010/main" xmlns="" w="9525">
                   <a:solidFill>
                     <a:srgbClr val="000000"/>
                   </a:solidFill>
@@ -762,7 +762,7 @@
             </a:ln>
             <a:extLst>
               <a:ext uri="{91240B29-F687-4f45-9708-019B960494DF}">
-                <a14:hiddenLine xmlns="" xmlns:a14="http://schemas.microsoft.com/office/drawing/2010/main" w="9525">
+                <a14:hiddenLine xmlns:a14="http://schemas.microsoft.com/office/drawing/2010/main" xmlns="" w="9525">
                   <a:solidFill>
                     <a:srgbClr val="000000"/>
                   </a:solidFill>
@@ -824,7 +824,7 @@
             </a:ln>
             <a:extLst>
               <a:ext uri="{91240B29-F687-4f45-9708-019B960494DF}">
-                <a14:hiddenLine xmlns="" xmlns:a14="http://schemas.microsoft.com/office/drawing/2010/main" w="9525">
+                <a14:hiddenLine xmlns:a14="http://schemas.microsoft.com/office/drawing/2010/main" xmlns="" w="9525">
                   <a:solidFill>
                     <a:srgbClr val="000000"/>
                   </a:solidFill>
@@ -886,7 +886,7 @@
             </a:ln>
             <a:extLst>
               <a:ext uri="{91240B29-F687-4f45-9708-019B960494DF}">
-                <a14:hiddenLine xmlns="" xmlns:a14="http://schemas.microsoft.com/office/drawing/2010/main" w="9525">
+                <a14:hiddenLine xmlns:a14="http://schemas.microsoft.com/office/drawing/2010/main" xmlns="" w="9525">
                   <a:solidFill>
                     <a:srgbClr val="000000"/>
                   </a:solidFill>
@@ -976,7 +976,7 @@
             </a:ln>
             <a:extLst>
               <a:ext uri="{91240B29-F687-4f45-9708-019B960494DF}">
-                <a14:hiddenLine xmlns="" xmlns:a14="http://schemas.microsoft.com/office/drawing/2010/main" w="9525">
+                <a14:hiddenLine xmlns:a14="http://schemas.microsoft.com/office/drawing/2010/main" xmlns="" w="9525">
                   <a:solidFill>
                     <a:srgbClr val="000000"/>
                   </a:solidFill>
@@ -1066,7 +1066,7 @@
             </a:ln>
             <a:extLst>
               <a:ext uri="{91240B29-F687-4f45-9708-019B960494DF}">
-                <a14:hiddenLine xmlns="" xmlns:a14="http://schemas.microsoft.com/office/drawing/2010/main" w="9525">
+                <a14:hiddenLine xmlns:a14="http://schemas.microsoft.com/office/drawing/2010/main" xmlns="" w="9525">
                   <a:solidFill>
                     <a:srgbClr val="000000"/>
                   </a:solidFill>
@@ -1128,7 +1128,7 @@
             </a:ln>
             <a:extLst>
               <a:ext uri="{91240B29-F687-4f45-9708-019B960494DF}">
-                <a14:hiddenLine xmlns="" xmlns:a14="http://schemas.microsoft.com/office/drawing/2010/main" w="9525">
+                <a14:hiddenLine xmlns:a14="http://schemas.microsoft.com/office/drawing/2010/main" xmlns="" w="9525">
                   <a:solidFill>
                     <a:srgbClr val="000000"/>
                   </a:solidFill>
@@ -1238,7 +1238,7 @@
             </a:ln>
             <a:extLst>
               <a:ext uri="{91240B29-F687-4f45-9708-019B960494DF}">
-                <a14:hiddenLine xmlns="" xmlns:a14="http://schemas.microsoft.com/office/drawing/2010/main" w="9525">
+                <a14:hiddenLine xmlns:a14="http://schemas.microsoft.com/office/drawing/2010/main" xmlns="" w="9525">
                   <a:solidFill>
                     <a:srgbClr val="000000"/>
                   </a:solidFill>
@@ -1300,7 +1300,7 @@
             </a:ln>
             <a:extLst>
               <a:ext uri="{91240B29-F687-4f45-9708-019B960494DF}">
-                <a14:hiddenLine xmlns="" xmlns:a14="http://schemas.microsoft.com/office/drawing/2010/main" w="9525">
+                <a14:hiddenLine xmlns:a14="http://schemas.microsoft.com/office/drawing/2010/main" xmlns="" w="9525">
                   <a:solidFill>
                     <a:srgbClr val="000000"/>
                   </a:solidFill>
@@ -1390,7 +1390,7 @@
             </a:ln>
             <a:extLst>
               <a:ext uri="{91240B29-F687-4f45-9708-019B960494DF}">
-                <a14:hiddenLine xmlns="" xmlns:a14="http://schemas.microsoft.com/office/drawing/2010/main" w="9525">
+                <a14:hiddenLine xmlns:a14="http://schemas.microsoft.com/office/drawing/2010/main" xmlns="" w="9525">
                   <a:solidFill>
                     <a:srgbClr val="000000"/>
                   </a:solidFill>
@@ -1480,7 +1480,7 @@
             </a:ln>
             <a:extLst>
               <a:ext uri="{91240B29-F687-4f45-9708-019B960494DF}">
-                <a14:hiddenLine xmlns="" xmlns:a14="http://schemas.microsoft.com/office/drawing/2010/main" w="9525">
+                <a14:hiddenLine xmlns:a14="http://schemas.microsoft.com/office/drawing/2010/main" xmlns="" w="9525">
                   <a:solidFill>
                     <a:srgbClr val="000000"/>
                   </a:solidFill>
@@ -1542,7 +1542,7 @@
             </a:ln>
             <a:extLst>
               <a:ext uri="{91240B29-F687-4f45-9708-019B960494DF}">
-                <a14:hiddenLine xmlns="" xmlns:a14="http://schemas.microsoft.com/office/drawing/2010/main" w="9525">
+                <a14:hiddenLine xmlns:a14="http://schemas.microsoft.com/office/drawing/2010/main" xmlns="" w="9525">
                   <a:solidFill>
                     <a:srgbClr val="000000"/>
                   </a:solidFill>
@@ -1632,7 +1632,7 @@
             </a:ln>
             <a:extLst>
               <a:ext uri="{91240B29-F687-4f45-9708-019B960494DF}">
-                <a14:hiddenLine xmlns="" xmlns:a14="http://schemas.microsoft.com/office/drawing/2010/main" w="9525">
+                <a14:hiddenLine xmlns:a14="http://schemas.microsoft.com/office/drawing/2010/main" xmlns="" w="9525">
                   <a:solidFill>
                     <a:srgbClr val="000000"/>
                   </a:solidFill>
@@ -1722,7 +1722,7 @@
             </a:ln>
             <a:extLst>
               <a:ext uri="{91240B29-F687-4f45-9708-019B960494DF}">
-                <a14:hiddenLine xmlns="" xmlns:a14="http://schemas.microsoft.com/office/drawing/2010/main" w="9525">
+                <a14:hiddenLine xmlns:a14="http://schemas.microsoft.com/office/drawing/2010/main" xmlns="" w="9525">
                   <a:solidFill>
                     <a:srgbClr val="000000"/>
                   </a:solidFill>
@@ -1778,7 +1778,7 @@
             </a:ln>
             <a:extLst>
               <a:ext uri="{91240B29-F687-4f45-9708-019B960494DF}">
-                <a14:hiddenLine xmlns="" xmlns:a14="http://schemas.microsoft.com/office/drawing/2010/main" w="9525">
+                <a14:hiddenLine xmlns:a14="http://schemas.microsoft.com/office/drawing/2010/main" xmlns="" w="9525">
                   <a:solidFill>
                     <a:srgbClr val="000000"/>
                   </a:solidFill>
@@ -1868,7 +1868,7 @@
             </a:ln>
             <a:extLst>
               <a:ext uri="{91240B29-F687-4f45-9708-019B960494DF}">
-                <a14:hiddenLine xmlns="" xmlns:a14="http://schemas.microsoft.com/office/drawing/2010/main" w="9525">
+                <a14:hiddenLine xmlns:a14="http://schemas.microsoft.com/office/drawing/2010/main" xmlns="" w="9525">
                   <a:solidFill>
                     <a:srgbClr val="000000"/>
                   </a:solidFill>
@@ -1924,7 +1924,7 @@
             </a:ln>
             <a:extLst>
               <a:ext uri="{91240B29-F687-4f45-9708-019B960494DF}">
-                <a14:hiddenLine xmlns="" xmlns:a14="http://schemas.microsoft.com/office/drawing/2010/main" w="9525">
+                <a14:hiddenLine xmlns:a14="http://schemas.microsoft.com/office/drawing/2010/main" xmlns="" w="9525">
                   <a:solidFill>
                     <a:srgbClr val="000000"/>
                   </a:solidFill>
@@ -2014,7 +2014,7 @@
             </a:ln>
             <a:extLst>
               <a:ext uri="{91240B29-F687-4f45-9708-019B960494DF}">
-                <a14:hiddenLine xmlns="" xmlns:a14="http://schemas.microsoft.com/office/drawing/2010/main" w="9525">
+                <a14:hiddenLine xmlns:a14="http://schemas.microsoft.com/office/drawing/2010/main" xmlns="" w="9525">
                   <a:solidFill>
                     <a:srgbClr val="000000"/>
                   </a:solidFill>
@@ -2082,7 +2082,7 @@
             </a:ln>
             <a:extLst>
               <a:ext uri="{91240B29-F687-4f45-9708-019B960494DF}">
-                <a14:hiddenLine xmlns="" xmlns:a14="http://schemas.microsoft.com/office/drawing/2010/main" w="9525">
+                <a14:hiddenLine xmlns:a14="http://schemas.microsoft.com/office/drawing/2010/main" xmlns="" w="9525">
                   <a:solidFill>
                     <a:srgbClr val="000000"/>
                   </a:solidFill>
@@ -2172,7 +2172,7 @@
             </a:ln>
             <a:extLst>
               <a:ext uri="{91240B29-F687-4f45-9708-019B960494DF}">
-                <a14:hiddenLine xmlns="" xmlns:a14="http://schemas.microsoft.com/office/drawing/2010/main" w="9525">
+                <a14:hiddenLine xmlns:a14="http://schemas.microsoft.com/office/drawing/2010/main" xmlns="" w="9525">
                   <a:solidFill>
                     <a:srgbClr val="000000"/>
                   </a:solidFill>
@@ -2240,7 +2240,7 @@
             </a:ln>
             <a:extLst>
               <a:ext uri="{91240B29-F687-4f45-9708-019B960494DF}">
-                <a14:hiddenLine xmlns="" xmlns:a14="http://schemas.microsoft.com/office/drawing/2010/main" w="9525">
+                <a14:hiddenLine xmlns:a14="http://schemas.microsoft.com/office/drawing/2010/main" xmlns="" w="9525">
                   <a:solidFill>
                     <a:srgbClr val="000000"/>
                   </a:solidFill>
@@ -2330,7 +2330,7 @@
             </a:ln>
             <a:extLst>
               <a:ext uri="{91240B29-F687-4f45-9708-019B960494DF}">
-                <a14:hiddenLine xmlns="" xmlns:a14="http://schemas.microsoft.com/office/drawing/2010/main" w="9525">
+                <a14:hiddenLine xmlns:a14="http://schemas.microsoft.com/office/drawing/2010/main" xmlns="" w="9525">
                   <a:solidFill>
                     <a:srgbClr val="000000"/>
                   </a:solidFill>
@@ -2364,7 +2364,7 @@
             </a:ln>
             <a:extLst>
               <a:ext uri="{91240B29-F687-4f45-9708-019B960494DF}">
-                <a14:hiddenLine xmlns="" xmlns:a14="http://schemas.microsoft.com/office/drawing/2010/main" w="9525">
+                <a14:hiddenLine xmlns:a14="http://schemas.microsoft.com/office/drawing/2010/main" xmlns="" w="9525">
                   <a:solidFill>
                     <a:srgbClr val="000000"/>
                   </a:solidFill>
@@ -2454,7 +2454,7 @@
             </a:ln>
             <a:extLst>
               <a:ext uri="{91240B29-F687-4f45-9708-019B960494DF}">
-                <a14:hiddenLine xmlns="" xmlns:a14="http://schemas.microsoft.com/office/drawing/2010/main" w="9525">
+                <a14:hiddenLine xmlns:a14="http://schemas.microsoft.com/office/drawing/2010/main" xmlns="" w="9525">
                   <a:solidFill>
                     <a:srgbClr val="000000"/>
                   </a:solidFill>
@@ -2516,7 +2516,7 @@
             </a:ln>
             <a:extLst>
               <a:ext uri="{91240B29-F687-4f45-9708-019B960494DF}">
-                <a14:hiddenLine xmlns="" xmlns:a14="http://schemas.microsoft.com/office/drawing/2010/main" w="9525">
+                <a14:hiddenLine xmlns:a14="http://schemas.microsoft.com/office/drawing/2010/main" xmlns="" w="9525">
                   <a:solidFill>
                     <a:srgbClr val="000000"/>
                   </a:solidFill>
@@ -2578,7 +2578,7 @@
             </a:ln>
             <a:extLst>
               <a:ext uri="{91240B29-F687-4f45-9708-019B960494DF}">
-                <a14:hiddenLine xmlns="" xmlns:a14="http://schemas.microsoft.com/office/drawing/2010/main" w="9525">
+                <a14:hiddenLine xmlns:a14="http://schemas.microsoft.com/office/drawing/2010/main" xmlns="" w="9525">
                   <a:solidFill>
                     <a:srgbClr val="000000"/>
                   </a:solidFill>
@@ -2668,7 +2668,7 @@
             </a:ln>
             <a:extLst>
               <a:ext uri="{91240B29-F687-4f45-9708-019B960494DF}">
-                <a14:hiddenLine xmlns="" xmlns:a14="http://schemas.microsoft.com/office/drawing/2010/main" w="9525">
+                <a14:hiddenLine xmlns:a14="http://schemas.microsoft.com/office/drawing/2010/main" xmlns="" w="9525">
                   <a:solidFill>
                     <a:srgbClr val="000000"/>
                   </a:solidFill>
@@ -2736,7 +2736,7 @@
             </a:ln>
             <a:extLst>
               <a:ext uri="{91240B29-F687-4f45-9708-019B960494DF}">
-                <a14:hiddenLine xmlns="" xmlns:a14="http://schemas.microsoft.com/office/drawing/2010/main" w="9525">
+                <a14:hiddenLine xmlns:a14="http://schemas.microsoft.com/office/drawing/2010/main" xmlns="" w="9525">
                   <a:solidFill>
                     <a:srgbClr val="000000"/>
                   </a:solidFill>
@@ -2798,7 +2798,7 @@
             </a:ln>
             <a:extLst>
               <a:ext uri="{91240B29-F687-4f45-9708-019B960494DF}">
-                <a14:hiddenLine xmlns="" xmlns:a14="http://schemas.microsoft.com/office/drawing/2010/main" w="9525">
+                <a14:hiddenLine xmlns:a14="http://schemas.microsoft.com/office/drawing/2010/main" xmlns="" w="9525">
                   <a:solidFill>
                     <a:srgbClr val="000000"/>
                   </a:solidFill>
@@ -2888,7 +2888,7 @@
             </a:ln>
             <a:extLst>
               <a:ext uri="{91240B29-F687-4f45-9708-019B960494DF}">
-                <a14:hiddenLine xmlns="" xmlns:a14="http://schemas.microsoft.com/office/drawing/2010/main" w="9525">
+                <a14:hiddenLine xmlns:a14="http://schemas.microsoft.com/office/drawing/2010/main" xmlns="" w="9525">
                   <a:solidFill>
                     <a:srgbClr val="000000"/>
                   </a:solidFill>
@@ -2950,7 +2950,7 @@
             </a:ln>
             <a:extLst>
               <a:ext uri="{91240B29-F687-4f45-9708-019B960494DF}">
-                <a14:hiddenLine xmlns="" xmlns:a14="http://schemas.microsoft.com/office/drawing/2010/main" w="9525">
+                <a14:hiddenLine xmlns:a14="http://schemas.microsoft.com/office/drawing/2010/main" xmlns="" w="9525">
                   <a:solidFill>
                     <a:srgbClr val="000000"/>
                   </a:solidFill>
@@ -3040,7 +3040,7 @@
             </a:ln>
             <a:extLst>
               <a:ext uri="{91240B29-F687-4f45-9708-019B960494DF}">
-                <a14:hiddenLine xmlns="" xmlns:a14="http://schemas.microsoft.com/office/drawing/2010/main" w="9525">
+                <a14:hiddenLine xmlns:a14="http://schemas.microsoft.com/office/drawing/2010/main" xmlns="" w="9525">
                   <a:solidFill>
                     <a:srgbClr val="000000"/>
                   </a:solidFill>
@@ -3102,7 +3102,7 @@
             </a:ln>
             <a:extLst>
               <a:ext uri="{91240B29-F687-4f45-9708-019B960494DF}">
-                <a14:hiddenLine xmlns="" xmlns:a14="http://schemas.microsoft.com/office/drawing/2010/main" w="9525">
+                <a14:hiddenLine xmlns:a14="http://schemas.microsoft.com/office/drawing/2010/main" xmlns="" w="9525">
                   <a:solidFill>
                     <a:srgbClr val="000000"/>
                   </a:solidFill>
@@ -3192,7 +3192,7 @@
             </a:ln>
             <a:extLst>
               <a:ext uri="{91240B29-F687-4f45-9708-019B960494DF}">
-                <a14:hiddenLine xmlns="" xmlns:a14="http://schemas.microsoft.com/office/drawing/2010/main" w="9525">
+                <a14:hiddenLine xmlns:a14="http://schemas.microsoft.com/office/drawing/2010/main" xmlns="" w="9525">
                   <a:solidFill>
                     <a:srgbClr val="000000"/>
                   </a:solidFill>
@@ -3226,7 +3226,7 @@
             </a:ln>
             <a:extLst>
               <a:ext uri="{91240B29-F687-4f45-9708-019B960494DF}">
-                <a14:hiddenLine xmlns="" xmlns:a14="http://schemas.microsoft.com/office/drawing/2010/main" w="9525">
+                <a14:hiddenLine xmlns:a14="http://schemas.microsoft.com/office/drawing/2010/main" xmlns="" w="9525">
                   <a:solidFill>
                     <a:srgbClr val="000000"/>
                   </a:solidFill>
@@ -3291,7 +3291,7 @@
             </a:ln>
             <a:extLst>
               <a:ext uri="{91240B29-F687-4f45-9708-019B960494DF}">
-                <a14:hiddenLine xmlns="" xmlns:a14="http://schemas.microsoft.com/office/drawing/2010/main" w="9525">
+                <a14:hiddenLine xmlns:a14="http://schemas.microsoft.com/office/drawing/2010/main" xmlns="" w="9525">
                   <a:solidFill>
                     <a:srgbClr val="000000"/>
                   </a:solidFill>
@@ -3381,7 +3381,7 @@
             </a:ln>
             <a:extLst>
               <a:ext uri="{91240B29-F687-4f45-9708-019B960494DF}">
-                <a14:hiddenLine xmlns="" xmlns:a14="http://schemas.microsoft.com/office/drawing/2010/main" w="9525">
+                <a14:hiddenLine xmlns:a14="http://schemas.microsoft.com/office/drawing/2010/main" xmlns="" w="9525">
                   <a:solidFill>
                     <a:srgbClr val="000000"/>
                   </a:solidFill>
@@ -3443,7 +3443,7 @@
             </a:ln>
             <a:extLst>
               <a:ext uri="{91240B29-F687-4f45-9708-019B960494DF}">
-                <a14:hiddenLine xmlns="" xmlns:a14="http://schemas.microsoft.com/office/drawing/2010/main" w="9525">
+                <a14:hiddenLine xmlns:a14="http://schemas.microsoft.com/office/drawing/2010/main" xmlns="" w="9525">
                   <a:solidFill>
                     <a:srgbClr val="000000"/>
                   </a:solidFill>
@@ -3533,7 +3533,7 @@
             </a:ln>
             <a:extLst>
               <a:ext uri="{91240B29-F687-4f45-9708-019B960494DF}">
-                <a14:hiddenLine xmlns="" xmlns:a14="http://schemas.microsoft.com/office/drawing/2010/main" w="9525">
+                <a14:hiddenLine xmlns:a14="http://schemas.microsoft.com/office/drawing/2010/main" xmlns="" w="9525">
                   <a:solidFill>
                     <a:srgbClr val="000000"/>
                   </a:solidFill>
@@ -3623,7 +3623,7 @@
             </a:ln>
             <a:extLst>
               <a:ext uri="{91240B29-F687-4f45-9708-019B960494DF}">
-                <a14:hiddenLine xmlns="" xmlns:a14="http://schemas.microsoft.com/office/drawing/2010/main" w="9525">
+                <a14:hiddenLine xmlns:a14="http://schemas.microsoft.com/office/drawing/2010/main" xmlns="" w="9525">
                   <a:solidFill>
                     <a:srgbClr val="000000"/>
                   </a:solidFill>
@@ -3688,7 +3688,7 @@
             </a:ln>
             <a:extLst>
               <a:ext uri="{91240B29-F687-4f45-9708-019B960494DF}">
-                <a14:hiddenLine xmlns="" xmlns:a14="http://schemas.microsoft.com/office/drawing/2010/main" w="9525">
+                <a14:hiddenLine xmlns:a14="http://schemas.microsoft.com/office/drawing/2010/main" xmlns="" w="9525">
                   <a:solidFill>
                     <a:srgbClr val="000000"/>
                   </a:solidFill>
@@ -3750,7 +3750,7 @@
             </a:ln>
             <a:extLst>
               <a:ext uri="{91240B29-F687-4f45-9708-019B960494DF}">
-                <a14:hiddenLine xmlns="" xmlns:a14="http://schemas.microsoft.com/office/drawing/2010/main" w="9525">
+                <a14:hiddenLine xmlns:a14="http://schemas.microsoft.com/office/drawing/2010/main" xmlns="" w="9525">
                   <a:solidFill>
                     <a:srgbClr val="000000"/>
                   </a:solidFill>
@@ -3840,7 +3840,7 @@
             </a:ln>
             <a:extLst>
               <a:ext uri="{91240B29-F687-4f45-9708-019B960494DF}">
-                <a14:hiddenLine xmlns="" xmlns:a14="http://schemas.microsoft.com/office/drawing/2010/main" w="9525">
+                <a14:hiddenLine xmlns:a14="http://schemas.microsoft.com/office/drawing/2010/main" xmlns="" w="9525">
                   <a:solidFill>
                     <a:srgbClr val="000000"/>
                   </a:solidFill>
@@ -3930,7 +3930,7 @@
             </a:ln>
             <a:extLst>
               <a:ext uri="{91240B29-F687-4f45-9708-019B960494DF}">
-                <a14:hiddenLine xmlns="" xmlns:a14="http://schemas.microsoft.com/office/drawing/2010/main" w="9525">
+                <a14:hiddenLine xmlns:a14="http://schemas.microsoft.com/office/drawing/2010/main" xmlns="" w="9525">
                   <a:solidFill>
                     <a:srgbClr val="000000"/>
                   </a:solidFill>
@@ -3992,7 +3992,7 @@
             </a:ln>
             <a:extLst>
               <a:ext uri="{91240B29-F687-4f45-9708-019B960494DF}">
-                <a14:hiddenLine xmlns="" xmlns:a14="http://schemas.microsoft.com/office/drawing/2010/main" w="9525">
+                <a14:hiddenLine xmlns:a14="http://schemas.microsoft.com/office/drawing/2010/main" xmlns="" w="9525">
                   <a:solidFill>
                     <a:srgbClr val="000000"/>
                   </a:solidFill>
@@ -4112,7 +4112,7 @@
             </a:ln>
             <a:extLst>
               <a:ext uri="{91240B29-F687-4f45-9708-019B960494DF}">
-                <a14:hiddenLine xmlns="" xmlns:a14="http://schemas.microsoft.com/office/drawing/2010/main" w="9525">
+                <a14:hiddenLine xmlns:a14="http://schemas.microsoft.com/office/drawing/2010/main" xmlns="" w="9525">
                   <a:solidFill>
                     <a:srgbClr val="000000"/>
                   </a:solidFill>
@@ -4180,7 +4180,7 @@
             </a:ln>
             <a:extLst>
               <a:ext uri="{91240B29-F687-4f45-9708-019B960494DF}">
-                <a14:hiddenLine xmlns="" xmlns:a14="http://schemas.microsoft.com/office/drawing/2010/main" w="9525">
+                <a14:hiddenLine xmlns:a14="http://schemas.microsoft.com/office/drawing/2010/main" xmlns="" w="9525">
                   <a:solidFill>
                     <a:srgbClr val="000000"/>
                   </a:solidFill>
@@ -4270,7 +4270,7 @@
             </a:ln>
             <a:extLst>
               <a:ext uri="{91240B29-F687-4f45-9708-019B960494DF}">
-                <a14:hiddenLine xmlns="" xmlns:a14="http://schemas.microsoft.com/office/drawing/2010/main" w="9525">
+                <a14:hiddenLine xmlns:a14="http://schemas.microsoft.com/office/drawing/2010/main" xmlns="" w="9525">
                   <a:solidFill>
                     <a:srgbClr val="000000"/>
                   </a:solidFill>
@@ -4410,7 +4410,7 @@
           <a:p>
             <a:fld id="{42A3FA0C-5CD8-4683-A8F2-458893B3FD08}" type="datetimeFigureOut">
               <a:rPr lang="ru-RU" smtClean="0"/>
-              <a:t>30.08.2026</a:t>
+              <a:t>31.08.2026</a:t>
             </a:fld>
             <a:endParaRPr lang="ru-RU"/>
           </a:p>
@@ -4677,7 +4677,7 @@
           <a:p>
             <a:fld id="{42A3FA0C-5CD8-4683-A8F2-458893B3FD08}" type="datetimeFigureOut">
               <a:rPr lang="ru-RU" smtClean="0"/>
-              <a:t>30.08.2026</a:t>
+              <a:t>31.08.2026</a:t>
             </a:fld>
             <a:endParaRPr lang="ru-RU"/>
           </a:p>
@@ -4873,7 +4873,7 @@
           <a:p>
             <a:fld id="{42A3FA0C-5CD8-4683-A8F2-458893B3FD08}" type="datetimeFigureOut">
               <a:rPr lang="ru-RU" smtClean="0"/>
-              <a:t>30.08.2026</a:t>
+              <a:t>31.08.2026</a:t>
             </a:fld>
             <a:endParaRPr lang="ru-RU"/>
           </a:p>
@@ -5136,7 +5136,7 @@
           <a:p>
             <a:fld id="{42A3FA0C-5CD8-4683-A8F2-458893B3FD08}" type="datetimeFigureOut">
               <a:rPr lang="ru-RU" smtClean="0"/>
-              <a:t>30.08.2026</a:t>
+              <a:t>31.08.2026</a:t>
             </a:fld>
             <a:endParaRPr lang="ru-RU"/>
           </a:p>
@@ -5570,7 +5570,7 @@
           <a:p>
             <a:fld id="{42A3FA0C-5CD8-4683-A8F2-458893B3FD08}" type="datetimeFigureOut">
               <a:rPr lang="ru-RU" smtClean="0"/>
-              <a:t>30.08.2026</a:t>
+              <a:t>31.08.2026</a:t>
             </a:fld>
             <a:endParaRPr lang="ru-RU"/>
           </a:p>
@@ -6116,7 +6116,7 @@
           <a:p>
             <a:fld id="{42A3FA0C-5CD8-4683-A8F2-458893B3FD08}" type="datetimeFigureOut">
               <a:rPr lang="ru-RU" smtClean="0"/>
-              <a:t>30.08.2026</a:t>
+              <a:t>31.08.2026</a:t>
             </a:fld>
             <a:endParaRPr lang="ru-RU"/>
           </a:p>
@@ -6836,7 +6836,7 @@
           <a:p>
             <a:fld id="{42A3FA0C-5CD8-4683-A8F2-458893B3FD08}" type="datetimeFigureOut">
               <a:rPr lang="ru-RU" smtClean="0"/>
-              <a:t>30.08.2026</a:t>
+              <a:t>31.08.2026</a:t>
             </a:fld>
             <a:endParaRPr lang="ru-RU"/>
           </a:p>
@@ -7006,7 +7006,7 @@
           <a:p>
             <a:fld id="{42A3FA0C-5CD8-4683-A8F2-458893B3FD08}" type="datetimeFigureOut">
               <a:rPr lang="ru-RU" smtClean="0"/>
-              <a:t>30.08.2026</a:t>
+              <a:t>31.08.2026</a:t>
             </a:fld>
             <a:endParaRPr lang="ru-RU"/>
           </a:p>
@@ -7186,7 +7186,7 @@
           <a:p>
             <a:fld id="{42A3FA0C-5CD8-4683-A8F2-458893B3FD08}" type="datetimeFigureOut">
               <a:rPr lang="ru-RU" smtClean="0"/>
-              <a:t>30.08.2026</a:t>
+              <a:t>31.08.2026</a:t>
             </a:fld>
             <a:endParaRPr lang="ru-RU"/>
           </a:p>
@@ -7356,7 +7356,7 @@
           <a:p>
             <a:fld id="{42A3FA0C-5CD8-4683-A8F2-458893B3FD08}" type="datetimeFigureOut">
               <a:rPr lang="ru-RU" smtClean="0"/>
-              <a:t>30.08.2026</a:t>
+              <a:t>31.08.2026</a:t>
             </a:fld>
             <a:endParaRPr lang="ru-RU"/>
           </a:p>
@@ -7606,7 +7606,7 @@
           <a:p>
             <a:fld id="{42A3FA0C-5CD8-4683-A8F2-458893B3FD08}" type="datetimeFigureOut">
               <a:rPr lang="ru-RU" smtClean="0"/>
-              <a:t>30.08.2026</a:t>
+              <a:t>31.08.2026</a:t>
             </a:fld>
             <a:endParaRPr lang="ru-RU"/>
           </a:p>
@@ -7838,7 +7838,7 @@
           <a:p>
             <a:fld id="{42A3FA0C-5CD8-4683-A8F2-458893B3FD08}" type="datetimeFigureOut">
               <a:rPr lang="ru-RU" smtClean="0"/>
-              <a:t>30.08.2026</a:t>
+              <a:t>31.08.2026</a:t>
             </a:fld>
             <a:endParaRPr lang="ru-RU"/>
           </a:p>
@@ -8219,7 +8219,7 @@
           <a:p>
             <a:fld id="{42A3FA0C-5CD8-4683-A8F2-458893B3FD08}" type="datetimeFigureOut">
               <a:rPr lang="ru-RU" smtClean="0"/>
-              <a:t>30.08.2026</a:t>
+              <a:t>31.08.2026</a:t>
             </a:fld>
             <a:endParaRPr lang="ru-RU"/>
           </a:p>
@@ -8337,7 +8337,7 @@
           <a:p>
             <a:fld id="{42A3FA0C-5CD8-4683-A8F2-458893B3FD08}" type="datetimeFigureOut">
               <a:rPr lang="ru-RU" smtClean="0"/>
-              <a:t>30.08.2026</a:t>
+              <a:t>31.08.2026</a:t>
             </a:fld>
             <a:endParaRPr lang="ru-RU"/>
           </a:p>
@@ -8432,7 +8432,7 @@
           <a:p>
             <a:fld id="{42A3FA0C-5CD8-4683-A8F2-458893B3FD08}" type="datetimeFigureOut">
               <a:rPr lang="ru-RU" smtClean="0"/>
-              <a:t>30.08.2026</a:t>
+              <a:t>31.08.2026</a:t>
             </a:fld>
             <a:endParaRPr lang="ru-RU"/>
           </a:p>
@@ -8681,7 +8681,7 @@
           <a:p>
             <a:fld id="{42A3FA0C-5CD8-4683-A8F2-458893B3FD08}" type="datetimeFigureOut">
               <a:rPr lang="ru-RU" smtClean="0"/>
-              <a:t>30.08.2026</a:t>
+              <a:t>31.08.2026</a:t>
             </a:fld>
             <a:endParaRPr lang="ru-RU"/>
           </a:p>
@@ -8961,7 +8961,7 @@
           <a:p>
             <a:fld id="{42A3FA0C-5CD8-4683-A8F2-458893B3FD08}" type="datetimeFigureOut">
               <a:rPr lang="ru-RU" smtClean="0"/>
-              <a:t>30.08.2026</a:t>
+              <a:t>31.08.2026</a:t>
             </a:fld>
             <a:endParaRPr lang="ru-RU"/>
           </a:p>
@@ -9084,7 +9084,7 @@
           <a:noFill/>
           <a:extLst>
             <a:ext uri="{909E8E84-426E-40dd-AFC4-6F175D3DCCD1}">
-              <a14:hiddenFill xmlns="" xmlns:a14="http://schemas.microsoft.com/office/drawing/2010/main">
+              <a14:hiddenFill xmlns:a14="http://schemas.microsoft.com/office/drawing/2010/main" xmlns="">
                 <a:solidFill>
                   <a:srgbClr val="FFFFFF"/>
                 </a:solidFill>
@@ -9158,7 +9158,7 @@
               </a:ln>
               <a:extLst>
                 <a:ext uri="{91240B29-F687-4f45-9708-019B960494DF}">
-                  <a14:hiddenLine xmlns="" xmlns:a14="http://schemas.microsoft.com/office/drawing/2010/main" w="9525">
+                  <a14:hiddenLine xmlns:a14="http://schemas.microsoft.com/office/drawing/2010/main" xmlns="" w="9525">
                     <a:solidFill>
                       <a:srgbClr val="000000"/>
                     </a:solidFill>
@@ -9248,7 +9248,7 @@
               </a:ln>
               <a:extLst>
                 <a:ext uri="{91240B29-F687-4f45-9708-019B960494DF}">
-                  <a14:hiddenLine xmlns="" xmlns:a14="http://schemas.microsoft.com/office/drawing/2010/main" w="9525">
+                  <a14:hiddenLine xmlns:a14="http://schemas.microsoft.com/office/drawing/2010/main" xmlns="" w="9525">
                     <a:solidFill>
                       <a:srgbClr val="000000"/>
                     </a:solidFill>
@@ -9338,7 +9338,7 @@
               </a:ln>
               <a:extLst>
                 <a:ext uri="{91240B29-F687-4f45-9708-019B960494DF}">
-                  <a14:hiddenLine xmlns="" xmlns:a14="http://schemas.microsoft.com/office/drawing/2010/main" w="9525">
+                  <a14:hiddenLine xmlns:a14="http://schemas.microsoft.com/office/drawing/2010/main" xmlns="" w="9525">
                     <a:solidFill>
                       <a:srgbClr val="000000"/>
                     </a:solidFill>
@@ -9400,7 +9400,7 @@
               </a:ln>
               <a:extLst>
                 <a:ext uri="{91240B29-F687-4f45-9708-019B960494DF}">
-                  <a14:hiddenLine xmlns="" xmlns:a14="http://schemas.microsoft.com/office/drawing/2010/main" w="9525">
+                  <a14:hiddenLine xmlns:a14="http://schemas.microsoft.com/office/drawing/2010/main" xmlns="" w="9525">
                     <a:solidFill>
                       <a:srgbClr val="000000"/>
                     </a:solidFill>
@@ -9490,7 +9490,7 @@
               </a:ln>
               <a:extLst>
                 <a:ext uri="{91240B29-F687-4f45-9708-019B960494DF}">
-                  <a14:hiddenLine xmlns="" xmlns:a14="http://schemas.microsoft.com/office/drawing/2010/main" w="9525">
+                  <a14:hiddenLine xmlns:a14="http://schemas.microsoft.com/office/drawing/2010/main" xmlns="" w="9525">
                     <a:solidFill>
                       <a:srgbClr val="000000"/>
                     </a:solidFill>
@@ -9552,7 +9552,7 @@
               </a:ln>
               <a:extLst>
                 <a:ext uri="{91240B29-F687-4f45-9708-019B960494DF}">
-                  <a14:hiddenLine xmlns="" xmlns:a14="http://schemas.microsoft.com/office/drawing/2010/main" w="9525">
+                  <a14:hiddenLine xmlns:a14="http://schemas.microsoft.com/office/drawing/2010/main" xmlns="" w="9525">
                     <a:solidFill>
                       <a:srgbClr val="000000"/>
                     </a:solidFill>
@@ -9614,7 +9614,7 @@
               </a:ln>
               <a:extLst>
                 <a:ext uri="{91240B29-F687-4f45-9708-019B960494DF}">
-                  <a14:hiddenLine xmlns="" xmlns:a14="http://schemas.microsoft.com/office/drawing/2010/main" w="9525">
+                  <a14:hiddenLine xmlns:a14="http://schemas.microsoft.com/office/drawing/2010/main" xmlns="" w="9525">
                     <a:solidFill>
                       <a:srgbClr val="000000"/>
                     </a:solidFill>
@@ -9704,7 +9704,7 @@
               </a:ln>
               <a:extLst>
                 <a:ext uri="{91240B29-F687-4f45-9708-019B960494DF}">
-                  <a14:hiddenLine xmlns="" xmlns:a14="http://schemas.microsoft.com/office/drawing/2010/main" w="9525">
+                  <a14:hiddenLine xmlns:a14="http://schemas.microsoft.com/office/drawing/2010/main" xmlns="" w="9525">
                     <a:solidFill>
                       <a:srgbClr val="000000"/>
                     </a:solidFill>
@@ -9794,7 +9794,7 @@
               </a:ln>
               <a:extLst>
                 <a:ext uri="{91240B29-F687-4f45-9708-019B960494DF}">
-                  <a14:hiddenLine xmlns="" xmlns:a14="http://schemas.microsoft.com/office/drawing/2010/main" w="9525">
+                  <a14:hiddenLine xmlns:a14="http://schemas.microsoft.com/office/drawing/2010/main" xmlns="" w="9525">
                     <a:solidFill>
                       <a:srgbClr val="000000"/>
                     </a:solidFill>
@@ -9856,7 +9856,7 @@
               </a:ln>
               <a:extLst>
                 <a:ext uri="{91240B29-F687-4f45-9708-019B960494DF}">
-                  <a14:hiddenLine xmlns="" xmlns:a14="http://schemas.microsoft.com/office/drawing/2010/main" w="9525">
+                  <a14:hiddenLine xmlns:a14="http://schemas.microsoft.com/office/drawing/2010/main" xmlns="" w="9525">
                     <a:solidFill>
                       <a:srgbClr val="000000"/>
                     </a:solidFill>
@@ -9966,7 +9966,7 @@
               </a:ln>
               <a:extLst>
                 <a:ext uri="{91240B29-F687-4f45-9708-019B960494DF}">
-                  <a14:hiddenLine xmlns="" xmlns:a14="http://schemas.microsoft.com/office/drawing/2010/main" w="9525">
+                  <a14:hiddenLine xmlns:a14="http://schemas.microsoft.com/office/drawing/2010/main" xmlns="" w="9525">
                     <a:solidFill>
                       <a:srgbClr val="000000"/>
                     </a:solidFill>
@@ -10050,7 +10050,7 @@
               </a:ln>
               <a:extLst>
                 <a:ext uri="{91240B29-F687-4f45-9708-019B960494DF}">
-                  <a14:hiddenLine xmlns="" xmlns:a14="http://schemas.microsoft.com/office/drawing/2010/main" w="9525">
+                  <a14:hiddenLine xmlns:a14="http://schemas.microsoft.com/office/drawing/2010/main" xmlns="" w="9525">
                     <a:solidFill>
                       <a:srgbClr val="000000"/>
                     </a:solidFill>
@@ -10112,7 +10112,7 @@
               </a:ln>
               <a:extLst>
                 <a:ext uri="{91240B29-F687-4f45-9708-019B960494DF}">
-                  <a14:hiddenLine xmlns="" xmlns:a14="http://schemas.microsoft.com/office/drawing/2010/main" w="9525">
+                  <a14:hiddenLine xmlns:a14="http://schemas.microsoft.com/office/drawing/2010/main" xmlns="" w="9525">
                     <a:solidFill>
                       <a:srgbClr val="000000"/>
                     </a:solidFill>
@@ -10174,7 +10174,7 @@
               </a:ln>
               <a:extLst>
                 <a:ext uri="{91240B29-F687-4f45-9708-019B960494DF}">
-                  <a14:hiddenLine xmlns="" xmlns:a14="http://schemas.microsoft.com/office/drawing/2010/main" w="9525">
+                  <a14:hiddenLine xmlns:a14="http://schemas.microsoft.com/office/drawing/2010/main" xmlns="" w="9525">
                     <a:solidFill>
                       <a:srgbClr val="000000"/>
                     </a:solidFill>
@@ -10264,7 +10264,7 @@
               </a:ln>
               <a:extLst>
                 <a:ext uri="{91240B29-F687-4f45-9708-019B960494DF}">
-                  <a14:hiddenLine xmlns="" xmlns:a14="http://schemas.microsoft.com/office/drawing/2010/main" w="9525">
+                  <a14:hiddenLine xmlns:a14="http://schemas.microsoft.com/office/drawing/2010/main" xmlns="" w="9525">
                     <a:solidFill>
                       <a:srgbClr val="000000"/>
                     </a:solidFill>
@@ -10298,7 +10298,7 @@
               </a:ln>
               <a:extLst>
                 <a:ext uri="{91240B29-F687-4f45-9708-019B960494DF}">
-                  <a14:hiddenLine xmlns="" xmlns:a14="http://schemas.microsoft.com/office/drawing/2010/main" w="9525">
+                  <a14:hiddenLine xmlns:a14="http://schemas.microsoft.com/office/drawing/2010/main" xmlns="" w="9525">
                     <a:solidFill>
                       <a:srgbClr val="000000"/>
                     </a:solidFill>
@@ -10363,7 +10363,7 @@
               </a:ln>
               <a:extLst>
                 <a:ext uri="{91240B29-F687-4f45-9708-019B960494DF}">
-                  <a14:hiddenLine xmlns="" xmlns:a14="http://schemas.microsoft.com/office/drawing/2010/main" w="9525">
+                  <a14:hiddenLine xmlns:a14="http://schemas.microsoft.com/office/drawing/2010/main" xmlns="" w="9525">
                     <a:solidFill>
                       <a:srgbClr val="000000"/>
                     </a:solidFill>
@@ -10453,7 +10453,7 @@
               </a:ln>
               <a:extLst>
                 <a:ext uri="{91240B29-F687-4f45-9708-019B960494DF}">
-                  <a14:hiddenLine xmlns="" xmlns:a14="http://schemas.microsoft.com/office/drawing/2010/main" w="9525">
+                  <a14:hiddenLine xmlns:a14="http://schemas.microsoft.com/office/drawing/2010/main" xmlns="" w="9525">
                     <a:solidFill>
                       <a:srgbClr val="000000"/>
                     </a:solidFill>
@@ -10515,7 +10515,7 @@
               </a:ln>
               <a:extLst>
                 <a:ext uri="{91240B29-F687-4f45-9708-019B960494DF}">
-                  <a14:hiddenLine xmlns="" xmlns:a14="http://schemas.microsoft.com/office/drawing/2010/main" w="9525">
+                  <a14:hiddenLine xmlns:a14="http://schemas.microsoft.com/office/drawing/2010/main" xmlns="" w="9525">
                     <a:solidFill>
                       <a:srgbClr val="000000"/>
                     </a:solidFill>
@@ -10605,7 +10605,7 @@
               </a:ln>
               <a:extLst>
                 <a:ext uri="{91240B29-F687-4f45-9708-019B960494DF}">
-                  <a14:hiddenLine xmlns="" xmlns:a14="http://schemas.microsoft.com/office/drawing/2010/main" w="9525">
+                  <a14:hiddenLine xmlns:a14="http://schemas.microsoft.com/office/drawing/2010/main" xmlns="" w="9525">
                     <a:solidFill>
                       <a:srgbClr val="000000"/>
                     </a:solidFill>
@@ -10670,7 +10670,7 @@
               </a:ln>
               <a:extLst>
                 <a:ext uri="{91240B29-F687-4f45-9708-019B960494DF}">
-                  <a14:hiddenLine xmlns="" xmlns:a14="http://schemas.microsoft.com/office/drawing/2010/main" w="9525">
+                  <a14:hiddenLine xmlns:a14="http://schemas.microsoft.com/office/drawing/2010/main" xmlns="" w="9525">
                     <a:solidFill>
                       <a:srgbClr val="000000"/>
                     </a:solidFill>
@@ -10732,7 +10732,7 @@
               </a:ln>
               <a:extLst>
                 <a:ext uri="{91240B29-F687-4f45-9708-019B960494DF}">
-                  <a14:hiddenLine xmlns="" xmlns:a14="http://schemas.microsoft.com/office/drawing/2010/main" w="9525">
+                  <a14:hiddenLine xmlns:a14="http://schemas.microsoft.com/office/drawing/2010/main" xmlns="" w="9525">
                     <a:solidFill>
                       <a:srgbClr val="000000"/>
                     </a:solidFill>
@@ -10822,7 +10822,7 @@
               </a:ln>
               <a:extLst>
                 <a:ext uri="{91240B29-F687-4f45-9708-019B960494DF}">
-                  <a14:hiddenLine xmlns="" xmlns:a14="http://schemas.microsoft.com/office/drawing/2010/main" w="9525">
+                  <a14:hiddenLine xmlns:a14="http://schemas.microsoft.com/office/drawing/2010/main" xmlns="" w="9525">
                     <a:solidFill>
                       <a:srgbClr val="000000"/>
                     </a:solidFill>
@@ -10912,7 +10912,7 @@
               </a:ln>
               <a:extLst>
                 <a:ext uri="{91240B29-F687-4f45-9708-019B960494DF}">
-                  <a14:hiddenLine xmlns="" xmlns:a14="http://schemas.microsoft.com/office/drawing/2010/main" w="9525">
+                  <a14:hiddenLine xmlns:a14="http://schemas.microsoft.com/office/drawing/2010/main" xmlns="" w="9525">
                     <a:solidFill>
                       <a:srgbClr val="000000"/>
                     </a:solidFill>
@@ -10977,7 +10977,7 @@
               </a:ln>
               <a:extLst>
                 <a:ext uri="{91240B29-F687-4f45-9708-019B960494DF}">
-                  <a14:hiddenLine xmlns="" xmlns:a14="http://schemas.microsoft.com/office/drawing/2010/main" w="9525">
+                  <a14:hiddenLine xmlns:a14="http://schemas.microsoft.com/office/drawing/2010/main" xmlns="" w="9525">
                     <a:solidFill>
                       <a:srgbClr val="000000"/>
                     </a:solidFill>
@@ -11097,7 +11097,7 @@
               </a:ln>
               <a:extLst>
                 <a:ext uri="{91240B29-F687-4f45-9708-019B960494DF}">
-                  <a14:hiddenLine xmlns="" xmlns:a14="http://schemas.microsoft.com/office/drawing/2010/main" w="9525">
+                  <a14:hiddenLine xmlns:a14="http://schemas.microsoft.com/office/drawing/2010/main" xmlns="" w="9525">
                     <a:solidFill>
                       <a:srgbClr val="000000"/>
                     </a:solidFill>
@@ -11178,7 +11178,7 @@
               </a:ln>
               <a:extLst>
                 <a:ext uri="{91240B29-F687-4f45-9708-019B960494DF}">
-                  <a14:hiddenLine xmlns="" xmlns:a14="http://schemas.microsoft.com/office/drawing/2010/main" w="9525">
+                  <a14:hiddenLine xmlns:a14="http://schemas.microsoft.com/office/drawing/2010/main" xmlns="" w="9525">
                     <a:solidFill>
                       <a:srgbClr val="000000"/>
                     </a:solidFill>
@@ -11293,7 +11293,7 @@
               </a:ln>
               <a:extLst>
                 <a:ext uri="{91240B29-F687-4f45-9708-019B960494DF}">
-                  <a14:hiddenLine xmlns="" xmlns:a14="http://schemas.microsoft.com/office/drawing/2010/main" w="9525">
+                  <a14:hiddenLine xmlns:a14="http://schemas.microsoft.com/office/drawing/2010/main" xmlns="" w="9525">
                     <a:solidFill>
                       <a:srgbClr val="000000"/>
                     </a:solidFill>
@@ -11383,7 +11383,7 @@
               </a:ln>
               <a:extLst>
                 <a:ext uri="{91240B29-F687-4f45-9708-019B960494DF}">
-                  <a14:hiddenLine xmlns="" xmlns:a14="http://schemas.microsoft.com/office/drawing/2010/main" w="9525">
+                  <a14:hiddenLine xmlns:a14="http://schemas.microsoft.com/office/drawing/2010/main" xmlns="" w="9525">
                     <a:solidFill>
                       <a:srgbClr val="000000"/>
                     </a:solidFill>
@@ -11448,7 +11448,7 @@
               </a:ln>
               <a:extLst>
                 <a:ext uri="{91240B29-F687-4f45-9708-019B960494DF}">
-                  <a14:hiddenLine xmlns="" xmlns:a14="http://schemas.microsoft.com/office/drawing/2010/main" w="9525">
+                  <a14:hiddenLine xmlns:a14="http://schemas.microsoft.com/office/drawing/2010/main" xmlns="" w="9525">
                     <a:solidFill>
                       <a:srgbClr val="000000"/>
                     </a:solidFill>
@@ -11538,7 +11538,7 @@
               </a:ln>
               <a:extLst>
                 <a:ext uri="{91240B29-F687-4f45-9708-019B960494DF}">
-                  <a14:hiddenLine xmlns="" xmlns:a14="http://schemas.microsoft.com/office/drawing/2010/main" w="9525">
+                  <a14:hiddenLine xmlns:a14="http://schemas.microsoft.com/office/drawing/2010/main" xmlns="" w="9525">
                     <a:solidFill>
                       <a:srgbClr val="000000"/>
                     </a:solidFill>
@@ -11606,7 +11606,7 @@
               </a:ln>
               <a:extLst>
                 <a:ext uri="{91240B29-F687-4f45-9708-019B960494DF}">
-                  <a14:hiddenLine xmlns="" xmlns:a14="http://schemas.microsoft.com/office/drawing/2010/main" w="9525">
+                  <a14:hiddenLine xmlns:a14="http://schemas.microsoft.com/office/drawing/2010/main" xmlns="" w="9525">
                     <a:solidFill>
                       <a:srgbClr val="000000"/>
                     </a:solidFill>
@@ -11696,7 +11696,7 @@
               </a:ln>
               <a:extLst>
                 <a:ext uri="{91240B29-F687-4f45-9708-019B960494DF}">
-                  <a14:hiddenLine xmlns="" xmlns:a14="http://schemas.microsoft.com/office/drawing/2010/main" w="9525">
+                  <a14:hiddenLine xmlns:a14="http://schemas.microsoft.com/office/drawing/2010/main" xmlns="" w="9525">
                     <a:solidFill>
                       <a:srgbClr val="000000"/>
                     </a:solidFill>
@@ -11764,7 +11764,7 @@
               </a:ln>
               <a:extLst>
                 <a:ext uri="{91240B29-F687-4f45-9708-019B960494DF}">
-                  <a14:hiddenLine xmlns="" xmlns:a14="http://schemas.microsoft.com/office/drawing/2010/main" w="9525">
+                  <a14:hiddenLine xmlns:a14="http://schemas.microsoft.com/office/drawing/2010/main" xmlns="" w="9525">
                     <a:solidFill>
                       <a:srgbClr val="000000"/>
                     </a:solidFill>
@@ -11854,7 +11854,7 @@
               </a:ln>
               <a:extLst>
                 <a:ext uri="{91240B29-F687-4f45-9708-019B960494DF}">
-                  <a14:hiddenLine xmlns="" xmlns:a14="http://schemas.microsoft.com/office/drawing/2010/main" w="9525">
+                  <a14:hiddenLine xmlns:a14="http://schemas.microsoft.com/office/drawing/2010/main" xmlns="" w="9525">
                     <a:solidFill>
                       <a:srgbClr val="000000"/>
                     </a:solidFill>
@@ -11888,7 +11888,7 @@
               </a:ln>
               <a:extLst>
                 <a:ext uri="{91240B29-F687-4f45-9708-019B960494DF}">
-                  <a14:hiddenLine xmlns="" xmlns:a14="http://schemas.microsoft.com/office/drawing/2010/main" w="9525">
+                  <a14:hiddenLine xmlns:a14="http://schemas.microsoft.com/office/drawing/2010/main" xmlns="" w="9525">
                     <a:solidFill>
                       <a:srgbClr val="000000"/>
                     </a:solidFill>
@@ -12028,7 +12028,7 @@
           <a:p>
             <a:fld id="{42A3FA0C-5CD8-4683-A8F2-458893B3FD08}" type="datetimeFigureOut">
               <a:rPr lang="ru-RU" smtClean="0"/>
-              <a:t>30.08.2026</a:t>
+              <a:t>31.08.2026</a:t>
             </a:fld>
             <a:endParaRPr lang="ru-RU"/>
           </a:p>
@@ -12874,7 +12874,6 @@
               <a:rPr lang="ru-RU" dirty="0"/>
               <a:t>Сопоставьте технологию/стандарт (1–4) с её ключевой особенностью (А–Г):</a:t>
             </a:r>
-            <a:endParaRPr lang="ru-RU" dirty="0"/>
           </a:p>
         </p:txBody>
       </p:sp>
@@ -13594,7 +13593,6 @@
               <a:rPr lang="ru-RU" dirty="0"/>
               <a:t>Определите, верны ли следующие утверждения (если нет — объясните, в чём ошибка):</a:t>
             </a:r>
-            <a:endParaRPr lang="ru-RU" dirty="0"/>
           </a:p>
         </p:txBody>
       </p:sp>
@@ -13819,7 +13817,6 @@
               <a:rPr lang="ru-RU" dirty="0"/>
               <a:t>Заполните пропуски нужными словами или числами:</a:t>
             </a:r>
-            <a:endParaRPr lang="ru-RU" dirty="0"/>
           </a:p>
         </p:txBody>
       </p:sp>
@@ -13981,6 +13978,29 @@
           <a:chExt cx="0" cy="0"/>
         </a:xfrm>
       </p:grpSpPr>
+      <p:sp>
+        <p:nvSpPr>
+          <p:cNvPr id="2" name="Заголовок 1"/>
+          <p:cNvSpPr>
+            <a:spLocks noGrp="1"/>
+          </p:cNvSpPr>
+          <p:nvPr>
+            <p:ph type="title"/>
+          </p:nvPr>
+        </p:nvSpPr>
+        <p:spPr/>
+        <p:txBody>
+          <a:bodyPr/>
+          <a:lstStyle/>
+          <a:p>
+            <a:r>
+              <a:rPr lang="ru-RU" dirty="0" smtClean="0"/>
+              <a:t>Ответьте на вопросы</a:t>
+            </a:r>
+            <a:endParaRPr lang="ru-RU" dirty="0"/>
+          </a:p>
+        </p:txBody>
+      </p:sp>
       <p:pic>
         <p:nvPicPr>
           <p:cNvPr id="4" name="Объект 3"/>
@@ -14017,12 +14037,7 @@
             <p:ph sz="half" idx="2"/>
           </p:nvPr>
         </p:nvSpPr>
-        <p:spPr>
-          <a:xfrm>
-            <a:off x="6172200" y="2249486"/>
-            <a:ext cx="4875211" cy="2129083"/>
-          </a:xfrm>
-        </p:spPr>
+        <p:spPr/>
         <p:txBody>
           <a:bodyPr/>
           <a:lstStyle/>
@@ -14127,7 +14142,6 @@
               <a:rPr lang="ru-RU" dirty="0"/>
               <a:t>:</a:t>
             </a:r>
-            <a:endParaRPr lang="ru-RU" dirty="0"/>
           </a:p>
         </p:txBody>
       </p:sp>

--- a/1.6 Ethernet Basic/1.6 Ethernet Basic.pptx
+++ b/1.6 Ethernet Basic/1.6 Ethernet Basic.pptx
@@ -7,9 +7,9 @@
   <p:sldIdLst>
     <p:sldId id="256" r:id="rId2"/>
     <p:sldId id="257" r:id="rId3"/>
-    <p:sldId id="258" r:id="rId4"/>
-    <p:sldId id="259" r:id="rId5"/>
-    <p:sldId id="260" r:id="rId6"/>
+    <p:sldId id="259" r:id="rId4"/>
+    <p:sldId id="260" r:id="rId5"/>
+    <p:sldId id="258" r:id="rId6"/>
     <p:sldId id="261" r:id="rId7"/>
     <p:sldId id="262" r:id="rId8"/>
     <p:sldId id="263" r:id="rId9"/>
@@ -185,7 +185,7 @@
           <a:noFill/>
           <a:extLst>
             <a:ext uri="{909E8E84-426E-40dd-AFC4-6F175D3DCCD1}">
-              <a14:hiddenFill xmlns:a14="http://schemas.microsoft.com/office/drawing/2010/main" xmlns="">
+              <a14:hiddenFill xmlns="" xmlns:a14="http://schemas.microsoft.com/office/drawing/2010/main">
                 <a:solidFill>
                   <a:srgbClr val="FFFFFF"/>
                 </a:solidFill>
@@ -244,7 +244,7 @@
             </a:ln>
             <a:extLst>
               <a:ext uri="{91240B29-F687-4f45-9708-019B960494DF}">
-                <a14:hiddenLine xmlns:a14="http://schemas.microsoft.com/office/drawing/2010/main" xmlns="" w="9525">
+                <a14:hiddenLine xmlns="" xmlns:a14="http://schemas.microsoft.com/office/drawing/2010/main" w="9525">
                   <a:solidFill>
                     <a:srgbClr val="000000"/>
                   </a:solidFill>
@@ -334,7 +334,7 @@
             </a:ln>
             <a:extLst>
               <a:ext uri="{91240B29-F687-4f45-9708-019B960494DF}">
-                <a14:hiddenLine xmlns:a14="http://schemas.microsoft.com/office/drawing/2010/main" xmlns="" w="9525">
+                <a14:hiddenLine xmlns="" xmlns:a14="http://schemas.microsoft.com/office/drawing/2010/main" w="9525">
                   <a:solidFill>
                     <a:srgbClr val="000000"/>
                   </a:solidFill>
@@ -424,7 +424,7 @@
             </a:ln>
             <a:extLst>
               <a:ext uri="{91240B29-F687-4f45-9708-019B960494DF}">
-                <a14:hiddenLine xmlns:a14="http://schemas.microsoft.com/office/drawing/2010/main" xmlns="" w="9525">
+                <a14:hiddenLine xmlns="" xmlns:a14="http://schemas.microsoft.com/office/drawing/2010/main" w="9525">
                   <a:solidFill>
                     <a:srgbClr val="000000"/>
                   </a:solidFill>
@@ -458,7 +458,7 @@
             </a:ln>
             <a:extLst>
               <a:ext uri="{91240B29-F687-4f45-9708-019B960494DF}">
-                <a14:hiddenLine xmlns:a14="http://schemas.microsoft.com/office/drawing/2010/main" xmlns="" w="9525">
+                <a14:hiddenLine xmlns="" xmlns:a14="http://schemas.microsoft.com/office/drawing/2010/main" w="9525">
                   <a:solidFill>
                     <a:srgbClr val="000000"/>
                   </a:solidFill>
@@ -548,7 +548,7 @@
             </a:ln>
             <a:extLst>
               <a:ext uri="{91240B29-F687-4f45-9708-019B960494DF}">
-                <a14:hiddenLine xmlns:a14="http://schemas.microsoft.com/office/drawing/2010/main" xmlns="" w="9525">
+                <a14:hiddenLine xmlns="" xmlns:a14="http://schemas.microsoft.com/office/drawing/2010/main" w="9525">
                   <a:solidFill>
                     <a:srgbClr val="000000"/>
                   </a:solidFill>
@@ -610,7 +610,7 @@
             </a:ln>
             <a:extLst>
               <a:ext uri="{91240B29-F687-4f45-9708-019B960494DF}">
-                <a14:hiddenLine xmlns:a14="http://schemas.microsoft.com/office/drawing/2010/main" xmlns="" w="9525">
+                <a14:hiddenLine xmlns="" xmlns:a14="http://schemas.microsoft.com/office/drawing/2010/main" w="9525">
                   <a:solidFill>
                     <a:srgbClr val="000000"/>
                   </a:solidFill>
@@ -672,7 +672,7 @@
             </a:ln>
             <a:extLst>
               <a:ext uri="{91240B29-F687-4f45-9708-019B960494DF}">
-                <a14:hiddenLine xmlns:a14="http://schemas.microsoft.com/office/drawing/2010/main" xmlns="" w="9525">
+                <a14:hiddenLine xmlns="" xmlns:a14="http://schemas.microsoft.com/office/drawing/2010/main" w="9525">
                   <a:solidFill>
                     <a:srgbClr val="000000"/>
                   </a:solidFill>
@@ -762,7 +762,7 @@
             </a:ln>
             <a:extLst>
               <a:ext uri="{91240B29-F687-4f45-9708-019B960494DF}">
-                <a14:hiddenLine xmlns:a14="http://schemas.microsoft.com/office/drawing/2010/main" xmlns="" w="9525">
+                <a14:hiddenLine xmlns="" xmlns:a14="http://schemas.microsoft.com/office/drawing/2010/main" w="9525">
                   <a:solidFill>
                     <a:srgbClr val="000000"/>
                   </a:solidFill>
@@ -824,7 +824,7 @@
             </a:ln>
             <a:extLst>
               <a:ext uri="{91240B29-F687-4f45-9708-019B960494DF}">
-                <a14:hiddenLine xmlns:a14="http://schemas.microsoft.com/office/drawing/2010/main" xmlns="" w="9525">
+                <a14:hiddenLine xmlns="" xmlns:a14="http://schemas.microsoft.com/office/drawing/2010/main" w="9525">
                   <a:solidFill>
                     <a:srgbClr val="000000"/>
                   </a:solidFill>
@@ -886,7 +886,7 @@
             </a:ln>
             <a:extLst>
               <a:ext uri="{91240B29-F687-4f45-9708-019B960494DF}">
-                <a14:hiddenLine xmlns:a14="http://schemas.microsoft.com/office/drawing/2010/main" xmlns="" w="9525">
+                <a14:hiddenLine xmlns="" xmlns:a14="http://schemas.microsoft.com/office/drawing/2010/main" w="9525">
                   <a:solidFill>
                     <a:srgbClr val="000000"/>
                   </a:solidFill>
@@ -976,7 +976,7 @@
             </a:ln>
             <a:extLst>
               <a:ext uri="{91240B29-F687-4f45-9708-019B960494DF}">
-                <a14:hiddenLine xmlns:a14="http://schemas.microsoft.com/office/drawing/2010/main" xmlns="" w="9525">
+                <a14:hiddenLine xmlns="" xmlns:a14="http://schemas.microsoft.com/office/drawing/2010/main" w="9525">
                   <a:solidFill>
                     <a:srgbClr val="000000"/>
                   </a:solidFill>
@@ -1066,7 +1066,7 @@
             </a:ln>
             <a:extLst>
               <a:ext uri="{91240B29-F687-4f45-9708-019B960494DF}">
-                <a14:hiddenLine xmlns:a14="http://schemas.microsoft.com/office/drawing/2010/main" xmlns="" w="9525">
+                <a14:hiddenLine xmlns="" xmlns:a14="http://schemas.microsoft.com/office/drawing/2010/main" w="9525">
                   <a:solidFill>
                     <a:srgbClr val="000000"/>
                   </a:solidFill>
@@ -1128,7 +1128,7 @@
             </a:ln>
             <a:extLst>
               <a:ext uri="{91240B29-F687-4f45-9708-019B960494DF}">
-                <a14:hiddenLine xmlns:a14="http://schemas.microsoft.com/office/drawing/2010/main" xmlns="" w="9525">
+                <a14:hiddenLine xmlns="" xmlns:a14="http://schemas.microsoft.com/office/drawing/2010/main" w="9525">
                   <a:solidFill>
                     <a:srgbClr val="000000"/>
                   </a:solidFill>
@@ -1238,7 +1238,7 @@
             </a:ln>
             <a:extLst>
               <a:ext uri="{91240B29-F687-4f45-9708-019B960494DF}">
-                <a14:hiddenLine xmlns:a14="http://schemas.microsoft.com/office/drawing/2010/main" xmlns="" w="9525">
+                <a14:hiddenLine xmlns="" xmlns:a14="http://schemas.microsoft.com/office/drawing/2010/main" w="9525">
                   <a:solidFill>
                     <a:srgbClr val="000000"/>
                   </a:solidFill>
@@ -1300,7 +1300,7 @@
             </a:ln>
             <a:extLst>
               <a:ext uri="{91240B29-F687-4f45-9708-019B960494DF}">
-                <a14:hiddenLine xmlns:a14="http://schemas.microsoft.com/office/drawing/2010/main" xmlns="" w="9525">
+                <a14:hiddenLine xmlns="" xmlns:a14="http://schemas.microsoft.com/office/drawing/2010/main" w="9525">
                   <a:solidFill>
                     <a:srgbClr val="000000"/>
                   </a:solidFill>
@@ -1390,7 +1390,7 @@
             </a:ln>
             <a:extLst>
               <a:ext uri="{91240B29-F687-4f45-9708-019B960494DF}">
-                <a14:hiddenLine xmlns:a14="http://schemas.microsoft.com/office/drawing/2010/main" xmlns="" w="9525">
+                <a14:hiddenLine xmlns="" xmlns:a14="http://schemas.microsoft.com/office/drawing/2010/main" w="9525">
                   <a:solidFill>
                     <a:srgbClr val="000000"/>
                   </a:solidFill>
@@ -1480,7 +1480,7 @@
             </a:ln>
             <a:extLst>
               <a:ext uri="{91240B29-F687-4f45-9708-019B960494DF}">
-                <a14:hiddenLine xmlns:a14="http://schemas.microsoft.com/office/drawing/2010/main" xmlns="" w="9525">
+                <a14:hiddenLine xmlns="" xmlns:a14="http://schemas.microsoft.com/office/drawing/2010/main" w="9525">
                   <a:solidFill>
                     <a:srgbClr val="000000"/>
                   </a:solidFill>
@@ -1542,7 +1542,7 @@
             </a:ln>
             <a:extLst>
               <a:ext uri="{91240B29-F687-4f45-9708-019B960494DF}">
-                <a14:hiddenLine xmlns:a14="http://schemas.microsoft.com/office/drawing/2010/main" xmlns="" w="9525">
+                <a14:hiddenLine xmlns="" xmlns:a14="http://schemas.microsoft.com/office/drawing/2010/main" w="9525">
                   <a:solidFill>
                     <a:srgbClr val="000000"/>
                   </a:solidFill>
@@ -1632,7 +1632,7 @@
             </a:ln>
             <a:extLst>
               <a:ext uri="{91240B29-F687-4f45-9708-019B960494DF}">
-                <a14:hiddenLine xmlns:a14="http://schemas.microsoft.com/office/drawing/2010/main" xmlns="" w="9525">
+                <a14:hiddenLine xmlns="" xmlns:a14="http://schemas.microsoft.com/office/drawing/2010/main" w="9525">
                   <a:solidFill>
                     <a:srgbClr val="000000"/>
                   </a:solidFill>
@@ -1722,7 +1722,7 @@
             </a:ln>
             <a:extLst>
               <a:ext uri="{91240B29-F687-4f45-9708-019B960494DF}">
-                <a14:hiddenLine xmlns:a14="http://schemas.microsoft.com/office/drawing/2010/main" xmlns="" w="9525">
+                <a14:hiddenLine xmlns="" xmlns:a14="http://schemas.microsoft.com/office/drawing/2010/main" w="9525">
                   <a:solidFill>
                     <a:srgbClr val="000000"/>
                   </a:solidFill>
@@ -1778,7 +1778,7 @@
             </a:ln>
             <a:extLst>
               <a:ext uri="{91240B29-F687-4f45-9708-019B960494DF}">
-                <a14:hiddenLine xmlns:a14="http://schemas.microsoft.com/office/drawing/2010/main" xmlns="" w="9525">
+                <a14:hiddenLine xmlns="" xmlns:a14="http://schemas.microsoft.com/office/drawing/2010/main" w="9525">
                   <a:solidFill>
                     <a:srgbClr val="000000"/>
                   </a:solidFill>
@@ -1868,7 +1868,7 @@
             </a:ln>
             <a:extLst>
               <a:ext uri="{91240B29-F687-4f45-9708-019B960494DF}">
-                <a14:hiddenLine xmlns:a14="http://schemas.microsoft.com/office/drawing/2010/main" xmlns="" w="9525">
+                <a14:hiddenLine xmlns="" xmlns:a14="http://schemas.microsoft.com/office/drawing/2010/main" w="9525">
                   <a:solidFill>
                     <a:srgbClr val="000000"/>
                   </a:solidFill>
@@ -1924,7 +1924,7 @@
             </a:ln>
             <a:extLst>
               <a:ext uri="{91240B29-F687-4f45-9708-019B960494DF}">
-                <a14:hiddenLine xmlns:a14="http://schemas.microsoft.com/office/drawing/2010/main" xmlns="" w="9525">
+                <a14:hiddenLine xmlns="" xmlns:a14="http://schemas.microsoft.com/office/drawing/2010/main" w="9525">
                   <a:solidFill>
                     <a:srgbClr val="000000"/>
                   </a:solidFill>
@@ -2014,7 +2014,7 @@
             </a:ln>
             <a:extLst>
               <a:ext uri="{91240B29-F687-4f45-9708-019B960494DF}">
-                <a14:hiddenLine xmlns:a14="http://schemas.microsoft.com/office/drawing/2010/main" xmlns="" w="9525">
+                <a14:hiddenLine xmlns="" xmlns:a14="http://schemas.microsoft.com/office/drawing/2010/main" w="9525">
                   <a:solidFill>
                     <a:srgbClr val="000000"/>
                   </a:solidFill>
@@ -2082,7 +2082,7 @@
             </a:ln>
             <a:extLst>
               <a:ext uri="{91240B29-F687-4f45-9708-019B960494DF}">
-                <a14:hiddenLine xmlns:a14="http://schemas.microsoft.com/office/drawing/2010/main" xmlns="" w="9525">
+                <a14:hiddenLine xmlns="" xmlns:a14="http://schemas.microsoft.com/office/drawing/2010/main" w="9525">
                   <a:solidFill>
                     <a:srgbClr val="000000"/>
                   </a:solidFill>
@@ -2172,7 +2172,7 @@
             </a:ln>
             <a:extLst>
               <a:ext uri="{91240B29-F687-4f45-9708-019B960494DF}">
-                <a14:hiddenLine xmlns:a14="http://schemas.microsoft.com/office/drawing/2010/main" xmlns="" w="9525">
+                <a14:hiddenLine xmlns="" xmlns:a14="http://schemas.microsoft.com/office/drawing/2010/main" w="9525">
                   <a:solidFill>
                     <a:srgbClr val="000000"/>
                   </a:solidFill>
@@ -2240,7 +2240,7 @@
             </a:ln>
             <a:extLst>
               <a:ext uri="{91240B29-F687-4f45-9708-019B960494DF}">
-                <a14:hiddenLine xmlns:a14="http://schemas.microsoft.com/office/drawing/2010/main" xmlns="" w="9525">
+                <a14:hiddenLine xmlns="" xmlns:a14="http://schemas.microsoft.com/office/drawing/2010/main" w="9525">
                   <a:solidFill>
                     <a:srgbClr val="000000"/>
                   </a:solidFill>
@@ -2330,7 +2330,7 @@
             </a:ln>
             <a:extLst>
               <a:ext uri="{91240B29-F687-4f45-9708-019B960494DF}">
-                <a14:hiddenLine xmlns:a14="http://schemas.microsoft.com/office/drawing/2010/main" xmlns="" w="9525">
+                <a14:hiddenLine xmlns="" xmlns:a14="http://schemas.microsoft.com/office/drawing/2010/main" w="9525">
                   <a:solidFill>
                     <a:srgbClr val="000000"/>
                   </a:solidFill>
@@ -2364,7 +2364,7 @@
             </a:ln>
             <a:extLst>
               <a:ext uri="{91240B29-F687-4f45-9708-019B960494DF}">
-                <a14:hiddenLine xmlns:a14="http://schemas.microsoft.com/office/drawing/2010/main" xmlns="" w="9525">
+                <a14:hiddenLine xmlns="" xmlns:a14="http://schemas.microsoft.com/office/drawing/2010/main" w="9525">
                   <a:solidFill>
                     <a:srgbClr val="000000"/>
                   </a:solidFill>
@@ -2454,7 +2454,7 @@
             </a:ln>
             <a:extLst>
               <a:ext uri="{91240B29-F687-4f45-9708-019B960494DF}">
-                <a14:hiddenLine xmlns:a14="http://schemas.microsoft.com/office/drawing/2010/main" xmlns="" w="9525">
+                <a14:hiddenLine xmlns="" xmlns:a14="http://schemas.microsoft.com/office/drawing/2010/main" w="9525">
                   <a:solidFill>
                     <a:srgbClr val="000000"/>
                   </a:solidFill>
@@ -2516,7 +2516,7 @@
             </a:ln>
             <a:extLst>
               <a:ext uri="{91240B29-F687-4f45-9708-019B960494DF}">
-                <a14:hiddenLine xmlns:a14="http://schemas.microsoft.com/office/drawing/2010/main" xmlns="" w="9525">
+                <a14:hiddenLine xmlns="" xmlns:a14="http://schemas.microsoft.com/office/drawing/2010/main" w="9525">
                   <a:solidFill>
                     <a:srgbClr val="000000"/>
                   </a:solidFill>
@@ -2578,7 +2578,7 @@
             </a:ln>
             <a:extLst>
               <a:ext uri="{91240B29-F687-4f45-9708-019B960494DF}">
-                <a14:hiddenLine xmlns:a14="http://schemas.microsoft.com/office/drawing/2010/main" xmlns="" w="9525">
+                <a14:hiddenLine xmlns="" xmlns:a14="http://schemas.microsoft.com/office/drawing/2010/main" w="9525">
                   <a:solidFill>
                     <a:srgbClr val="000000"/>
                   </a:solidFill>
@@ -2668,7 +2668,7 @@
             </a:ln>
             <a:extLst>
               <a:ext uri="{91240B29-F687-4f45-9708-019B960494DF}">
-                <a14:hiddenLine xmlns:a14="http://schemas.microsoft.com/office/drawing/2010/main" xmlns="" w="9525">
+                <a14:hiddenLine xmlns="" xmlns:a14="http://schemas.microsoft.com/office/drawing/2010/main" w="9525">
                   <a:solidFill>
                     <a:srgbClr val="000000"/>
                   </a:solidFill>
@@ -2736,7 +2736,7 @@
             </a:ln>
             <a:extLst>
               <a:ext uri="{91240B29-F687-4f45-9708-019B960494DF}">
-                <a14:hiddenLine xmlns:a14="http://schemas.microsoft.com/office/drawing/2010/main" xmlns="" w="9525">
+                <a14:hiddenLine xmlns="" xmlns:a14="http://schemas.microsoft.com/office/drawing/2010/main" w="9525">
                   <a:solidFill>
                     <a:srgbClr val="000000"/>
                   </a:solidFill>
@@ -2798,7 +2798,7 @@
             </a:ln>
             <a:extLst>
               <a:ext uri="{91240B29-F687-4f45-9708-019B960494DF}">
-                <a14:hiddenLine xmlns:a14="http://schemas.microsoft.com/office/drawing/2010/main" xmlns="" w="9525">
+                <a14:hiddenLine xmlns="" xmlns:a14="http://schemas.microsoft.com/office/drawing/2010/main" w="9525">
                   <a:solidFill>
                     <a:srgbClr val="000000"/>
                   </a:solidFill>
@@ -2888,7 +2888,7 @@
             </a:ln>
             <a:extLst>
               <a:ext uri="{91240B29-F687-4f45-9708-019B960494DF}">
-                <a14:hiddenLine xmlns:a14="http://schemas.microsoft.com/office/drawing/2010/main" xmlns="" w="9525">
+                <a14:hiddenLine xmlns="" xmlns:a14="http://schemas.microsoft.com/office/drawing/2010/main" w="9525">
                   <a:solidFill>
                     <a:srgbClr val="000000"/>
                   </a:solidFill>
@@ -2950,7 +2950,7 @@
             </a:ln>
             <a:extLst>
               <a:ext uri="{91240B29-F687-4f45-9708-019B960494DF}">
-                <a14:hiddenLine xmlns:a14="http://schemas.microsoft.com/office/drawing/2010/main" xmlns="" w="9525">
+                <a14:hiddenLine xmlns="" xmlns:a14="http://schemas.microsoft.com/office/drawing/2010/main" w="9525">
                   <a:solidFill>
                     <a:srgbClr val="000000"/>
                   </a:solidFill>
@@ -3040,7 +3040,7 @@
             </a:ln>
             <a:extLst>
               <a:ext uri="{91240B29-F687-4f45-9708-019B960494DF}">
-                <a14:hiddenLine xmlns:a14="http://schemas.microsoft.com/office/drawing/2010/main" xmlns="" w="9525">
+                <a14:hiddenLine xmlns="" xmlns:a14="http://schemas.microsoft.com/office/drawing/2010/main" w="9525">
                   <a:solidFill>
                     <a:srgbClr val="000000"/>
                   </a:solidFill>
@@ -3102,7 +3102,7 @@
             </a:ln>
             <a:extLst>
               <a:ext uri="{91240B29-F687-4f45-9708-019B960494DF}">
-                <a14:hiddenLine xmlns:a14="http://schemas.microsoft.com/office/drawing/2010/main" xmlns="" w="9525">
+                <a14:hiddenLine xmlns="" xmlns:a14="http://schemas.microsoft.com/office/drawing/2010/main" w="9525">
                   <a:solidFill>
                     <a:srgbClr val="000000"/>
                   </a:solidFill>
@@ -3192,7 +3192,7 @@
             </a:ln>
             <a:extLst>
               <a:ext uri="{91240B29-F687-4f45-9708-019B960494DF}">
-                <a14:hiddenLine xmlns:a14="http://schemas.microsoft.com/office/drawing/2010/main" xmlns="" w="9525">
+                <a14:hiddenLine xmlns="" xmlns:a14="http://schemas.microsoft.com/office/drawing/2010/main" w="9525">
                   <a:solidFill>
                     <a:srgbClr val="000000"/>
                   </a:solidFill>
@@ -3226,7 +3226,7 @@
             </a:ln>
             <a:extLst>
               <a:ext uri="{91240B29-F687-4f45-9708-019B960494DF}">
-                <a14:hiddenLine xmlns:a14="http://schemas.microsoft.com/office/drawing/2010/main" xmlns="" w="9525">
+                <a14:hiddenLine xmlns="" xmlns:a14="http://schemas.microsoft.com/office/drawing/2010/main" w="9525">
                   <a:solidFill>
                     <a:srgbClr val="000000"/>
                   </a:solidFill>
@@ -3291,7 +3291,7 @@
             </a:ln>
             <a:extLst>
               <a:ext uri="{91240B29-F687-4f45-9708-019B960494DF}">
-                <a14:hiddenLine xmlns:a14="http://schemas.microsoft.com/office/drawing/2010/main" xmlns="" w="9525">
+                <a14:hiddenLine xmlns="" xmlns:a14="http://schemas.microsoft.com/office/drawing/2010/main" w="9525">
                   <a:solidFill>
                     <a:srgbClr val="000000"/>
                   </a:solidFill>
@@ -3381,7 +3381,7 @@
             </a:ln>
             <a:extLst>
               <a:ext uri="{91240B29-F687-4f45-9708-019B960494DF}">
-                <a14:hiddenLine xmlns:a14="http://schemas.microsoft.com/office/drawing/2010/main" xmlns="" w="9525">
+                <a14:hiddenLine xmlns="" xmlns:a14="http://schemas.microsoft.com/office/drawing/2010/main" w="9525">
                   <a:solidFill>
                     <a:srgbClr val="000000"/>
                   </a:solidFill>
@@ -3443,7 +3443,7 @@
             </a:ln>
             <a:extLst>
               <a:ext uri="{91240B29-F687-4f45-9708-019B960494DF}">
-                <a14:hiddenLine xmlns:a14="http://schemas.microsoft.com/office/drawing/2010/main" xmlns="" w="9525">
+                <a14:hiddenLine xmlns="" xmlns:a14="http://schemas.microsoft.com/office/drawing/2010/main" w="9525">
                   <a:solidFill>
                     <a:srgbClr val="000000"/>
                   </a:solidFill>
@@ -3533,7 +3533,7 @@
             </a:ln>
             <a:extLst>
               <a:ext uri="{91240B29-F687-4f45-9708-019B960494DF}">
-                <a14:hiddenLine xmlns:a14="http://schemas.microsoft.com/office/drawing/2010/main" xmlns="" w="9525">
+                <a14:hiddenLine xmlns="" xmlns:a14="http://schemas.microsoft.com/office/drawing/2010/main" w="9525">
                   <a:solidFill>
                     <a:srgbClr val="000000"/>
                   </a:solidFill>
@@ -3623,7 +3623,7 @@
             </a:ln>
             <a:extLst>
               <a:ext uri="{91240B29-F687-4f45-9708-019B960494DF}">
-                <a14:hiddenLine xmlns:a14="http://schemas.microsoft.com/office/drawing/2010/main" xmlns="" w="9525">
+                <a14:hiddenLine xmlns="" xmlns:a14="http://schemas.microsoft.com/office/drawing/2010/main" w="9525">
                   <a:solidFill>
                     <a:srgbClr val="000000"/>
                   </a:solidFill>
@@ -3688,7 +3688,7 @@
             </a:ln>
             <a:extLst>
               <a:ext uri="{91240B29-F687-4f45-9708-019B960494DF}">
-                <a14:hiddenLine xmlns:a14="http://schemas.microsoft.com/office/drawing/2010/main" xmlns="" w="9525">
+                <a14:hiddenLine xmlns="" xmlns:a14="http://schemas.microsoft.com/office/drawing/2010/main" w="9525">
                   <a:solidFill>
                     <a:srgbClr val="000000"/>
                   </a:solidFill>
@@ -3750,7 +3750,7 @@
             </a:ln>
             <a:extLst>
               <a:ext uri="{91240B29-F687-4f45-9708-019B960494DF}">
-                <a14:hiddenLine xmlns:a14="http://schemas.microsoft.com/office/drawing/2010/main" xmlns="" w="9525">
+                <a14:hiddenLine xmlns="" xmlns:a14="http://schemas.microsoft.com/office/drawing/2010/main" w="9525">
                   <a:solidFill>
                     <a:srgbClr val="000000"/>
                   </a:solidFill>
@@ -3840,7 +3840,7 @@
             </a:ln>
             <a:extLst>
               <a:ext uri="{91240B29-F687-4f45-9708-019B960494DF}">
-                <a14:hiddenLine xmlns:a14="http://schemas.microsoft.com/office/drawing/2010/main" xmlns="" w="9525">
+                <a14:hiddenLine xmlns="" xmlns:a14="http://schemas.microsoft.com/office/drawing/2010/main" w="9525">
                   <a:solidFill>
                     <a:srgbClr val="000000"/>
                   </a:solidFill>
@@ -3930,7 +3930,7 @@
             </a:ln>
             <a:extLst>
               <a:ext uri="{91240B29-F687-4f45-9708-019B960494DF}">
-                <a14:hiddenLine xmlns:a14="http://schemas.microsoft.com/office/drawing/2010/main" xmlns="" w="9525">
+                <a14:hiddenLine xmlns="" xmlns:a14="http://schemas.microsoft.com/office/drawing/2010/main" w="9525">
                   <a:solidFill>
                     <a:srgbClr val="000000"/>
                   </a:solidFill>
@@ -3992,7 +3992,7 @@
             </a:ln>
             <a:extLst>
               <a:ext uri="{91240B29-F687-4f45-9708-019B960494DF}">
-                <a14:hiddenLine xmlns:a14="http://schemas.microsoft.com/office/drawing/2010/main" xmlns="" w="9525">
+                <a14:hiddenLine xmlns="" xmlns:a14="http://schemas.microsoft.com/office/drawing/2010/main" w="9525">
                   <a:solidFill>
                     <a:srgbClr val="000000"/>
                   </a:solidFill>
@@ -4112,7 +4112,7 @@
             </a:ln>
             <a:extLst>
               <a:ext uri="{91240B29-F687-4f45-9708-019B960494DF}">
-                <a14:hiddenLine xmlns:a14="http://schemas.microsoft.com/office/drawing/2010/main" xmlns="" w="9525">
+                <a14:hiddenLine xmlns="" xmlns:a14="http://schemas.microsoft.com/office/drawing/2010/main" w="9525">
                   <a:solidFill>
                     <a:srgbClr val="000000"/>
                   </a:solidFill>
@@ -4180,7 +4180,7 @@
             </a:ln>
             <a:extLst>
               <a:ext uri="{91240B29-F687-4f45-9708-019B960494DF}">
-                <a14:hiddenLine xmlns:a14="http://schemas.microsoft.com/office/drawing/2010/main" xmlns="" w="9525">
+                <a14:hiddenLine xmlns="" xmlns:a14="http://schemas.microsoft.com/office/drawing/2010/main" w="9525">
                   <a:solidFill>
                     <a:srgbClr val="000000"/>
                   </a:solidFill>
@@ -4270,7 +4270,7 @@
             </a:ln>
             <a:extLst>
               <a:ext uri="{91240B29-F687-4f45-9708-019B960494DF}">
-                <a14:hiddenLine xmlns:a14="http://schemas.microsoft.com/office/drawing/2010/main" xmlns="" w="9525">
+                <a14:hiddenLine xmlns="" xmlns:a14="http://schemas.microsoft.com/office/drawing/2010/main" w="9525">
                   <a:solidFill>
                     <a:srgbClr val="000000"/>
                   </a:solidFill>
@@ -4410,7 +4410,7 @@
           <a:p>
             <a:fld id="{42A3FA0C-5CD8-4683-A8F2-458893B3FD08}" type="datetimeFigureOut">
               <a:rPr lang="ru-RU" smtClean="0"/>
-              <a:t>31.08.2026</a:t>
+              <a:t>02.09.2026</a:t>
             </a:fld>
             <a:endParaRPr lang="ru-RU"/>
           </a:p>
@@ -4677,7 +4677,7 @@
           <a:p>
             <a:fld id="{42A3FA0C-5CD8-4683-A8F2-458893B3FD08}" type="datetimeFigureOut">
               <a:rPr lang="ru-RU" smtClean="0"/>
-              <a:t>31.08.2026</a:t>
+              <a:t>02.09.2026</a:t>
             </a:fld>
             <a:endParaRPr lang="ru-RU"/>
           </a:p>
@@ -4873,7 +4873,7 @@
           <a:p>
             <a:fld id="{42A3FA0C-5CD8-4683-A8F2-458893B3FD08}" type="datetimeFigureOut">
               <a:rPr lang="ru-RU" smtClean="0"/>
-              <a:t>31.08.2026</a:t>
+              <a:t>02.09.2026</a:t>
             </a:fld>
             <a:endParaRPr lang="ru-RU"/>
           </a:p>
@@ -5136,7 +5136,7 @@
           <a:p>
             <a:fld id="{42A3FA0C-5CD8-4683-A8F2-458893B3FD08}" type="datetimeFigureOut">
               <a:rPr lang="ru-RU" smtClean="0"/>
-              <a:t>31.08.2026</a:t>
+              <a:t>02.09.2026</a:t>
             </a:fld>
             <a:endParaRPr lang="ru-RU"/>
           </a:p>
@@ -5570,7 +5570,7 @@
           <a:p>
             <a:fld id="{42A3FA0C-5CD8-4683-A8F2-458893B3FD08}" type="datetimeFigureOut">
               <a:rPr lang="ru-RU" smtClean="0"/>
-              <a:t>31.08.2026</a:t>
+              <a:t>02.09.2026</a:t>
             </a:fld>
             <a:endParaRPr lang="ru-RU"/>
           </a:p>
@@ -6116,7 +6116,7 @@
           <a:p>
             <a:fld id="{42A3FA0C-5CD8-4683-A8F2-458893B3FD08}" type="datetimeFigureOut">
               <a:rPr lang="ru-RU" smtClean="0"/>
-              <a:t>31.08.2026</a:t>
+              <a:t>02.09.2026</a:t>
             </a:fld>
             <a:endParaRPr lang="ru-RU"/>
           </a:p>
@@ -6836,7 +6836,7 @@
           <a:p>
             <a:fld id="{42A3FA0C-5CD8-4683-A8F2-458893B3FD08}" type="datetimeFigureOut">
               <a:rPr lang="ru-RU" smtClean="0"/>
-              <a:t>31.08.2026</a:t>
+              <a:t>02.09.2026</a:t>
             </a:fld>
             <a:endParaRPr lang="ru-RU"/>
           </a:p>
@@ -7006,7 +7006,7 @@
           <a:p>
             <a:fld id="{42A3FA0C-5CD8-4683-A8F2-458893B3FD08}" type="datetimeFigureOut">
               <a:rPr lang="ru-RU" smtClean="0"/>
-              <a:t>31.08.2026</a:t>
+              <a:t>02.09.2026</a:t>
             </a:fld>
             <a:endParaRPr lang="ru-RU"/>
           </a:p>
@@ -7186,7 +7186,7 @@
           <a:p>
             <a:fld id="{42A3FA0C-5CD8-4683-A8F2-458893B3FD08}" type="datetimeFigureOut">
               <a:rPr lang="ru-RU" smtClean="0"/>
-              <a:t>31.08.2026</a:t>
+              <a:t>02.09.2026</a:t>
             </a:fld>
             <a:endParaRPr lang="ru-RU"/>
           </a:p>
@@ -7356,7 +7356,7 @@
           <a:p>
             <a:fld id="{42A3FA0C-5CD8-4683-A8F2-458893B3FD08}" type="datetimeFigureOut">
               <a:rPr lang="ru-RU" smtClean="0"/>
-              <a:t>31.08.2026</a:t>
+              <a:t>02.09.2026</a:t>
             </a:fld>
             <a:endParaRPr lang="ru-RU"/>
           </a:p>
@@ -7606,7 +7606,7 @@
           <a:p>
             <a:fld id="{42A3FA0C-5CD8-4683-A8F2-458893B3FD08}" type="datetimeFigureOut">
               <a:rPr lang="ru-RU" smtClean="0"/>
-              <a:t>31.08.2026</a:t>
+              <a:t>02.09.2026</a:t>
             </a:fld>
             <a:endParaRPr lang="ru-RU"/>
           </a:p>
@@ -7838,7 +7838,7 @@
           <a:p>
             <a:fld id="{42A3FA0C-5CD8-4683-A8F2-458893B3FD08}" type="datetimeFigureOut">
               <a:rPr lang="ru-RU" smtClean="0"/>
-              <a:t>31.08.2026</a:t>
+              <a:t>02.09.2026</a:t>
             </a:fld>
             <a:endParaRPr lang="ru-RU"/>
           </a:p>
@@ -8219,7 +8219,7 @@
           <a:p>
             <a:fld id="{42A3FA0C-5CD8-4683-A8F2-458893B3FD08}" type="datetimeFigureOut">
               <a:rPr lang="ru-RU" smtClean="0"/>
-              <a:t>31.08.2026</a:t>
+              <a:t>02.09.2026</a:t>
             </a:fld>
             <a:endParaRPr lang="ru-RU"/>
           </a:p>
@@ -8337,7 +8337,7 @@
           <a:p>
             <a:fld id="{42A3FA0C-5CD8-4683-A8F2-458893B3FD08}" type="datetimeFigureOut">
               <a:rPr lang="ru-RU" smtClean="0"/>
-              <a:t>31.08.2026</a:t>
+              <a:t>02.09.2026</a:t>
             </a:fld>
             <a:endParaRPr lang="ru-RU"/>
           </a:p>
@@ -8432,7 +8432,7 @@
           <a:p>
             <a:fld id="{42A3FA0C-5CD8-4683-A8F2-458893B3FD08}" type="datetimeFigureOut">
               <a:rPr lang="ru-RU" smtClean="0"/>
-              <a:t>31.08.2026</a:t>
+              <a:t>02.09.2026</a:t>
             </a:fld>
             <a:endParaRPr lang="ru-RU"/>
           </a:p>
@@ -8681,7 +8681,7 @@
           <a:p>
             <a:fld id="{42A3FA0C-5CD8-4683-A8F2-458893B3FD08}" type="datetimeFigureOut">
               <a:rPr lang="ru-RU" smtClean="0"/>
-              <a:t>31.08.2026</a:t>
+              <a:t>02.09.2026</a:t>
             </a:fld>
             <a:endParaRPr lang="ru-RU"/>
           </a:p>
@@ -8961,7 +8961,7 @@
           <a:p>
             <a:fld id="{42A3FA0C-5CD8-4683-A8F2-458893B3FD08}" type="datetimeFigureOut">
               <a:rPr lang="ru-RU" smtClean="0"/>
-              <a:t>31.08.2026</a:t>
+              <a:t>02.09.2026</a:t>
             </a:fld>
             <a:endParaRPr lang="ru-RU"/>
           </a:p>
@@ -9084,7 +9084,7 @@
           <a:noFill/>
           <a:extLst>
             <a:ext uri="{909E8E84-426E-40dd-AFC4-6F175D3DCCD1}">
-              <a14:hiddenFill xmlns:a14="http://schemas.microsoft.com/office/drawing/2010/main" xmlns="">
+              <a14:hiddenFill xmlns="" xmlns:a14="http://schemas.microsoft.com/office/drawing/2010/main">
                 <a:solidFill>
                   <a:srgbClr val="FFFFFF"/>
                 </a:solidFill>
@@ -9158,7 +9158,7 @@
               </a:ln>
               <a:extLst>
                 <a:ext uri="{91240B29-F687-4f45-9708-019B960494DF}">
-                  <a14:hiddenLine xmlns:a14="http://schemas.microsoft.com/office/drawing/2010/main" xmlns="" w="9525">
+                  <a14:hiddenLine xmlns="" xmlns:a14="http://schemas.microsoft.com/office/drawing/2010/main" w="9525">
                     <a:solidFill>
                       <a:srgbClr val="000000"/>
                     </a:solidFill>
@@ -9248,7 +9248,7 @@
               </a:ln>
               <a:extLst>
                 <a:ext uri="{91240B29-F687-4f45-9708-019B960494DF}">
-                  <a14:hiddenLine xmlns:a14="http://schemas.microsoft.com/office/drawing/2010/main" xmlns="" w="9525">
+                  <a14:hiddenLine xmlns="" xmlns:a14="http://schemas.microsoft.com/office/drawing/2010/main" w="9525">
                     <a:solidFill>
                       <a:srgbClr val="000000"/>
                     </a:solidFill>
@@ -9338,7 +9338,7 @@
               </a:ln>
               <a:extLst>
                 <a:ext uri="{91240B29-F687-4f45-9708-019B960494DF}">
-                  <a14:hiddenLine xmlns:a14="http://schemas.microsoft.com/office/drawing/2010/main" xmlns="" w="9525">
+                  <a14:hiddenLine xmlns="" xmlns:a14="http://schemas.microsoft.com/office/drawing/2010/main" w="9525">
                     <a:solidFill>
                       <a:srgbClr val="000000"/>
                     </a:solidFill>
@@ -9400,7 +9400,7 @@
               </a:ln>
               <a:extLst>
                 <a:ext uri="{91240B29-F687-4f45-9708-019B960494DF}">
-                  <a14:hiddenLine xmlns:a14="http://schemas.microsoft.com/office/drawing/2010/main" xmlns="" w="9525">
+                  <a14:hiddenLine xmlns="" xmlns:a14="http://schemas.microsoft.com/office/drawing/2010/main" w="9525">
                     <a:solidFill>
                       <a:srgbClr val="000000"/>
                     </a:solidFill>
@@ -9490,7 +9490,7 @@
               </a:ln>
               <a:extLst>
                 <a:ext uri="{91240B29-F687-4f45-9708-019B960494DF}">
-                  <a14:hiddenLine xmlns:a14="http://schemas.microsoft.com/office/drawing/2010/main" xmlns="" w="9525">
+                  <a14:hiddenLine xmlns="" xmlns:a14="http://schemas.microsoft.com/office/drawing/2010/main" w="9525">
                     <a:solidFill>
                       <a:srgbClr val="000000"/>
                     </a:solidFill>
@@ -9552,7 +9552,7 @@
               </a:ln>
               <a:extLst>
                 <a:ext uri="{91240B29-F687-4f45-9708-019B960494DF}">
-                  <a14:hiddenLine xmlns:a14="http://schemas.microsoft.com/office/drawing/2010/main" xmlns="" w="9525">
+                  <a14:hiddenLine xmlns="" xmlns:a14="http://schemas.microsoft.com/office/drawing/2010/main" w="9525">
                     <a:solidFill>
                       <a:srgbClr val="000000"/>
                     </a:solidFill>
@@ -9614,7 +9614,7 @@
               </a:ln>
               <a:extLst>
                 <a:ext uri="{91240B29-F687-4f45-9708-019B960494DF}">
-                  <a14:hiddenLine xmlns:a14="http://schemas.microsoft.com/office/drawing/2010/main" xmlns="" w="9525">
+                  <a14:hiddenLine xmlns="" xmlns:a14="http://schemas.microsoft.com/office/drawing/2010/main" w="9525">
                     <a:solidFill>
                       <a:srgbClr val="000000"/>
                     </a:solidFill>
@@ -9704,7 +9704,7 @@
               </a:ln>
               <a:extLst>
                 <a:ext uri="{91240B29-F687-4f45-9708-019B960494DF}">
-                  <a14:hiddenLine xmlns:a14="http://schemas.microsoft.com/office/drawing/2010/main" xmlns="" w="9525">
+                  <a14:hiddenLine xmlns="" xmlns:a14="http://schemas.microsoft.com/office/drawing/2010/main" w="9525">
                     <a:solidFill>
                       <a:srgbClr val="000000"/>
                     </a:solidFill>
@@ -9794,7 +9794,7 @@
               </a:ln>
               <a:extLst>
                 <a:ext uri="{91240B29-F687-4f45-9708-019B960494DF}">
-                  <a14:hiddenLine xmlns:a14="http://schemas.microsoft.com/office/drawing/2010/main" xmlns="" w="9525">
+                  <a14:hiddenLine xmlns="" xmlns:a14="http://schemas.microsoft.com/office/drawing/2010/main" w="9525">
                     <a:solidFill>
                       <a:srgbClr val="000000"/>
                     </a:solidFill>
@@ -9856,7 +9856,7 @@
               </a:ln>
               <a:extLst>
                 <a:ext uri="{91240B29-F687-4f45-9708-019B960494DF}">
-                  <a14:hiddenLine xmlns:a14="http://schemas.microsoft.com/office/drawing/2010/main" xmlns="" w="9525">
+                  <a14:hiddenLine xmlns="" xmlns:a14="http://schemas.microsoft.com/office/drawing/2010/main" w="9525">
                     <a:solidFill>
                       <a:srgbClr val="000000"/>
                     </a:solidFill>
@@ -9966,7 +9966,7 @@
               </a:ln>
               <a:extLst>
                 <a:ext uri="{91240B29-F687-4f45-9708-019B960494DF}">
-                  <a14:hiddenLine xmlns:a14="http://schemas.microsoft.com/office/drawing/2010/main" xmlns="" w="9525">
+                  <a14:hiddenLine xmlns="" xmlns:a14="http://schemas.microsoft.com/office/drawing/2010/main" w="9525">
                     <a:solidFill>
                       <a:srgbClr val="000000"/>
                     </a:solidFill>
@@ -10050,7 +10050,7 @@
               </a:ln>
               <a:extLst>
                 <a:ext uri="{91240B29-F687-4f45-9708-019B960494DF}">
-                  <a14:hiddenLine xmlns:a14="http://schemas.microsoft.com/office/drawing/2010/main" xmlns="" w="9525">
+                  <a14:hiddenLine xmlns="" xmlns:a14="http://schemas.microsoft.com/office/drawing/2010/main" w="9525">
                     <a:solidFill>
                       <a:srgbClr val="000000"/>
                     </a:solidFill>
@@ -10112,7 +10112,7 @@
               </a:ln>
               <a:extLst>
                 <a:ext uri="{91240B29-F687-4f45-9708-019B960494DF}">
-                  <a14:hiddenLine xmlns:a14="http://schemas.microsoft.com/office/drawing/2010/main" xmlns="" w="9525">
+                  <a14:hiddenLine xmlns="" xmlns:a14="http://schemas.microsoft.com/office/drawing/2010/main" w="9525">
                     <a:solidFill>
                       <a:srgbClr val="000000"/>
                     </a:solidFill>
@@ -10174,7 +10174,7 @@
               </a:ln>
               <a:extLst>
                 <a:ext uri="{91240B29-F687-4f45-9708-019B960494DF}">
-                  <a14:hiddenLine xmlns:a14="http://schemas.microsoft.com/office/drawing/2010/main" xmlns="" w="9525">
+                  <a14:hiddenLine xmlns="" xmlns:a14="http://schemas.microsoft.com/office/drawing/2010/main" w="9525">
                     <a:solidFill>
                       <a:srgbClr val="000000"/>
                     </a:solidFill>
@@ -10264,7 +10264,7 @@
               </a:ln>
               <a:extLst>
                 <a:ext uri="{91240B29-F687-4f45-9708-019B960494DF}">
-                  <a14:hiddenLine xmlns:a14="http://schemas.microsoft.com/office/drawing/2010/main" xmlns="" w="9525">
+                  <a14:hiddenLine xmlns="" xmlns:a14="http://schemas.microsoft.com/office/drawing/2010/main" w="9525">
                     <a:solidFill>
                       <a:srgbClr val="000000"/>
                     </a:solidFill>
@@ -10298,7 +10298,7 @@
               </a:ln>
               <a:extLst>
                 <a:ext uri="{91240B29-F687-4f45-9708-019B960494DF}">
-                  <a14:hiddenLine xmlns:a14="http://schemas.microsoft.com/office/drawing/2010/main" xmlns="" w="9525">
+                  <a14:hiddenLine xmlns="" xmlns:a14="http://schemas.microsoft.com/office/drawing/2010/main" w="9525">
                     <a:solidFill>
                       <a:srgbClr val="000000"/>
                     </a:solidFill>
@@ -10363,7 +10363,7 @@
               </a:ln>
               <a:extLst>
                 <a:ext uri="{91240B29-F687-4f45-9708-019B960494DF}">
-                  <a14:hiddenLine xmlns:a14="http://schemas.microsoft.com/office/drawing/2010/main" xmlns="" w="9525">
+                  <a14:hiddenLine xmlns="" xmlns:a14="http://schemas.microsoft.com/office/drawing/2010/main" w="9525">
                     <a:solidFill>
                       <a:srgbClr val="000000"/>
                     </a:solidFill>
@@ -10453,7 +10453,7 @@
               </a:ln>
               <a:extLst>
                 <a:ext uri="{91240B29-F687-4f45-9708-019B960494DF}">
-                  <a14:hiddenLine xmlns:a14="http://schemas.microsoft.com/office/drawing/2010/main" xmlns="" w="9525">
+                  <a14:hiddenLine xmlns="" xmlns:a14="http://schemas.microsoft.com/office/drawing/2010/main" w="9525">
                     <a:solidFill>
                       <a:srgbClr val="000000"/>
                     </a:solidFill>
@@ -10515,7 +10515,7 @@
               </a:ln>
               <a:extLst>
                 <a:ext uri="{91240B29-F687-4f45-9708-019B960494DF}">
-                  <a14:hiddenLine xmlns:a14="http://schemas.microsoft.com/office/drawing/2010/main" xmlns="" w="9525">
+                  <a14:hiddenLine xmlns="" xmlns:a14="http://schemas.microsoft.com/office/drawing/2010/main" w="9525">
                     <a:solidFill>
                       <a:srgbClr val="000000"/>
                     </a:solidFill>
@@ -10605,7 +10605,7 @@
               </a:ln>
               <a:extLst>
                 <a:ext uri="{91240B29-F687-4f45-9708-019B960494DF}">
-                  <a14:hiddenLine xmlns:a14="http://schemas.microsoft.com/office/drawing/2010/main" xmlns="" w="9525">
+                  <a14:hiddenLine xmlns="" xmlns:a14="http://schemas.microsoft.com/office/drawing/2010/main" w="9525">
                     <a:solidFill>
                       <a:srgbClr val="000000"/>
                     </a:solidFill>
@@ -10670,7 +10670,7 @@
               </a:ln>
               <a:extLst>
                 <a:ext uri="{91240B29-F687-4f45-9708-019B960494DF}">
-                  <a14:hiddenLine xmlns:a14="http://schemas.microsoft.com/office/drawing/2010/main" xmlns="" w="9525">
+                  <a14:hiddenLine xmlns="" xmlns:a14="http://schemas.microsoft.com/office/drawing/2010/main" w="9525">
                     <a:solidFill>
                       <a:srgbClr val="000000"/>
                     </a:solidFill>
@@ -10732,7 +10732,7 @@
               </a:ln>
               <a:extLst>
                 <a:ext uri="{91240B29-F687-4f45-9708-019B960494DF}">
-                  <a14:hiddenLine xmlns:a14="http://schemas.microsoft.com/office/drawing/2010/main" xmlns="" w="9525">
+                  <a14:hiddenLine xmlns="" xmlns:a14="http://schemas.microsoft.com/office/drawing/2010/main" w="9525">
                     <a:solidFill>
                       <a:srgbClr val="000000"/>
                     </a:solidFill>
@@ -10822,7 +10822,7 @@
               </a:ln>
               <a:extLst>
                 <a:ext uri="{91240B29-F687-4f45-9708-019B960494DF}">
-                  <a14:hiddenLine xmlns:a14="http://schemas.microsoft.com/office/drawing/2010/main" xmlns="" w="9525">
+                  <a14:hiddenLine xmlns="" xmlns:a14="http://schemas.microsoft.com/office/drawing/2010/main" w="9525">
                     <a:solidFill>
                       <a:srgbClr val="000000"/>
                     </a:solidFill>
@@ -10912,7 +10912,7 @@
               </a:ln>
               <a:extLst>
                 <a:ext uri="{91240B29-F687-4f45-9708-019B960494DF}">
-                  <a14:hiddenLine xmlns:a14="http://schemas.microsoft.com/office/drawing/2010/main" xmlns="" w="9525">
+                  <a14:hiddenLine xmlns="" xmlns:a14="http://schemas.microsoft.com/office/drawing/2010/main" w="9525">
                     <a:solidFill>
                       <a:srgbClr val="000000"/>
                     </a:solidFill>
@@ -10977,7 +10977,7 @@
               </a:ln>
               <a:extLst>
                 <a:ext uri="{91240B29-F687-4f45-9708-019B960494DF}">
-                  <a14:hiddenLine xmlns:a14="http://schemas.microsoft.com/office/drawing/2010/main" xmlns="" w="9525">
+                  <a14:hiddenLine xmlns="" xmlns:a14="http://schemas.microsoft.com/office/drawing/2010/main" w="9525">
                     <a:solidFill>
                       <a:srgbClr val="000000"/>
                     </a:solidFill>
@@ -11097,7 +11097,7 @@
               </a:ln>
               <a:extLst>
                 <a:ext uri="{91240B29-F687-4f45-9708-019B960494DF}">
-                  <a14:hiddenLine xmlns:a14="http://schemas.microsoft.com/office/drawing/2010/main" xmlns="" w="9525">
+                  <a14:hiddenLine xmlns="" xmlns:a14="http://schemas.microsoft.com/office/drawing/2010/main" w="9525">
                     <a:solidFill>
                       <a:srgbClr val="000000"/>
                     </a:solidFill>
@@ -11178,7 +11178,7 @@
               </a:ln>
               <a:extLst>
                 <a:ext uri="{91240B29-F687-4f45-9708-019B960494DF}">
-                  <a14:hiddenLine xmlns:a14="http://schemas.microsoft.com/office/drawing/2010/main" xmlns="" w="9525">
+                  <a14:hiddenLine xmlns="" xmlns:a14="http://schemas.microsoft.com/office/drawing/2010/main" w="9525">
                     <a:solidFill>
                       <a:srgbClr val="000000"/>
                     </a:solidFill>
@@ -11293,7 +11293,7 @@
               </a:ln>
               <a:extLst>
                 <a:ext uri="{91240B29-F687-4f45-9708-019B960494DF}">
-                  <a14:hiddenLine xmlns:a14="http://schemas.microsoft.com/office/drawing/2010/main" xmlns="" w="9525">
+                  <a14:hiddenLine xmlns="" xmlns:a14="http://schemas.microsoft.com/office/drawing/2010/main" w="9525">
                     <a:solidFill>
                       <a:srgbClr val="000000"/>
                     </a:solidFill>
@@ -11383,7 +11383,7 @@
               </a:ln>
               <a:extLst>
                 <a:ext uri="{91240B29-F687-4f45-9708-019B960494DF}">
-                  <a14:hiddenLine xmlns:a14="http://schemas.microsoft.com/office/drawing/2010/main" xmlns="" w="9525">
+                  <a14:hiddenLine xmlns="" xmlns:a14="http://schemas.microsoft.com/office/drawing/2010/main" w="9525">
                     <a:solidFill>
                       <a:srgbClr val="000000"/>
                     </a:solidFill>
@@ -11448,7 +11448,7 @@
               </a:ln>
               <a:extLst>
                 <a:ext uri="{91240B29-F687-4f45-9708-019B960494DF}">
-                  <a14:hiddenLine xmlns:a14="http://schemas.microsoft.com/office/drawing/2010/main" xmlns="" w="9525">
+                  <a14:hiddenLine xmlns="" xmlns:a14="http://schemas.microsoft.com/office/drawing/2010/main" w="9525">
                     <a:solidFill>
                       <a:srgbClr val="000000"/>
                     </a:solidFill>
@@ -11538,7 +11538,7 @@
               </a:ln>
               <a:extLst>
                 <a:ext uri="{91240B29-F687-4f45-9708-019B960494DF}">
-                  <a14:hiddenLine xmlns:a14="http://schemas.microsoft.com/office/drawing/2010/main" xmlns="" w="9525">
+                  <a14:hiddenLine xmlns="" xmlns:a14="http://schemas.microsoft.com/office/drawing/2010/main" w="9525">
                     <a:solidFill>
                       <a:srgbClr val="000000"/>
                     </a:solidFill>
@@ -11606,7 +11606,7 @@
               </a:ln>
               <a:extLst>
                 <a:ext uri="{91240B29-F687-4f45-9708-019B960494DF}">
-                  <a14:hiddenLine xmlns:a14="http://schemas.microsoft.com/office/drawing/2010/main" xmlns="" w="9525">
+                  <a14:hiddenLine xmlns="" xmlns:a14="http://schemas.microsoft.com/office/drawing/2010/main" w="9525">
                     <a:solidFill>
                       <a:srgbClr val="000000"/>
                     </a:solidFill>
@@ -11696,7 +11696,7 @@
               </a:ln>
               <a:extLst>
                 <a:ext uri="{91240B29-F687-4f45-9708-019B960494DF}">
-                  <a14:hiddenLine xmlns:a14="http://schemas.microsoft.com/office/drawing/2010/main" xmlns="" w="9525">
+                  <a14:hiddenLine xmlns="" xmlns:a14="http://schemas.microsoft.com/office/drawing/2010/main" w="9525">
                     <a:solidFill>
                       <a:srgbClr val="000000"/>
                     </a:solidFill>
@@ -11764,7 +11764,7 @@
               </a:ln>
               <a:extLst>
                 <a:ext uri="{91240B29-F687-4f45-9708-019B960494DF}">
-                  <a14:hiddenLine xmlns:a14="http://schemas.microsoft.com/office/drawing/2010/main" xmlns="" w="9525">
+                  <a14:hiddenLine xmlns="" xmlns:a14="http://schemas.microsoft.com/office/drawing/2010/main" w="9525">
                     <a:solidFill>
                       <a:srgbClr val="000000"/>
                     </a:solidFill>
@@ -11854,7 +11854,7 @@
               </a:ln>
               <a:extLst>
                 <a:ext uri="{91240B29-F687-4f45-9708-019B960494DF}">
-                  <a14:hiddenLine xmlns:a14="http://schemas.microsoft.com/office/drawing/2010/main" xmlns="" w="9525">
+                  <a14:hiddenLine xmlns="" xmlns:a14="http://schemas.microsoft.com/office/drawing/2010/main" w="9525">
                     <a:solidFill>
                       <a:srgbClr val="000000"/>
                     </a:solidFill>
@@ -11888,7 +11888,7 @@
               </a:ln>
               <a:extLst>
                 <a:ext uri="{91240B29-F687-4f45-9708-019B960494DF}">
-                  <a14:hiddenLine xmlns:a14="http://schemas.microsoft.com/office/drawing/2010/main" xmlns="" w="9525">
+                  <a14:hiddenLine xmlns="" xmlns:a14="http://schemas.microsoft.com/office/drawing/2010/main" w="9525">
                     <a:solidFill>
                       <a:srgbClr val="000000"/>
                     </a:solidFill>
@@ -12028,7 +12028,7 @@
           <a:p>
             <a:fld id="{42A3FA0C-5CD8-4683-A8F2-458893B3FD08}" type="datetimeFigureOut">
               <a:rPr lang="ru-RU" smtClean="0"/>
-              <a:t>31.08.2026</a:t>
+              <a:t>02.09.2026</a:t>
             </a:fld>
             <a:endParaRPr lang="ru-RU"/>
           </a:p>
@@ -14019,8 +14019,8 @@
         </p:blipFill>
         <p:spPr>
           <a:xfrm>
-            <a:off x="1963535" y="2249488"/>
-            <a:ext cx="3234142" cy="3541712"/>
+            <a:off x="1257301" y="1622076"/>
+            <a:ext cx="4379992" cy="4796533"/>
           </a:xfrm>
           <a:prstGeom prst="rect">
             <a:avLst/>
@@ -14268,7 +14268,12 @@
             <p:ph type="title"/>
           </p:nvPr>
         </p:nvSpPr>
-        <p:spPr/>
+        <p:spPr>
+          <a:xfrm>
+            <a:off x="1097452" y="222864"/>
+            <a:ext cx="9905998" cy="1478570"/>
+          </a:xfrm>
+        </p:spPr>
         <p:txBody>
           <a:bodyPr/>
           <a:lstStyle/>
@@ -14294,9 +14299,16 @@
             <p:ph idx="1"/>
           </p:nvPr>
         </p:nvSpPr>
-        <p:spPr/>
+        <p:spPr>
+          <a:xfrm>
+            <a:off x="443889" y="1369036"/>
+            <a:ext cx="11748111" cy="1857741"/>
+          </a:xfrm>
+        </p:spPr>
         <p:txBody>
-          <a:bodyPr/>
+          <a:bodyPr>
+            <a:normAutofit fontScale="92500" lnSpcReduction="10000"/>
+          </a:bodyPr>
           <a:lstStyle/>
           <a:p>
             <a:r>
@@ -14314,25 +14326,34 @@
           </a:p>
           <a:p>
             <a:r>
-              <a:rPr lang="ru-RU" b="1" dirty="0" err="1"/>
-              <a:t>Switch</a:t>
+              <a:rPr lang="ru-RU" b="1" dirty="0" err="1" smtClean="0"/>
+              <a:t>Bridge</a:t>
+            </a:r>
+            <a:r>
+              <a:rPr lang="ru-RU" b="1" dirty="0" smtClean="0"/>
+              <a:t> </a:t>
             </a:r>
             <a:r>
               <a:rPr lang="ru-RU" b="1" dirty="0"/>
-              <a:t> / </a:t>
-            </a:r>
-            <a:r>
-              <a:rPr lang="ru-RU" b="1" dirty="0" err="1"/>
-              <a:t>Bridge</a:t>
-            </a:r>
-            <a:r>
-              <a:rPr lang="ru-RU" b="1" dirty="0"/>
-              <a:t> (L2):</a:t>
+              <a:t>(L2):</a:t>
             </a:r>
             <a:r>
               <a:rPr lang="ru-RU" dirty="0"/>
-              <a:t> Принимает кадр целиком, проверяет контрольную сумму (FCS), принимает решение о пересылке по MAC-адресу.</a:t>
-            </a:r>
+              <a:t> Принимает кадр целиком, проверяет контрольную сумму (FCS</a:t>
+            </a:r>
+            <a:r>
+              <a:rPr lang="ru-RU" dirty="0" smtClean="0"/>
+              <a:t>),</a:t>
+            </a:r>
+            <a:r>
+              <a:rPr lang="en-US" dirty="0" smtClean="0"/>
+              <a:t> </a:t>
+            </a:r>
+            <a:r>
+              <a:rPr lang="ru-RU" dirty="0" smtClean="0"/>
+              <a:t>пересылает на другой порт.</a:t>
+            </a:r>
+            <a:endParaRPr lang="ru-RU" dirty="0"/>
           </a:p>
           <a:p>
             <a:r>
@@ -14349,6 +14370,47 @@
           </a:p>
         </p:txBody>
       </p:sp>
+      <p:pic>
+        <p:nvPicPr>
+          <p:cNvPr id="1028" name="Picture 4" descr="Network bridge explained - Study CCNA"/>
+          <p:cNvPicPr>
+            <a:picLocks noChangeAspect="1" noChangeArrowheads="1"/>
+          </p:cNvPicPr>
+          <p:nvPr/>
+        </p:nvPicPr>
+        <p:blipFill>
+          <a:blip r:embed="rId2">
+            <a:extLst>
+              <a:ext uri="{28A0092B-C50C-407E-A947-70E740481C1C}">
+                <a14:useLocalDpi xmlns:a14="http://schemas.microsoft.com/office/drawing/2010/main" val="0"/>
+              </a:ext>
+            </a:extLst>
+          </a:blip>
+          <a:srcRect/>
+          <a:stretch>
+            <a:fillRect/>
+          </a:stretch>
+        </p:blipFill>
+        <p:spPr bwMode="auto">
+          <a:xfrm>
+            <a:off x="2298516" y="3226777"/>
+            <a:ext cx="8038855" cy="3387804"/>
+          </a:xfrm>
+          <a:prstGeom prst="rect">
+            <a:avLst/>
+          </a:prstGeom>
+          <a:noFill/>
+          <a:extLst>
+            <a:ext uri="{909E8E84-426E-40DD-AFC4-6F175D3DCCD1}">
+              <a14:hiddenFill xmlns:a14="http://schemas.microsoft.com/office/drawing/2010/main">
+                <a:solidFill>
+                  <a:srgbClr val="FFFFFF"/>
+                </a:solidFill>
+              </a14:hiddenFill>
+            </a:ext>
+          </a:extLst>
+        </p:spPr>
+      </p:pic>
     </p:spTree>
     <p:extLst>
       <p:ext uri="{BB962C8B-B14F-4D97-AF65-F5344CB8AC3E}">
@@ -14388,7 +14450,60 @@
       </p:grpSpPr>
       <p:sp>
         <p:nvSpPr>
-          <p:cNvPr id="3" name="Объект 2"/>
+          <p:cNvPr id="2" name="Заголовок 1"/>
+          <p:cNvSpPr>
+            <a:spLocks noGrp="1"/>
+          </p:cNvSpPr>
+          <p:nvPr>
+            <p:ph type="title"/>
+          </p:nvPr>
+        </p:nvSpPr>
+        <p:spPr>
+          <a:xfrm>
+            <a:off x="1141413" y="618518"/>
+            <a:ext cx="9905998" cy="981682"/>
+          </a:xfrm>
+        </p:spPr>
+        <p:txBody>
+          <a:bodyPr>
+            <a:normAutofit/>
+          </a:bodyPr>
+          <a:lstStyle/>
+          <a:p>
+            <a:r>
+              <a:rPr lang="ru-RU" b="1" dirty="0"/>
+              <a:t>Обучающийся мост</a:t>
+            </a:r>
+          </a:p>
+        </p:txBody>
+      </p:sp>
+      <p:pic>
+        <p:nvPicPr>
+          <p:cNvPr id="5" name="Рисунок 4"/>
+          <p:cNvPicPr>
+            <a:picLocks noChangeAspect="1"/>
+          </p:cNvPicPr>
+          <p:nvPr/>
+        </p:nvPicPr>
+        <p:blipFill>
+          <a:blip r:embed="rId2"/>
+          <a:stretch>
+            <a:fillRect/>
+          </a:stretch>
+        </p:blipFill>
+        <p:spPr>
+          <a:xfrm>
+            <a:off x="252047" y="2705894"/>
+            <a:ext cx="4444093" cy="2628900"/>
+          </a:xfrm>
+          <a:prstGeom prst="rect">
+            <a:avLst/>
+          </a:prstGeom>
+        </p:spPr>
+      </p:pic>
+      <p:sp>
+        <p:nvSpPr>
+          <p:cNvPr id="6" name="Объект 5"/>
           <p:cNvSpPr>
             <a:spLocks noGrp="1"/>
           </p:cNvSpPr>
@@ -14398,31 +14513,137 @@
         </p:nvSpPr>
         <p:spPr>
           <a:xfrm>
-            <a:off x="1141412" y="798756"/>
-            <a:ext cx="9905999" cy="5575667"/>
+            <a:off x="5011615" y="1600200"/>
+            <a:ext cx="6840416" cy="4985238"/>
           </a:xfrm>
         </p:spPr>
         <p:txBody>
           <a:bodyPr>
-            <a:normAutofit lnSpcReduction="10000"/>
+            <a:normAutofit fontScale="85000" lnSpcReduction="10000"/>
           </a:bodyPr>
           <a:lstStyle/>
           <a:p>
             <a:r>
               <a:rPr lang="ru-RU" b="1" dirty="0"/>
-              <a:t>Коммутатор (</a:t>
+              <a:t>Анализ </a:t>
             </a:r>
             <a:r>
               <a:rPr lang="ru-RU" b="1" dirty="0" err="1"/>
-              <a:t>Switch</a:t>
+              <a:t>Source</a:t>
             </a:r>
             <a:r>
               <a:rPr lang="ru-RU" b="1" dirty="0"/>
-              <a:t> / </a:t>
+              <a:t> MAC:</a:t>
+            </a:r>
+            <a:r>
+              <a:rPr lang="ru-RU" dirty="0"/>
+              <a:t> При получении кадра коммутатор считывает адрес источника и сопоставляет его с входящим портом в таблице MAC-адресов (CAM-таблице).</a:t>
+            </a:r>
+          </a:p>
+          <a:p>
+            <a:r>
+              <a:rPr lang="ru-RU" b="1" dirty="0"/>
+              <a:t>Принятие решения по </a:t>
             </a:r>
             <a:r>
               <a:rPr lang="ru-RU" b="1" dirty="0" err="1"/>
-              <a:t>Bridge</a:t>
+              <a:t>Destination</a:t>
+            </a:r>
+            <a:r>
+              <a:rPr lang="ru-RU" b="1" dirty="0"/>
+              <a:t> MAC:</a:t>
+            </a:r>
+            <a:endParaRPr lang="ru-RU" dirty="0"/>
+          </a:p>
+          <a:p>
+            <a:pPr lvl="1"/>
+            <a:r>
+              <a:rPr lang="ru-RU" i="1" dirty="0"/>
+              <a:t>MAC известен и находится на том же порту:</a:t>
+            </a:r>
+            <a:r>
+              <a:rPr lang="ru-RU" dirty="0"/>
+              <a:t> кадр фильтруется (сбрасывается).</a:t>
+            </a:r>
+          </a:p>
+          <a:p>
+            <a:pPr lvl="1"/>
+            <a:r>
+              <a:rPr lang="ru-RU" i="1" dirty="0"/>
+              <a:t>MAC известен и находится на другом порту:</a:t>
+            </a:r>
+            <a:r>
+              <a:rPr lang="ru-RU" dirty="0"/>
+              <a:t> кадр отправляется строго в этот порт (</a:t>
+            </a:r>
+            <a:r>
+              <a:rPr lang="ru-RU" dirty="0" err="1"/>
+              <a:t>Forwarding</a:t>
+            </a:r>
+            <a:r>
+              <a:rPr lang="ru-RU" dirty="0"/>
+              <a:t>).</a:t>
+            </a:r>
+          </a:p>
+          <a:p>
+            <a:pPr lvl="1"/>
+            <a:r>
+              <a:rPr lang="ru-RU" i="1" dirty="0"/>
+              <a:t>MAC неизвестен (</a:t>
+            </a:r>
+            <a:r>
+              <a:rPr lang="ru-RU" i="1" dirty="0" err="1"/>
+              <a:t>Unknown</a:t>
+            </a:r>
+            <a:r>
+              <a:rPr lang="ru-RU" i="1" dirty="0"/>
+              <a:t> </a:t>
+            </a:r>
+            <a:r>
+              <a:rPr lang="ru-RU" i="1" dirty="0" err="1"/>
+              <a:t>Unicast</a:t>
+            </a:r>
+            <a:r>
+              <a:rPr lang="ru-RU" i="1" dirty="0"/>
+              <a:t>) или </a:t>
+            </a:r>
+            <a:r>
+              <a:rPr lang="ru-RU" i="1" dirty="0" err="1"/>
+              <a:t>Broadcast</a:t>
+            </a:r>
+            <a:r>
+              <a:rPr lang="ru-RU" i="1" dirty="0"/>
+              <a:t>:</a:t>
+            </a:r>
+            <a:r>
+              <a:rPr lang="ru-RU" dirty="0"/>
+              <a:t> кадр рассылается во все порты, кроме входящего (</a:t>
+            </a:r>
+            <a:r>
+              <a:rPr lang="ru-RU" dirty="0" err="1"/>
+              <a:t>Flooding</a:t>
+            </a:r>
+            <a:r>
+              <a:rPr lang="ru-RU" dirty="0"/>
+              <a:t>).</a:t>
+            </a:r>
+          </a:p>
+          <a:p>
+            <a:r>
+              <a:rPr lang="ru-RU" b="1" dirty="0"/>
+              <a:t>Старение записей (</a:t>
+            </a:r>
+            <a:r>
+              <a:rPr lang="ru-RU" b="1" dirty="0" err="1"/>
+              <a:t>Aging</a:t>
+            </a:r>
+            <a:r>
+              <a:rPr lang="ru-RU" b="1" dirty="0"/>
+              <a:t> </a:t>
+            </a:r>
+            <a:r>
+              <a:rPr lang="ru-RU" b="1" dirty="0" err="1"/>
+              <a:t>Time</a:t>
             </a:r>
             <a:r>
               <a:rPr lang="ru-RU" b="1" dirty="0"/>
@@ -14430,148 +14651,7 @@
             </a:r>
             <a:r>
               <a:rPr lang="ru-RU" dirty="0"/>
-              <a:t> Устройство уровня L2 OSI. В отличие от концентратора (</a:t>
-            </a:r>
-            <a:r>
-              <a:rPr lang="ru-RU" dirty="0" err="1"/>
-              <a:t>Hub</a:t>
-            </a:r>
-            <a:r>
-              <a:rPr lang="ru-RU" dirty="0"/>
-              <a:t>, L1), коммутатор анализирует кадры, изолирует коллизии и направляет трафик адресно</a:t>
-            </a:r>
-            <a:r>
-              <a:rPr lang="ru-RU" dirty="0" smtClean="0"/>
-              <a:t>.</a:t>
-            </a:r>
-            <a:endParaRPr lang="en-US" dirty="0" smtClean="0"/>
-          </a:p>
-          <a:p>
-            <a:r>
-              <a:rPr lang="ru-RU" b="1" dirty="0"/>
-              <a:t>Домен коллизий (</a:t>
-            </a:r>
-            <a:r>
-              <a:rPr lang="ru-RU" b="1" dirty="0" err="1"/>
-              <a:t>Collision</a:t>
-            </a:r>
-            <a:r>
-              <a:rPr lang="ru-RU" b="1" dirty="0"/>
-              <a:t> </a:t>
-            </a:r>
-            <a:r>
-              <a:rPr lang="ru-RU" b="1" dirty="0" err="1"/>
-              <a:t>Domain</a:t>
-            </a:r>
-            <a:r>
-              <a:rPr lang="ru-RU" b="1" dirty="0"/>
-              <a:t>):</a:t>
-            </a:r>
-            <a:r>
-              <a:rPr lang="ru-RU" dirty="0"/>
-              <a:t> Логическая или физическая часть сети, где кадры могут сталкиваться при одновременной передаче</a:t>
-            </a:r>
-            <a:r>
-              <a:rPr lang="ru-RU" dirty="0" smtClean="0"/>
-              <a:t>.</a:t>
-            </a:r>
-            <a:endParaRPr lang="en-US" dirty="0" smtClean="0"/>
-          </a:p>
-          <a:p>
-            <a:pPr lvl="1"/>
-            <a:r>
-              <a:rPr lang="ru-RU" dirty="0"/>
-              <a:t>Концентратор (</a:t>
-            </a:r>
-            <a:r>
-              <a:rPr lang="ru-RU" dirty="0" err="1"/>
-              <a:t>Hub</a:t>
-            </a:r>
-            <a:r>
-              <a:rPr lang="ru-RU" dirty="0"/>
-              <a:t>) объединяет устройства в один домен коллизий.</a:t>
-            </a:r>
-          </a:p>
-          <a:p>
-            <a:pPr lvl="1"/>
-            <a:r>
-              <a:rPr lang="ru-RU" dirty="0"/>
-              <a:t>Коммутатор (</a:t>
-            </a:r>
-            <a:r>
-              <a:rPr lang="ru-RU" dirty="0" err="1"/>
-              <a:t>Switch</a:t>
-            </a:r>
-            <a:r>
-              <a:rPr lang="ru-RU" dirty="0"/>
-              <a:t>) делит сеть на отдельные домены коллизий (каждый порт = отдельный домен).</a:t>
-            </a:r>
-            <a:endParaRPr lang="en-US" dirty="0" smtClean="0"/>
-          </a:p>
-          <a:p>
-            <a:r>
-              <a:rPr lang="ru-RU" b="1" dirty="0"/>
-              <a:t>Широковещательный домен (</a:t>
-            </a:r>
-            <a:r>
-              <a:rPr lang="ru-RU" b="1" dirty="0" err="1"/>
-              <a:t>Broadcast</a:t>
-            </a:r>
-            <a:r>
-              <a:rPr lang="ru-RU" b="1" dirty="0"/>
-              <a:t> </a:t>
-            </a:r>
-            <a:r>
-              <a:rPr lang="ru-RU" b="1" dirty="0" err="1"/>
-              <a:t>Domain</a:t>
-            </a:r>
-            <a:r>
-              <a:rPr lang="ru-RU" b="1" dirty="0"/>
-              <a:t>):</a:t>
-            </a:r>
-            <a:r>
-              <a:rPr lang="ru-RU" dirty="0"/>
-              <a:t> Область сети, в пределах которой широковещательный </a:t>
-            </a:r>
-            <a:r>
-              <a:rPr lang="ru-RU" dirty="0" smtClean="0"/>
-              <a:t>кадр</a:t>
-            </a:r>
-            <a:r>
-              <a:rPr lang="en-US" dirty="0" smtClean="0"/>
-              <a:t> </a:t>
-            </a:r>
-            <a:r>
-              <a:rPr lang="ru-RU" dirty="0"/>
-              <a:t>(</a:t>
-            </a:r>
-            <a:r>
-              <a:rPr lang="ru-RU" dirty="0" err="1"/>
-              <a:t>Dst</a:t>
-            </a:r>
-            <a:r>
-              <a:rPr lang="ru-RU" dirty="0"/>
-              <a:t> MAC: FF:FF:FF:FF:FF:FF) доставляется всем узлам</a:t>
-            </a:r>
-            <a:r>
-              <a:rPr lang="ru-RU" dirty="0" smtClean="0"/>
-              <a:t>.</a:t>
-            </a:r>
-            <a:endParaRPr lang="en-US" dirty="0" smtClean="0"/>
-          </a:p>
-          <a:p>
-            <a:pPr lvl="1"/>
-            <a:r>
-              <a:rPr lang="ru-RU" dirty="0"/>
-              <a:t>Коммутаторы L2 не разделяют широковещательные домены (пересылают </a:t>
-            </a:r>
-            <a:r>
-              <a:rPr lang="ru-RU" dirty="0" err="1"/>
-              <a:t>Broadcast</a:t>
-            </a:r>
-            <a:r>
-              <a:rPr lang="ru-RU" dirty="0"/>
-              <a:t> во все порты, кроме порта-источника).</a:t>
+              <a:t> Каждая запись в таблице снабжена таймером; при отсутствии трафика от узла запись удаляется для корректной обработки миграции устройств.</a:t>
             </a:r>
           </a:p>
           <a:p>
@@ -14582,7 +14662,7 @@
     </p:spTree>
     <p:extLst>
       <p:ext uri="{BB962C8B-B14F-4D97-AF65-F5344CB8AC3E}">
-        <p14:creationId xmlns:p14="http://schemas.microsoft.com/office/powerpoint/2010/main" val="399563517"/>
+        <p14:creationId xmlns:p14="http://schemas.microsoft.com/office/powerpoint/2010/main" val="4245425795"/>
       </p:ext>
     </p:extLst>
   </p:cSld>
@@ -14635,11 +14715,41 @@
           <a:p>
             <a:r>
               <a:rPr lang="ru-RU" b="1" dirty="0"/>
-              <a:t>Алгоритм работы коммутатора (</a:t>
-            </a:r>
+              <a:t>Домены коллизий и широковещательные </a:t>
+            </a:r>
+            <a:r>
+              <a:rPr lang="ru-RU" b="1" dirty="0" smtClean="0"/>
+              <a:t>домены</a:t>
+            </a:r>
+            <a:endParaRPr lang="ru-RU" dirty="0"/>
+          </a:p>
+        </p:txBody>
+      </p:sp>
+      <p:sp>
+        <p:nvSpPr>
+          <p:cNvPr id="3" name="Объект 2"/>
+          <p:cNvSpPr>
+            <a:spLocks noGrp="1"/>
+          </p:cNvSpPr>
+          <p:nvPr>
+            <p:ph idx="1"/>
+          </p:nvPr>
+        </p:nvSpPr>
+        <p:spPr>
+          <a:xfrm>
+            <a:off x="1141412" y="2187644"/>
+            <a:ext cx="6732587" cy="4302056"/>
+          </a:xfrm>
+        </p:spPr>
+        <p:txBody>
+          <a:bodyPr>
+            <a:normAutofit fontScale="92500"/>
+          </a:bodyPr>
+          <a:lstStyle/>
+          <a:p>
             <a:r>
               <a:rPr lang="ru-RU" b="1" dirty="0" err="1"/>
-              <a:t>Learning</a:t>
+              <a:t>Collision</a:t>
             </a:r>
             <a:r>
               <a:rPr lang="ru-RU" b="1" dirty="0"/>
@@ -14647,19 +14757,93 @@
             </a:r>
             <a:r>
               <a:rPr lang="ru-RU" b="1" dirty="0" err="1"/>
-              <a:t>Process</a:t>
-            </a:r>
-            <a:r>
-              <a:rPr lang="ru-RU" b="1" dirty="0" smtClean="0"/>
-              <a:t>)</a:t>
-            </a:r>
+              <a:t>Domain</a:t>
+            </a:r>
+            <a:r>
+              <a:rPr lang="ru-RU" b="1" dirty="0"/>
+              <a:t> (Домен коллизий):</a:t>
+            </a:r>
+            <a:endParaRPr lang="ru-RU" dirty="0"/>
+          </a:p>
+          <a:p>
+            <a:pPr lvl="1"/>
+            <a:r>
+              <a:rPr lang="ru-RU" dirty="0"/>
+              <a:t>Область конкуренции за среду.</a:t>
+            </a:r>
+          </a:p>
+          <a:p>
+            <a:pPr lvl="1"/>
+            <a:r>
+              <a:rPr lang="ru-RU" dirty="0"/>
+              <a:t>Коммутатор </a:t>
+            </a:r>
+            <a:r>
+              <a:rPr lang="ru-RU" b="1" dirty="0"/>
+              <a:t>делит</a:t>
+            </a:r>
+            <a:r>
+              <a:rPr lang="ru-RU" dirty="0"/>
+              <a:t> домены коллизий (1 порт = 1 домен).</a:t>
+            </a:r>
+          </a:p>
+          <a:p>
+            <a:r>
+              <a:rPr lang="ru-RU" b="1" dirty="0" err="1"/>
+              <a:t>Broadcast</a:t>
+            </a:r>
+            <a:r>
+              <a:rPr lang="ru-RU" b="1" dirty="0"/>
+              <a:t> </a:t>
+            </a:r>
+            <a:r>
+              <a:rPr lang="ru-RU" b="1" dirty="0" err="1"/>
+              <a:t>Domain</a:t>
+            </a:r>
+            <a:r>
+              <a:rPr lang="ru-RU" b="1" dirty="0"/>
+              <a:t> (Широковещательный домен):</a:t>
+            </a:r>
+            <a:endParaRPr lang="ru-RU" dirty="0"/>
+          </a:p>
+          <a:p>
+            <a:pPr lvl="1"/>
+            <a:r>
+              <a:rPr lang="ru-RU" dirty="0"/>
+              <a:t>Область распространения широковещательных кадров (L2 </a:t>
+            </a:r>
+            <a:r>
+              <a:rPr lang="ru-RU" dirty="0" err="1"/>
+              <a:t>Broadcast</a:t>
+            </a:r>
+            <a:r>
+              <a:rPr lang="ru-RU" dirty="0"/>
+              <a:t>).</a:t>
+            </a:r>
+          </a:p>
+          <a:p>
+            <a:pPr lvl="1"/>
+            <a:r>
+              <a:rPr lang="ru-RU" dirty="0"/>
+              <a:t>Коммутаторы L2 </a:t>
+            </a:r>
+            <a:r>
+              <a:rPr lang="ru-RU" b="1" dirty="0"/>
+              <a:t>объединяют</a:t>
+            </a:r>
+            <a:r>
+              <a:rPr lang="ru-RU" dirty="0"/>
+              <a:t> порты в один широковещательный домен (разделяется только маршрутизаторами / VLAN).</a:t>
+            </a:r>
+          </a:p>
+          <a:p>
             <a:endParaRPr lang="ru-RU" dirty="0"/>
           </a:p>
         </p:txBody>
       </p:sp>
       <p:pic>
         <p:nvPicPr>
-          <p:cNvPr id="5" name="Рисунок 4"/>
+          <p:cNvPr id="4" name="Рисунок 3"/>
           <p:cNvPicPr>
             <a:picLocks noChangeAspect="1"/>
           </p:cNvPicPr>
@@ -14673,176 +14857,18 @@
         </p:blipFill>
         <p:spPr>
           <a:xfrm>
-            <a:off x="252047" y="2705894"/>
-            <a:ext cx="4444093" cy="2628900"/>
+            <a:off x="8255001" y="1456610"/>
+            <a:ext cx="3467466" cy="5033090"/>
           </a:xfrm>
           <a:prstGeom prst="rect">
             <a:avLst/>
           </a:prstGeom>
         </p:spPr>
       </p:pic>
-      <p:sp>
-        <p:nvSpPr>
-          <p:cNvPr id="6" name="Объект 5"/>
-          <p:cNvSpPr>
-            <a:spLocks noGrp="1"/>
-          </p:cNvSpPr>
-          <p:nvPr>
-            <p:ph idx="1"/>
-          </p:nvPr>
-        </p:nvSpPr>
-        <p:spPr>
-          <a:xfrm>
-            <a:off x="5011615" y="1600200"/>
-            <a:ext cx="6840416" cy="4985238"/>
-          </a:xfrm>
-        </p:spPr>
-        <p:txBody>
-          <a:bodyPr>
-            <a:normAutofit fontScale="85000" lnSpcReduction="10000"/>
-          </a:bodyPr>
-          <a:lstStyle/>
-          <a:p>
-            <a:r>
-              <a:rPr lang="ru-RU" b="1" dirty="0"/>
-              <a:t>Анализ </a:t>
-            </a:r>
-            <a:r>
-              <a:rPr lang="ru-RU" b="1" dirty="0" err="1"/>
-              <a:t>Source</a:t>
-            </a:r>
-            <a:r>
-              <a:rPr lang="ru-RU" b="1" dirty="0"/>
-              <a:t> MAC:</a:t>
-            </a:r>
-            <a:r>
-              <a:rPr lang="ru-RU" dirty="0"/>
-              <a:t> При получении кадра коммутатор считывает адрес источника и сопоставляет его с входящим портом в таблице MAC-адресов (CAM-таблице).</a:t>
-            </a:r>
-          </a:p>
-          <a:p>
-            <a:r>
-              <a:rPr lang="ru-RU" b="1" dirty="0"/>
-              <a:t>Принятие решения по </a:t>
-            </a:r>
-            <a:r>
-              <a:rPr lang="ru-RU" b="1" dirty="0" err="1"/>
-              <a:t>Destination</a:t>
-            </a:r>
-            <a:r>
-              <a:rPr lang="ru-RU" b="1" dirty="0"/>
-              <a:t> MAC:</a:t>
-            </a:r>
-            <a:endParaRPr lang="ru-RU" dirty="0"/>
-          </a:p>
-          <a:p>
-            <a:pPr lvl="1"/>
-            <a:r>
-              <a:rPr lang="ru-RU" i="1" dirty="0"/>
-              <a:t>MAC известен и находится на том же порту:</a:t>
-            </a:r>
-            <a:r>
-              <a:rPr lang="ru-RU" dirty="0"/>
-              <a:t> кадр фильтруется (сбрасывается).</a:t>
-            </a:r>
-          </a:p>
-          <a:p>
-            <a:pPr lvl="1"/>
-            <a:r>
-              <a:rPr lang="ru-RU" i="1" dirty="0"/>
-              <a:t>MAC известен и находится на другом порту:</a:t>
-            </a:r>
-            <a:r>
-              <a:rPr lang="ru-RU" dirty="0"/>
-              <a:t> кадр отправляется строго в этот порт (</a:t>
-            </a:r>
-            <a:r>
-              <a:rPr lang="ru-RU" dirty="0" err="1"/>
-              <a:t>Forwarding</a:t>
-            </a:r>
-            <a:r>
-              <a:rPr lang="ru-RU" dirty="0"/>
-              <a:t>).</a:t>
-            </a:r>
-          </a:p>
-          <a:p>
-            <a:pPr lvl="1"/>
-            <a:r>
-              <a:rPr lang="ru-RU" i="1" dirty="0"/>
-              <a:t>MAC неизвестен (</a:t>
-            </a:r>
-            <a:r>
-              <a:rPr lang="ru-RU" i="1" dirty="0" err="1"/>
-              <a:t>Unknown</a:t>
-            </a:r>
-            <a:r>
-              <a:rPr lang="ru-RU" i="1" dirty="0"/>
-              <a:t> </a:t>
-            </a:r>
-            <a:r>
-              <a:rPr lang="ru-RU" i="1" dirty="0" err="1"/>
-              <a:t>Unicast</a:t>
-            </a:r>
-            <a:r>
-              <a:rPr lang="ru-RU" i="1" dirty="0"/>
-              <a:t>) или </a:t>
-            </a:r>
-            <a:r>
-              <a:rPr lang="ru-RU" i="1" dirty="0" err="1"/>
-              <a:t>Broadcast</a:t>
-            </a:r>
-            <a:r>
-              <a:rPr lang="ru-RU" i="1" dirty="0"/>
-              <a:t>:</a:t>
-            </a:r>
-            <a:r>
-              <a:rPr lang="ru-RU" dirty="0"/>
-              <a:t> кадр рассылается во все порты, кроме входящего (</a:t>
-            </a:r>
-            <a:r>
-              <a:rPr lang="ru-RU" dirty="0" err="1"/>
-              <a:t>Flooding</a:t>
-            </a:r>
-            <a:r>
-              <a:rPr lang="ru-RU" dirty="0"/>
-              <a:t>).</a:t>
-            </a:r>
-          </a:p>
-          <a:p>
-            <a:r>
-              <a:rPr lang="ru-RU" b="1" dirty="0"/>
-              <a:t>Старение записей (</a:t>
-            </a:r>
-            <a:r>
-              <a:rPr lang="ru-RU" b="1" dirty="0" err="1"/>
-              <a:t>Aging</a:t>
-            </a:r>
-            <a:r>
-              <a:rPr lang="ru-RU" b="1" dirty="0"/>
-              <a:t> </a:t>
-            </a:r>
-            <a:r>
-              <a:rPr lang="ru-RU" b="1" dirty="0" err="1"/>
-              <a:t>Time</a:t>
-            </a:r>
-            <a:r>
-              <a:rPr lang="ru-RU" b="1" dirty="0"/>
-              <a:t>):</a:t>
-            </a:r>
-            <a:r>
-              <a:rPr lang="ru-RU" dirty="0"/>
-              <a:t> Каждая запись в таблице снабжена таймером; при отсутствии трафика от узла запись удаляется для корректной обработки миграции устройств.</a:t>
-            </a:r>
-          </a:p>
-          <a:p>
-            <a:endParaRPr lang="ru-RU" dirty="0"/>
-          </a:p>
-        </p:txBody>
-      </p:sp>
     </p:spTree>
     <p:extLst>
       <p:ext uri="{BB962C8B-B14F-4D97-AF65-F5344CB8AC3E}">
-        <p14:creationId xmlns:p14="http://schemas.microsoft.com/office/powerpoint/2010/main" val="4245425795"/>
+        <p14:creationId xmlns:p14="http://schemas.microsoft.com/office/powerpoint/2010/main" val="189263405"/>
       </p:ext>
     </p:extLst>
   </p:cSld>
@@ -14878,35 +14904,6 @@
       </p:grpSpPr>
       <p:sp>
         <p:nvSpPr>
-          <p:cNvPr id="2" name="Заголовок 1"/>
-          <p:cNvSpPr>
-            <a:spLocks noGrp="1"/>
-          </p:cNvSpPr>
-          <p:nvPr>
-            <p:ph type="title"/>
-          </p:nvPr>
-        </p:nvSpPr>
-        <p:spPr/>
-        <p:txBody>
-          <a:bodyPr>
-            <a:normAutofit/>
-          </a:bodyPr>
-          <a:lstStyle/>
-          <a:p>
-            <a:r>
-              <a:rPr lang="ru-RU" b="1" dirty="0"/>
-              <a:t>Домены коллизий и широковещательные </a:t>
-            </a:r>
-            <a:r>
-              <a:rPr lang="ru-RU" b="1" dirty="0" smtClean="0"/>
-              <a:t>домены</a:t>
-            </a:r>
-            <a:endParaRPr lang="ru-RU" dirty="0"/>
-          </a:p>
-        </p:txBody>
-      </p:sp>
-      <p:sp>
-        <p:nvSpPr>
           <p:cNvPr id="3" name="Объект 2"/>
           <p:cNvSpPr>
             <a:spLocks noGrp="1"/>
@@ -14917,17 +14914,60 @@
         </p:nvSpPr>
         <p:spPr>
           <a:xfrm>
-            <a:off x="1141412" y="2187644"/>
-            <a:ext cx="6732587" cy="4302056"/>
+            <a:off x="1141412" y="798756"/>
+            <a:ext cx="9905999" cy="5575667"/>
           </a:xfrm>
         </p:spPr>
         <p:txBody>
           <a:bodyPr>
-            <a:normAutofit fontScale="92500"/>
+            <a:normAutofit lnSpcReduction="10000"/>
           </a:bodyPr>
           <a:lstStyle/>
           <a:p>
             <a:r>
+              <a:rPr lang="ru-RU" b="1" dirty="0"/>
+              <a:t>Коммутатор (</a:t>
+            </a:r>
+            <a:r>
+              <a:rPr lang="ru-RU" b="1" dirty="0" err="1"/>
+              <a:t>Switch</a:t>
+            </a:r>
+            <a:r>
+              <a:rPr lang="ru-RU" b="1" dirty="0"/>
+              <a:t> / </a:t>
+            </a:r>
+            <a:r>
+              <a:rPr lang="ru-RU" b="1" dirty="0" err="1"/>
+              <a:t>Bridge</a:t>
+            </a:r>
+            <a:r>
+              <a:rPr lang="ru-RU" b="1" dirty="0"/>
+              <a:t>):</a:t>
+            </a:r>
+            <a:r>
+              <a:rPr lang="ru-RU" dirty="0"/>
+              <a:t> Устройство уровня L2 OSI. В отличие от концентратора (</a:t>
+            </a:r>
+            <a:r>
+              <a:rPr lang="ru-RU" dirty="0" err="1"/>
+              <a:t>Hub</a:t>
+            </a:r>
+            <a:r>
+              <a:rPr lang="ru-RU" dirty="0"/>
+              <a:t>, L1), коммутатор анализирует кадры, изолирует коллизии и направляет трафик адресно</a:t>
+            </a:r>
+            <a:r>
+              <a:rPr lang="ru-RU" dirty="0" smtClean="0"/>
+              <a:t>.</a:t>
+            </a:r>
+            <a:endParaRPr lang="en-US" dirty="0" smtClean="0"/>
+          </a:p>
+          <a:p>
+            <a:r>
+              <a:rPr lang="ru-RU" b="1" dirty="0"/>
+              <a:t>Домен коллизий (</a:t>
+            </a:r>
+            <a:r>
               <a:rPr lang="ru-RU" b="1" dirty="0" err="1"/>
               <a:t>Collision</a:t>
             </a:r>
@@ -14941,33 +14981,54 @@
             </a:r>
             <a:r>
               <a:rPr lang="ru-RU" b="1" dirty="0"/>
-              <a:t> (Домен коллизий):</a:t>
-            </a:r>
-            <a:endParaRPr lang="ru-RU" dirty="0"/>
+              <a:t>):</a:t>
+            </a:r>
+            <a:r>
+              <a:rPr lang="ru-RU" dirty="0"/>
+              <a:t> Логическая или физическая часть сети, где кадры могут сталкиваться при одновременной передаче</a:t>
+            </a:r>
+            <a:r>
+              <a:rPr lang="ru-RU" dirty="0" smtClean="0"/>
+              <a:t>.</a:t>
+            </a:r>
+            <a:endParaRPr lang="en-US" dirty="0" smtClean="0"/>
           </a:p>
           <a:p>
             <a:pPr lvl="1"/>
             <a:r>
               <a:rPr lang="ru-RU" dirty="0"/>
-              <a:t>Область конкуренции за среду.</a:t>
+              <a:t>Концентратор (</a:t>
+            </a:r>
+            <a:r>
+              <a:rPr lang="ru-RU" dirty="0" err="1"/>
+              <a:t>Hub</a:t>
+            </a:r>
+            <a:r>
+              <a:rPr lang="ru-RU" dirty="0"/>
+              <a:t>) объединяет устройства в один домен коллизий.</a:t>
             </a:r>
           </a:p>
           <a:p>
             <a:pPr lvl="1"/>
             <a:r>
               <a:rPr lang="ru-RU" dirty="0"/>
-              <a:t>Коммутатор </a:t>
-            </a:r>
+              <a:t>Коммутатор (</a:t>
+            </a:r>
+            <a:r>
+              <a:rPr lang="ru-RU" dirty="0" err="1"/>
+              <a:t>Switch</a:t>
+            </a:r>
+            <a:r>
+              <a:rPr lang="ru-RU" dirty="0"/>
+              <a:t>) делит сеть на отдельные домены коллизий (каждый порт = отдельный домен).</a:t>
+            </a:r>
+            <a:endParaRPr lang="en-US" dirty="0" smtClean="0"/>
+          </a:p>
+          <a:p>
             <a:r>
               <a:rPr lang="ru-RU" b="1" dirty="0"/>
-              <a:t>делит</a:t>
-            </a:r>
-            <a:r>
-              <a:rPr lang="ru-RU" dirty="0"/>
-              <a:t> домены коллизий (1 порт = 1 домен).</a:t>
-            </a:r>
-          </a:p>
-          <a:p>
+              <a:t>Широковещательный домен (</a:t>
+            </a:r>
             <a:r>
               <a:rPr lang="ru-RU" b="1" dirty="0" err="1"/>
               <a:t>Broadcast</a:t>
@@ -14982,15 +15043,43 @@
             </a:r>
             <a:r>
               <a:rPr lang="ru-RU" b="1" dirty="0"/>
-              <a:t> (Широковещательный домен):</a:t>
-            </a:r>
-            <a:endParaRPr lang="ru-RU" dirty="0"/>
+              <a:t>):</a:t>
+            </a:r>
+            <a:r>
+              <a:rPr lang="ru-RU" dirty="0"/>
+              <a:t> Область сети, в пределах которой широковещательный </a:t>
+            </a:r>
+            <a:r>
+              <a:rPr lang="ru-RU" dirty="0" smtClean="0"/>
+              <a:t>кадр</a:t>
+            </a:r>
+            <a:r>
+              <a:rPr lang="en-US" dirty="0" smtClean="0"/>
+              <a:t> </a:t>
+            </a:r>
+            <a:r>
+              <a:rPr lang="ru-RU" dirty="0"/>
+              <a:t>(</a:t>
+            </a:r>
+            <a:r>
+              <a:rPr lang="ru-RU" dirty="0" err="1"/>
+              <a:t>Dst</a:t>
+            </a:r>
+            <a:r>
+              <a:rPr lang="ru-RU" dirty="0"/>
+              <a:t> MAC: FF:FF:FF:FF:FF:FF) доставляется всем узлам</a:t>
+            </a:r>
+            <a:r>
+              <a:rPr lang="ru-RU" dirty="0" smtClean="0"/>
+              <a:t>.</a:t>
+            </a:r>
+            <a:endParaRPr lang="en-US" dirty="0" smtClean="0"/>
           </a:p>
           <a:p>
             <a:pPr lvl="1"/>
             <a:r>
               <a:rPr lang="ru-RU" dirty="0"/>
-              <a:t>Область распространения широковещательных кадров (L2 </a:t>
+              <a:t>Коммутаторы L2 не разделяют широковещательные домены (пересылают </a:t>
             </a:r>
             <a:r>
               <a:rPr lang="ru-RU" dirty="0" err="1"/>
@@ -14998,22 +15087,7 @@
             </a:r>
             <a:r>
               <a:rPr lang="ru-RU" dirty="0"/>
-              <a:t>).</a:t>
-            </a:r>
-          </a:p>
-          <a:p>
-            <a:pPr lvl="1"/>
-            <a:r>
-              <a:rPr lang="ru-RU" dirty="0"/>
-              <a:t>Коммутаторы L2 </a:t>
-            </a:r>
-            <a:r>
-              <a:rPr lang="ru-RU" b="1" dirty="0"/>
-              <a:t>объединяют</a:t>
-            </a:r>
-            <a:r>
-              <a:rPr lang="ru-RU" dirty="0"/>
-              <a:t> порты в один широковещательный домен (разделяется только маршрутизаторами / VLAN).</a:t>
+              <a:t> во все порты, кроме порта-источника).</a:t>
             </a:r>
           </a:p>
           <a:p>
@@ -15021,34 +15095,10 @@
           </a:p>
         </p:txBody>
       </p:sp>
-      <p:pic>
-        <p:nvPicPr>
-          <p:cNvPr id="4" name="Рисунок 3"/>
-          <p:cNvPicPr>
-            <a:picLocks noChangeAspect="1"/>
-          </p:cNvPicPr>
-          <p:nvPr/>
-        </p:nvPicPr>
-        <p:blipFill>
-          <a:blip r:embed="rId2"/>
-          <a:stretch>
-            <a:fillRect/>
-          </a:stretch>
-        </p:blipFill>
-        <p:spPr>
-          <a:xfrm>
-            <a:off x="8255001" y="1456610"/>
-            <a:ext cx="3467466" cy="5033090"/>
-          </a:xfrm>
-          <a:prstGeom prst="rect">
-            <a:avLst/>
-          </a:prstGeom>
-        </p:spPr>
-      </p:pic>
     </p:spTree>
     <p:extLst>
       <p:ext uri="{BB962C8B-B14F-4D97-AF65-F5344CB8AC3E}">
-        <p14:creationId xmlns:p14="http://schemas.microsoft.com/office/powerpoint/2010/main" val="189263405"/>
+        <p14:creationId xmlns:p14="http://schemas.microsoft.com/office/powerpoint/2010/main" val="399563517"/>
       </p:ext>
     </p:extLst>
   </p:cSld>
@@ -15292,22 +15342,9 @@
           <a:lstStyle/>
           <a:p>
             <a:r>
-              <a:rPr lang="ru-RU" b="1" dirty="0"/>
-              <a:t>Схемы разводки и </a:t>
-            </a:r>
-            <a:r>
-              <a:rPr lang="ru-RU" b="1" dirty="0" err="1"/>
-              <a:t>Auto</a:t>
-            </a:r>
-            <a:r>
-              <a:rPr lang="ru-RU" b="1" dirty="0"/>
-              <a:t> </a:t>
-            </a:r>
-            <a:r>
-              <a:rPr lang="ru-RU" b="1" dirty="0" smtClean="0"/>
-              <a:t>MDI-X</a:t>
-            </a:r>
-            <a:endParaRPr lang="ru-RU" dirty="0"/>
+              <a:rPr lang="af-ZA" b="1" dirty="0"/>
+              <a:t>MDI/MDIX, Auto MDI-X</a:t>
+            </a:r>
           </a:p>
         </p:txBody>
       </p:sp>
@@ -15503,8 +15540,8 @@
         </p:blipFill>
         <p:spPr>
           <a:xfrm>
-            <a:off x="7519116" y="2347910"/>
-            <a:ext cx="4029946" cy="3471863"/>
+            <a:off x="6840392" y="1608992"/>
+            <a:ext cx="5499978" cy="4738319"/>
           </a:xfrm>
           <a:prstGeom prst="rect">
             <a:avLst/>
